--- a/nedp_deck/v4/Slide08_Strategic_4C_STP_4P.pptx
+++ b/nedp_deck/v4/Slide08_Strategic_4C_STP_4P.pptx
@@ -6,6 +6,7 @@
   </p:sldMasterIdLst>
   <p:sldIdLst>
     <p:sldId id="263" r:id="rId14"/>
+    <p:sldId id="264" r:id="rId15"/>
   </p:sldIdLst>
   <p:sldSz cx="12192000" cy="6858000" type="screen4x3"/>
   <p:notesSz cx="6858000" cy="9144000"/>
@@ -3368,110 +3369,1462 @@
                 </a:solidFill>
                 <a:latin typeface="Arial"/>
               </a:rPr>
-              <a:t>08 / 18</a:t>
+              <a:t>08 / 19</a:t>
             </a:r>
           </a:p>
         </p:txBody>
       </p:sp>
-      <p:sp>
-        <p:nvSpPr>
-          <p:cNvPr id="10" name="Rectangle 9"/>
-          <p:cNvSpPr/>
+      <p:graphicFrame>
+        <p:nvGraphicFramePr>
+          <p:cNvPr id="10" name="Table 9"/>
+          <p:cNvGraphicFramePr>
+            <a:graphicFrameLocks noGrp="1"/>
+          </p:cNvGraphicFramePr>
           <p:nvPr/>
-        </p:nvSpPr>
+        </p:nvGraphicFramePr>
+        <p:xfrm>
+          <a:off x="533400" y="1504950"/>
+          <a:ext cx="11125200" cy="4933950"/>
+        </p:xfrm>
+        <a:graphic>
+          <a:graphicData uri="http://schemas.openxmlformats.org/drawingml/2006/table">
+            <a:tbl>
+              <a:tblPr firstRow="0" bandRow="0">
+                <a:tableStyleId>{5940675A-B579-460E-94D1-54222C63F5DA}</a:tableStyleId>
+              </a:tblPr>
+              <a:tblGrid>
+                <a:gridCol w="762000"/>
+                <a:gridCol w="1333500"/>
+                <a:gridCol w="3143250"/>
+                <a:gridCol w="5886450"/>
+              </a:tblGrid>
+              <a:tr h="266700">
+                <a:tc>
+                  <a:txBody>
+                    <a:bodyPr wrap="square"/>
+                    <a:lstStyle/>
+                    <a:p>
+                      <a:pPr algn="l">
+                        <a:defRPr sz="950"/>
+                      </a:pPr>
+                      <a:r>
+                        <a:rPr sz="950" b="1">
+                          <a:solidFill>
+                            <a:srgbClr val="11181C"/>
+                          </a:solidFill>
+                          <a:latin typeface="Arial"/>
+                        </a:rPr>
+                        <a:t>Step</a:t>
+                      </a:r>
+                      <a:endParaRPr sz="950"/>
+                    </a:p>
+                  </a:txBody>
+                  <a:tcPr marL="50800" marR="50800" marT="25400" marB="25400" anchor="ctr">
+                    <a:lnL w="9525">
+                      <a:solidFill>
+                        <a:srgbClr val="D7DBDF"/>
+                      </a:solidFill>
+                    </a:lnL>
+                    <a:lnR w="9525">
+                      <a:solidFill>
+                        <a:srgbClr val="D7DBDF"/>
+                      </a:solidFill>
+                    </a:lnR>
+                    <a:lnT w="9525">
+                      <a:solidFill>
+                        <a:srgbClr val="D7DBDF"/>
+                      </a:solidFill>
+                    </a:lnT>
+                    <a:lnB w="9525">
+                      <a:solidFill>
+                        <a:srgbClr val="D7DBDF"/>
+                      </a:solidFill>
+                    </a:lnB>
+                    <a:solidFill>
+                      <a:srgbClr val="F0F2F4"/>
+                    </a:solidFill>
+                  </a:tcPr>
+                </a:tc>
+                <a:tc>
+                  <a:txBody>
+                    <a:bodyPr wrap="square"/>
+                    <a:lstStyle/>
+                    <a:p>
+                      <a:pPr algn="l">
+                        <a:defRPr sz="950"/>
+                      </a:pPr>
+                      <a:r>
+                        <a:rPr sz="950" b="1">
+                          <a:solidFill>
+                            <a:srgbClr val="11181C"/>
+                          </a:solidFill>
+                          <a:latin typeface="Arial"/>
+                        </a:rPr>
+                        <a:t>Item</a:t>
+                      </a:r>
+                      <a:endParaRPr sz="950"/>
+                    </a:p>
+                  </a:txBody>
+                  <a:tcPr marL="50800" marR="50800" marT="25400" marB="25400" anchor="ctr">
+                    <a:lnL w="9525">
+                      <a:solidFill>
+                        <a:srgbClr val="D7DBDF"/>
+                      </a:solidFill>
+                    </a:lnL>
+                    <a:lnR w="9525">
+                      <a:solidFill>
+                        <a:srgbClr val="D7DBDF"/>
+                      </a:solidFill>
+                    </a:lnR>
+                    <a:lnT w="9525">
+                      <a:solidFill>
+                        <a:srgbClr val="D7DBDF"/>
+                      </a:solidFill>
+                    </a:lnT>
+                    <a:lnB w="9525">
+                      <a:solidFill>
+                        <a:srgbClr val="D7DBDF"/>
+                      </a:solidFill>
+                    </a:lnB>
+                    <a:solidFill>
+                      <a:srgbClr val="F0F2F4"/>
+                    </a:solidFill>
+                  </a:tcPr>
+                </a:tc>
+                <a:tc>
+                  <a:txBody>
+                    <a:bodyPr wrap="square"/>
+                    <a:lstStyle/>
+                    <a:p>
+                      <a:pPr algn="l">
+                        <a:defRPr sz="950"/>
+                      </a:pPr>
+                      <a:r>
+                        <a:rPr sz="950" b="1">
+                          <a:solidFill>
+                            <a:srgbClr val="11181C"/>
+                          </a:solidFill>
+                          <a:latin typeface="Arial"/>
+                        </a:rPr>
+                        <a:t>Key point</a:t>
+                      </a:r>
+                      <a:endParaRPr sz="950"/>
+                    </a:p>
+                  </a:txBody>
+                  <a:tcPr marL="50800" marR="50800" marT="25400" marB="25400" anchor="ctr">
+                    <a:lnL w="9525">
+                      <a:solidFill>
+                        <a:srgbClr val="D7DBDF"/>
+                      </a:solidFill>
+                    </a:lnL>
+                    <a:lnR w="9525">
+                      <a:solidFill>
+                        <a:srgbClr val="D7DBDF"/>
+                      </a:solidFill>
+                    </a:lnR>
+                    <a:lnT w="9525">
+                      <a:solidFill>
+                        <a:srgbClr val="D7DBDF"/>
+                      </a:solidFill>
+                    </a:lnT>
+                    <a:lnB w="9525">
+                      <a:solidFill>
+                        <a:srgbClr val="D7DBDF"/>
+                      </a:solidFill>
+                    </a:lnB>
+                    <a:solidFill>
+                      <a:srgbClr val="F0F2F4"/>
+                    </a:solidFill>
+                  </a:tcPr>
+                </a:tc>
+                <a:tc>
+                  <a:txBody>
+                    <a:bodyPr wrap="square"/>
+                    <a:lstStyle/>
+                    <a:p>
+                      <a:pPr algn="l">
+                        <a:defRPr sz="950"/>
+                      </a:pPr>
+                      <a:r>
+                        <a:rPr sz="950" b="1">
+                          <a:solidFill>
+                            <a:srgbClr val="11181C"/>
+                          </a:solidFill>
+                          <a:latin typeface="Arial"/>
+                        </a:rPr>
+                        <a:t>Supporting data</a:t>
+                      </a:r>
+                      <a:endParaRPr sz="950"/>
+                    </a:p>
+                  </a:txBody>
+                  <a:tcPr marL="50800" marR="50800" marT="25400" marB="25400" anchor="ctr">
+                    <a:lnL w="9525">
+                      <a:solidFill>
+                        <a:srgbClr val="D7DBDF"/>
+                      </a:solidFill>
+                    </a:lnL>
+                    <a:lnR w="9525">
+                      <a:solidFill>
+                        <a:srgbClr val="D7DBDF"/>
+                      </a:solidFill>
+                    </a:lnR>
+                    <a:lnT w="9525">
+                      <a:solidFill>
+                        <a:srgbClr val="D7DBDF"/>
+                      </a:solidFill>
+                    </a:lnT>
+                    <a:lnB w="9525">
+                      <a:solidFill>
+                        <a:srgbClr val="D7DBDF"/>
+                      </a:solidFill>
+                    </a:lnB>
+                    <a:solidFill>
+                      <a:srgbClr val="F0F2F4"/>
+                    </a:solidFill>
+                  </a:tcPr>
+                </a:tc>
+              </a:tr>
+              <a:tr h="666750">
+                <a:tc rowSpan="4">
+                  <a:txBody>
+                    <a:bodyPr wrap="square"/>
+                    <a:lstStyle/>
+                    <a:p>
+                      <a:pPr algn="ctr">
+                        <a:defRPr sz="1200"/>
+                      </a:pPr>
+                      <a:r>
+                        <a:rPr sz="1200" b="1">
+                          <a:solidFill>
+                            <a:srgbClr val="076932"/>
+                          </a:solidFill>
+                          <a:latin typeface="Arial"/>
+                        </a:rPr>
+                        <a:t>4C</a:t>
+                      </a:r>
+                      <a:endParaRPr sz="1200"/>
+                    </a:p>
+                  </a:txBody>
+                  <a:tcPr marL="50800" marR="50800" marT="25400" marB="25400" anchor="ctr">
+                    <a:lnL w="9525">
+                      <a:solidFill>
+                        <a:srgbClr val="E6E8EB"/>
+                      </a:solidFill>
+                    </a:lnL>
+                    <a:lnR w="9525">
+                      <a:solidFill>
+                        <a:srgbClr val="E6E8EB"/>
+                      </a:solidFill>
+                    </a:lnR>
+                    <a:lnT w="9525">
+                      <a:solidFill>
+                        <a:srgbClr val="E6E8EB"/>
+                      </a:solidFill>
+                    </a:lnT>
+                    <a:lnB w="9525">
+                      <a:solidFill>
+                        <a:srgbClr val="E6E8EB"/>
+                      </a:solidFill>
+                    </a:lnB>
+                    <a:noFill/>
+                  </a:tcPr>
+                </a:tc>
+                <a:tc>
+                  <a:txBody>
+                    <a:bodyPr wrap="square"/>
+                    <a:lstStyle/>
+                    <a:p>
+                      <a:pPr algn="l">
+                        <a:defRPr sz="1050"/>
+                      </a:pPr>
+                      <a:r>
+                        <a:rPr sz="1050" b="1">
+                          <a:solidFill>
+                            <a:srgbClr val="11181C"/>
+                          </a:solidFill>
+                          <a:latin typeface="Arial"/>
+                        </a:rPr>
+                        <a:t>Change</a:t>
+                      </a:r>
+                      <a:endParaRPr sz="1050"/>
+                    </a:p>
+                  </a:txBody>
+                  <a:tcPr marL="50800" marR="50800" marT="25400" marB="25400" anchor="ctr">
+                    <a:lnL w="9525">
+                      <a:solidFill>
+                        <a:srgbClr val="E6E8EB"/>
+                      </a:solidFill>
+                    </a:lnL>
+                    <a:lnR w="9525">
+                      <a:solidFill>
+                        <a:srgbClr val="E6E8EB"/>
+                      </a:solidFill>
+                    </a:lnR>
+                    <a:lnT w="9525">
+                      <a:solidFill>
+                        <a:srgbClr val="E6E8EB"/>
+                      </a:solidFill>
+                    </a:lnT>
+                    <a:lnB w="9525">
+                      <a:solidFill>
+                        <a:srgbClr val="E6E8EB"/>
+                      </a:solidFill>
+                    </a:lnB>
+                    <a:noFill/>
+                  </a:tcPr>
+                </a:tc>
+                <a:tc>
+                  <a:txBody>
+                    <a:bodyPr wrap="square"/>
+                    <a:lstStyle/>
+                    <a:p>
+                      <a:pPr algn="l">
+                        <a:defRPr sz="1050"/>
+                      </a:pPr>
+                      <a:r>
+                        <a:rPr sz="1050" b="1">
+                          <a:solidFill>
+                            <a:srgbClr val="11181C"/>
+                          </a:solidFill>
+                          <a:latin typeface="Arial"/>
+                        </a:rPr>
+                        <a:t>HYVA has left; value sits in Medium + Heavy</a:t>
+                      </a:r>
+                      <a:endParaRPr sz="1050"/>
+                    </a:p>
+                  </a:txBody>
+                  <a:tcPr marL="50800" marR="50800" marT="25400" marB="25400" anchor="ctr">
+                    <a:lnL w="9525">
+                      <a:solidFill>
+                        <a:srgbClr val="E6E8EB"/>
+                      </a:solidFill>
+                    </a:lnL>
+                    <a:lnR w="9525">
+                      <a:solidFill>
+                        <a:srgbClr val="E6E8EB"/>
+                      </a:solidFill>
+                    </a:lnR>
+                    <a:lnT w="9525">
+                      <a:solidFill>
+                        <a:srgbClr val="E6E8EB"/>
+                      </a:solidFill>
+                    </a:lnT>
+                    <a:lnB w="9525">
+                      <a:solidFill>
+                        <a:srgbClr val="E6E8EB"/>
+                      </a:solidFill>
+                    </a:lnB>
+                    <a:noFill/>
+                  </a:tcPr>
+                </a:tc>
+                <a:tc>
+                  <a:txBody>
+                    <a:bodyPr wrap="square"/>
+                    <a:lstStyle/>
+                    <a:p>
+                      <a:pPr algn="l">
+                        <a:defRPr sz="1000"/>
+                      </a:pPr>
+                      <a:r>
+                        <a:rPr sz="1000" b="0">
+                          <a:solidFill>
+                            <a:srgbClr val="11181C"/>
+                          </a:solidFill>
+                          <a:latin typeface="Arial"/>
+                        </a:rPr>
+                        <a:t>Triatra has no crane brand since HYVA stopped. Medium + Heavy = 41% of units, 64% of value (2023 – 2026). Heavy units 12 → 17 → 35 (2023 – 2025).</a:t>
+                      </a:r>
+                      <a:endParaRPr sz="1000"/>
+                    </a:p>
+                  </a:txBody>
+                  <a:tcPr marL="50800" marR="50800" marT="25400" marB="25400" anchor="ctr">
+                    <a:lnL w="9525">
+                      <a:solidFill>
+                        <a:srgbClr val="E6E8EB"/>
+                      </a:solidFill>
+                    </a:lnL>
+                    <a:lnR w="9525">
+                      <a:solidFill>
+                        <a:srgbClr val="E6E8EB"/>
+                      </a:solidFill>
+                    </a:lnR>
+                    <a:lnT w="9525">
+                      <a:solidFill>
+                        <a:srgbClr val="E6E8EB"/>
+                      </a:solidFill>
+                    </a:lnT>
+                    <a:lnB w="9525">
+                      <a:solidFill>
+                        <a:srgbClr val="E6E8EB"/>
+                      </a:solidFill>
+                    </a:lnB>
+                    <a:noFill/>
+                  </a:tcPr>
+                </a:tc>
+              </a:tr>
+              <a:tr h="666750">
+                <a:tc vMerge="1">
+                  <a:txBody>
+                    <a:bodyPr/>
+                    <a:lstStyle/>
+                    <a:p/>
+                  </a:txBody>
+                  <a:tcPr>
+                    <a:lnL w="9525">
+                      <a:solidFill>
+                        <a:srgbClr val="E6E8EB"/>
+                      </a:solidFill>
+                    </a:lnL>
+                    <a:lnR w="9525">
+                      <a:solidFill>
+                        <a:srgbClr val="E6E8EB"/>
+                      </a:solidFill>
+                    </a:lnR>
+                    <a:lnT w="9525">
+                      <a:solidFill>
+                        <a:srgbClr val="E6E8EB"/>
+                      </a:solidFill>
+                    </a:lnT>
+                    <a:lnB w="9525">
+                      <a:solidFill>
+                        <a:srgbClr val="E6E8EB"/>
+                      </a:solidFill>
+                    </a:lnB>
+                  </a:tcPr>
+                </a:tc>
+                <a:tc>
+                  <a:txBody>
+                    <a:bodyPr wrap="square"/>
+                    <a:lstStyle/>
+                    <a:p>
+                      <a:pPr algn="l">
+                        <a:defRPr sz="1050"/>
+                      </a:pPr>
+                      <a:r>
+                        <a:rPr sz="1050" b="1">
+                          <a:solidFill>
+                            <a:srgbClr val="11181C"/>
+                          </a:solidFill>
+                          <a:latin typeface="Arial"/>
+                        </a:rPr>
+                        <a:t>Competitor</a:t>
+                      </a:r>
+                      <a:endParaRPr sz="1050"/>
+                    </a:p>
+                  </a:txBody>
+                  <a:tcPr marL="50800" marR="50800" marT="25400" marB="25400" anchor="ctr">
+                    <a:lnL w="9525">
+                      <a:solidFill>
+                        <a:srgbClr val="E6E8EB"/>
+                      </a:solidFill>
+                    </a:lnL>
+                    <a:lnR w="9525">
+                      <a:solidFill>
+                        <a:srgbClr val="E6E8EB"/>
+                      </a:solidFill>
+                    </a:lnR>
+                    <a:lnT w="9525">
+                      <a:solidFill>
+                        <a:srgbClr val="E6E8EB"/>
+                      </a:solidFill>
+                    </a:lnT>
+                    <a:lnB w="9525">
+                      <a:solidFill>
+                        <a:srgbClr val="E6E8EB"/>
+                      </a:solidFill>
+                    </a:lnB>
+                    <a:noFill/>
+                  </a:tcPr>
+                </a:tc>
+                <a:tc>
+                  <a:txBody>
+                    <a:bodyPr wrap="square"/>
+                    <a:lstStyle/>
+                    <a:p>
+                      <a:pPr algn="l">
+                        <a:defRPr sz="1050"/>
+                      </a:pPr>
+                      <a:r>
+                        <a:rPr sz="1050" b="1">
+                          <a:solidFill>
+                            <a:srgbClr val="11181C"/>
+                          </a:solidFill>
+                          <a:latin typeface="Arial"/>
+                        </a:rPr>
+                        <a:t>Two leaders, one per class</a:t>
+                      </a:r>
+                      <a:endParaRPr sz="1050"/>
+                    </a:p>
+                  </a:txBody>
+                  <a:tcPr marL="50800" marR="50800" marT="25400" marB="25400" anchor="ctr">
+                    <a:lnL w="9525">
+                      <a:solidFill>
+                        <a:srgbClr val="E6E8EB"/>
+                      </a:solidFill>
+                    </a:lnL>
+                    <a:lnR w="9525">
+                      <a:solidFill>
+                        <a:srgbClr val="E6E8EB"/>
+                      </a:solidFill>
+                    </a:lnR>
+                    <a:lnT w="9525">
+                      <a:solidFill>
+                        <a:srgbClr val="E6E8EB"/>
+                      </a:solidFill>
+                    </a:lnT>
+                    <a:lnB w="9525">
+                      <a:solidFill>
+                        <a:srgbClr val="E6E8EB"/>
+                      </a:solidFill>
+                    </a:lnB>
+                    <a:noFill/>
+                  </a:tcPr>
+                </a:tc>
+                <a:tc>
+                  <a:txBody>
+                    <a:bodyPr wrap="square"/>
+                    <a:lstStyle/>
+                    <a:p>
+                      <a:pPr algn="l">
+                        <a:defRPr sz="1000"/>
+                      </a:pPr>
+                      <a:r>
+                        <a:rPr sz="1000" b="0">
+                          <a:solidFill>
+                            <a:srgbClr val="11181C"/>
+                          </a:solidFill>
+                          <a:latin typeface="Arial"/>
+                        </a:rPr>
+                        <a:t>Medium: Sany Palfinger, 38% of value. Heavy: Palfinger, 66% of value; PK 53002 alone sold 39 of 65 units (2023 – 2026).</a:t>
+                      </a:r>
+                      <a:endParaRPr sz="1000"/>
+                    </a:p>
+                  </a:txBody>
+                  <a:tcPr marL="50800" marR="50800" marT="25400" marB="25400" anchor="ctr">
+                    <a:lnL w="9525">
+                      <a:solidFill>
+                        <a:srgbClr val="E6E8EB"/>
+                      </a:solidFill>
+                    </a:lnL>
+                    <a:lnR w="9525">
+                      <a:solidFill>
+                        <a:srgbClr val="E6E8EB"/>
+                      </a:solidFill>
+                    </a:lnR>
+                    <a:lnT w="9525">
+                      <a:solidFill>
+                        <a:srgbClr val="E6E8EB"/>
+                      </a:solidFill>
+                    </a:lnT>
+                    <a:lnB w="9525">
+                      <a:solidFill>
+                        <a:srgbClr val="E6E8EB"/>
+                      </a:solidFill>
+                    </a:lnB>
+                    <a:noFill/>
+                  </a:tcPr>
+                </a:tc>
+              </a:tr>
+              <a:tr h="666750">
+                <a:tc vMerge="1">
+                  <a:txBody>
+                    <a:bodyPr/>
+                    <a:lstStyle/>
+                    <a:p/>
+                  </a:txBody>
+                  <a:tcPr>
+                    <a:lnL w="9525">
+                      <a:solidFill>
+                        <a:srgbClr val="E6E8EB"/>
+                      </a:solidFill>
+                    </a:lnL>
+                    <a:lnR w="9525">
+                      <a:solidFill>
+                        <a:srgbClr val="E6E8EB"/>
+                      </a:solidFill>
+                    </a:lnR>
+                    <a:lnT w="9525">
+                      <a:solidFill>
+                        <a:srgbClr val="E6E8EB"/>
+                      </a:solidFill>
+                    </a:lnT>
+                    <a:lnB w="9525">
+                      <a:solidFill>
+                        <a:srgbClr val="E6E8EB"/>
+                      </a:solidFill>
+                    </a:lnB>
+                  </a:tcPr>
+                </a:tc>
+                <a:tc>
+                  <a:txBody>
+                    <a:bodyPr wrap="square"/>
+                    <a:lstStyle/>
+                    <a:p>
+                      <a:pPr algn="l">
+                        <a:defRPr sz="1050"/>
+                      </a:pPr>
+                      <a:r>
+                        <a:rPr sz="1050" b="1">
+                          <a:solidFill>
+                            <a:srgbClr val="11181C"/>
+                          </a:solidFill>
+                          <a:latin typeface="Arial"/>
+                        </a:rPr>
+                        <a:t>Customer</a:t>
+                      </a:r>
+                      <a:endParaRPr sz="1050"/>
+                    </a:p>
+                  </a:txBody>
+                  <a:tcPr marL="50800" marR="50800" marT="25400" marB="25400" anchor="ctr">
+                    <a:lnL w="9525">
+                      <a:solidFill>
+                        <a:srgbClr val="E6E8EB"/>
+                      </a:solidFill>
+                    </a:lnL>
+                    <a:lnR w="9525">
+                      <a:solidFill>
+                        <a:srgbClr val="E6E8EB"/>
+                      </a:solidFill>
+                    </a:lnR>
+                    <a:lnT w="9525">
+                      <a:solidFill>
+                        <a:srgbClr val="E6E8EB"/>
+                      </a:solidFill>
+                    </a:lnT>
+                    <a:lnB w="9525">
+                      <a:solidFill>
+                        <a:srgbClr val="E6E8EB"/>
+                      </a:solidFill>
+                    </a:lnB>
+                    <a:noFill/>
+                  </a:tcPr>
+                </a:tc>
+                <a:tc>
+                  <a:txBody>
+                    <a:bodyPr wrap="square"/>
+                    <a:lstStyle/>
+                    <a:p>
+                      <a:pPr algn="l">
+                        <a:defRPr sz="1050"/>
+                      </a:pPr>
+                      <a:r>
+                        <a:rPr sz="1050" b="1">
+                          <a:solidFill>
+                            <a:srgbClr val="11181C"/>
+                          </a:solidFill>
+                          <a:latin typeface="Arial"/>
+                        </a:rPr>
+                        <a:t>Medium buys on price, Heavy buys on quality</a:t>
+                      </a:r>
+                      <a:endParaRPr sz="1050"/>
+                    </a:p>
+                  </a:txBody>
+                  <a:tcPr marL="50800" marR="50800" marT="25400" marB="25400" anchor="ctr">
+                    <a:lnL w="9525">
+                      <a:solidFill>
+                        <a:srgbClr val="E6E8EB"/>
+                      </a:solidFill>
+                    </a:lnL>
+                    <a:lnR w="9525">
+                      <a:solidFill>
+                        <a:srgbClr val="E6E8EB"/>
+                      </a:solidFill>
+                    </a:lnR>
+                    <a:lnT w="9525">
+                      <a:solidFill>
+                        <a:srgbClr val="E6E8EB"/>
+                      </a:solidFill>
+                    </a:lnT>
+                    <a:lnB w="9525">
+                      <a:solidFill>
+                        <a:srgbClr val="E6E8EB"/>
+                      </a:solidFill>
+                    </a:lnB>
+                    <a:noFill/>
+                  </a:tcPr>
+                </a:tc>
+                <a:tc>
+                  <a:txBody>
+                    <a:bodyPr wrap="square"/>
+                    <a:lstStyle/>
+                    <a:p>
+                      <a:pPr algn="l">
+                        <a:defRPr sz="1000"/>
+                      </a:pPr>
+                      <a:r>
+                        <a:rPr sz="1000" b="0">
+                          <a:solidFill>
+                            <a:srgbClr val="11181C"/>
+                          </a:solidFill>
+                          <a:latin typeface="Arial"/>
+                        </a:rPr>
+                        <a:t>China brands take 73% of Medium value; European brands take 85% of Heavy value. 88% go on trucks ≥ 24 t GVW (mining, construction).</a:t>
+                      </a:r>
+                      <a:endParaRPr sz="1000"/>
+                    </a:p>
+                  </a:txBody>
+                  <a:tcPr marL="50800" marR="50800" marT="25400" marB="25400" anchor="ctr">
+                    <a:lnL w="9525">
+                      <a:solidFill>
+                        <a:srgbClr val="E6E8EB"/>
+                      </a:solidFill>
+                    </a:lnL>
+                    <a:lnR w="9525">
+                      <a:solidFill>
+                        <a:srgbClr val="E6E8EB"/>
+                      </a:solidFill>
+                    </a:lnR>
+                    <a:lnT w="9525">
+                      <a:solidFill>
+                        <a:srgbClr val="E6E8EB"/>
+                      </a:solidFill>
+                    </a:lnT>
+                    <a:lnB w="9525">
+                      <a:solidFill>
+                        <a:srgbClr val="E6E8EB"/>
+                      </a:solidFill>
+                    </a:lnB>
+                    <a:noFill/>
+                  </a:tcPr>
+                </a:tc>
+              </a:tr>
+              <a:tr h="666750">
+                <a:tc vMerge="1">
+                  <a:txBody>
+                    <a:bodyPr/>
+                    <a:lstStyle/>
+                    <a:p/>
+                  </a:txBody>
+                  <a:tcPr>
+                    <a:lnL w="9525">
+                      <a:solidFill>
+                        <a:srgbClr val="E6E8EB"/>
+                      </a:solidFill>
+                    </a:lnL>
+                    <a:lnR w="9525">
+                      <a:solidFill>
+                        <a:srgbClr val="E6E8EB"/>
+                      </a:solidFill>
+                    </a:lnR>
+                    <a:lnT w="9525">
+                      <a:solidFill>
+                        <a:srgbClr val="E6E8EB"/>
+                      </a:solidFill>
+                    </a:lnT>
+                    <a:lnB w="9525">
+                      <a:solidFill>
+                        <a:srgbClr val="E6E8EB"/>
+                      </a:solidFill>
+                    </a:lnB>
+                  </a:tcPr>
+                </a:tc>
+                <a:tc>
+                  <a:txBody>
+                    <a:bodyPr wrap="square"/>
+                    <a:lstStyle/>
+                    <a:p>
+                      <a:pPr algn="l">
+                        <a:defRPr sz="1050"/>
+                      </a:pPr>
+                      <a:r>
+                        <a:rPr sz="1050" b="1">
+                          <a:solidFill>
+                            <a:srgbClr val="11181C"/>
+                          </a:solidFill>
+                          <a:latin typeface="Arial"/>
+                        </a:rPr>
+                        <a:t>Company</a:t>
+                      </a:r>
+                      <a:endParaRPr sz="1050"/>
+                    </a:p>
+                  </a:txBody>
+                  <a:tcPr marL="50800" marR="50800" marT="25400" marB="25400" anchor="ctr">
+                    <a:lnL w="9525">
+                      <a:solidFill>
+                        <a:srgbClr val="E6E8EB"/>
+                      </a:solidFill>
+                    </a:lnL>
+                    <a:lnR w="9525">
+                      <a:solidFill>
+                        <a:srgbClr val="E6E8EB"/>
+                      </a:solidFill>
+                    </a:lnR>
+                    <a:lnT w="9525">
+                      <a:solidFill>
+                        <a:srgbClr val="E6E8EB"/>
+                      </a:solidFill>
+                    </a:lnT>
+                    <a:lnB w="9525">
+                      <a:solidFill>
+                        <a:srgbClr val="E6E8EB"/>
+                      </a:solidFill>
+                    </a:lnB>
+                    <a:solidFill>
+                      <a:srgbClr val="E1F9EC"/>
+                    </a:solidFill>
+                  </a:tcPr>
+                </a:tc>
+                <a:tc>
+                  <a:txBody>
+                    <a:bodyPr wrap="square"/>
+                    <a:lstStyle/>
+                    <a:p>
+                      <a:pPr algn="l">
+                        <a:defRPr sz="1050"/>
+                      </a:pPr>
+                      <a:r>
+                        <a:rPr sz="1050" b="1">
+                          <a:solidFill>
+                            <a:srgbClr val="11181C"/>
+                          </a:solidFill>
+                          <a:latin typeface="Arial"/>
+                        </a:rPr>
+                        <a:t>Partner two brands to serve both buyers</a:t>
+                      </a:r>
+                      <a:endParaRPr sz="1050"/>
+                    </a:p>
+                  </a:txBody>
+                  <a:tcPr marL="50800" marR="50800" marT="25400" marB="25400" anchor="ctr">
+                    <a:lnL w="9525">
+                      <a:solidFill>
+                        <a:srgbClr val="E6E8EB"/>
+                      </a:solidFill>
+                    </a:lnL>
+                    <a:lnR w="9525">
+                      <a:solidFill>
+                        <a:srgbClr val="E6E8EB"/>
+                      </a:solidFill>
+                    </a:lnR>
+                    <a:lnT w="9525">
+                      <a:solidFill>
+                        <a:srgbClr val="E6E8EB"/>
+                      </a:solidFill>
+                    </a:lnT>
+                    <a:lnB w="9525">
+                      <a:solidFill>
+                        <a:srgbClr val="E6E8EB"/>
+                      </a:solidFill>
+                    </a:lnB>
+                    <a:solidFill>
+                      <a:srgbClr val="E1F9EC"/>
+                    </a:solidFill>
+                  </a:tcPr>
+                </a:tc>
+                <a:tc>
+                  <a:txBody>
+                    <a:bodyPr wrap="square"/>
+                    <a:lstStyle/>
+                    <a:p>
+                      <a:pPr algn="l">
+                        <a:defRPr sz="1000"/>
+                      </a:pPr>
+                      <a:r>
+                        <a:rPr sz="1000" b="0">
+                          <a:solidFill>
+                            <a:srgbClr val="11181C"/>
+                          </a:solidFill>
+                          <a:latin typeface="Arial"/>
+                        </a:rPr>
+                        <a:t>XCMG for price-oriented buyers. F.lli Ferrari for quality-oriented buyers.</a:t>
+                      </a:r>
+                      <a:endParaRPr sz="1000"/>
+                    </a:p>
+                  </a:txBody>
+                  <a:tcPr marL="50800" marR="50800" marT="25400" marB="25400" anchor="ctr">
+                    <a:lnL w="9525">
+                      <a:solidFill>
+                        <a:srgbClr val="E6E8EB"/>
+                      </a:solidFill>
+                    </a:lnL>
+                    <a:lnR w="9525">
+                      <a:solidFill>
+                        <a:srgbClr val="E6E8EB"/>
+                      </a:solidFill>
+                    </a:lnR>
+                    <a:lnT w="9525">
+                      <a:solidFill>
+                        <a:srgbClr val="E6E8EB"/>
+                      </a:solidFill>
+                    </a:lnT>
+                    <a:lnB w="9525">
+                      <a:solidFill>
+                        <a:srgbClr val="E6E8EB"/>
+                      </a:solidFill>
+                    </a:lnB>
+                    <a:solidFill>
+                      <a:srgbClr val="E1F9EC"/>
+                    </a:solidFill>
+                  </a:tcPr>
+                </a:tc>
+              </a:tr>
+              <a:tr h="666750">
+                <a:tc rowSpan="3">
+                  <a:txBody>
+                    <a:bodyPr wrap="square"/>
+                    <a:lstStyle/>
+                    <a:p>
+                      <a:pPr algn="ctr">
+                        <a:defRPr sz="1200"/>
+                      </a:pPr>
+                      <a:r>
+                        <a:rPr sz="1200" b="1">
+                          <a:solidFill>
+                            <a:srgbClr val="076932"/>
+                          </a:solidFill>
+                          <a:latin typeface="Arial"/>
+                        </a:rPr>
+                        <a:t>STP</a:t>
+                      </a:r>
+                      <a:endParaRPr sz="1200"/>
+                    </a:p>
+                  </a:txBody>
+                  <a:tcPr marL="50800" marR="50800" marT="25400" marB="25400" anchor="ctr">
+                    <a:lnL w="9525">
+                      <a:solidFill>
+                        <a:srgbClr val="E6E8EB"/>
+                      </a:solidFill>
+                    </a:lnL>
+                    <a:lnR w="9525">
+                      <a:solidFill>
+                        <a:srgbClr val="E6E8EB"/>
+                      </a:solidFill>
+                    </a:lnR>
+                    <a:lnT w="9525">
+                      <a:solidFill>
+                        <a:srgbClr val="E6E8EB"/>
+                      </a:solidFill>
+                    </a:lnT>
+                    <a:lnB w="9525">
+                      <a:solidFill>
+                        <a:srgbClr val="E6E8EB"/>
+                      </a:solidFill>
+                    </a:lnB>
+                    <a:noFill/>
+                  </a:tcPr>
+                </a:tc>
+                <a:tc>
+                  <a:txBody>
+                    <a:bodyPr wrap="square"/>
+                    <a:lstStyle/>
+                    <a:p>
+                      <a:pPr algn="l">
+                        <a:defRPr sz="1050"/>
+                      </a:pPr>
+                      <a:r>
+                        <a:rPr sz="1050" b="1">
+                          <a:solidFill>
+                            <a:srgbClr val="11181C"/>
+                          </a:solidFill>
+                          <a:latin typeface="Arial"/>
+                        </a:rPr>
+                        <a:t>Segmentation</a:t>
+                      </a:r>
+                      <a:endParaRPr sz="1050"/>
+                    </a:p>
+                  </a:txBody>
+                  <a:tcPr marL="50800" marR="50800" marT="25400" marB="25400" anchor="ctr">
+                    <a:lnL w="9525">
+                      <a:solidFill>
+                        <a:srgbClr val="E6E8EB"/>
+                      </a:solidFill>
+                    </a:lnL>
+                    <a:lnR w="9525">
+                      <a:solidFill>
+                        <a:srgbClr val="E6E8EB"/>
+                      </a:solidFill>
+                    </a:lnR>
+                    <a:lnT w="9525">
+                      <a:solidFill>
+                        <a:srgbClr val="E6E8EB"/>
+                      </a:solidFill>
+                    </a:lnT>
+                    <a:lnB w="9525">
+                      <a:solidFill>
+                        <a:srgbClr val="E6E8EB"/>
+                      </a:solidFill>
+                    </a:lnB>
+                    <a:noFill/>
+                  </a:tcPr>
+                </a:tc>
+                <a:tc>
+                  <a:txBody>
+                    <a:bodyPr wrap="square"/>
+                    <a:lstStyle/>
+                    <a:p>
+                      <a:pPr algn="l">
+                        <a:defRPr sz="1050"/>
+                      </a:pPr>
+                      <a:r>
+                        <a:rPr sz="1050" b="1">
+                          <a:solidFill>
+                            <a:srgbClr val="11181C"/>
+                          </a:solidFill>
+                          <a:latin typeface="Arial"/>
+                        </a:rPr>
+                        <a:t>Two classes, ten 5-tm tiers</a:t>
+                      </a:r>
+                      <a:endParaRPr sz="1050"/>
+                    </a:p>
+                  </a:txBody>
+                  <a:tcPr marL="50800" marR="50800" marT="25400" marB="25400" anchor="ctr">
+                    <a:lnL w="9525">
+                      <a:solidFill>
+                        <a:srgbClr val="E6E8EB"/>
+                      </a:solidFill>
+                    </a:lnL>
+                    <a:lnR w="9525">
+                      <a:solidFill>
+                        <a:srgbClr val="E6E8EB"/>
+                      </a:solidFill>
+                    </a:lnR>
+                    <a:lnT w="9525">
+                      <a:solidFill>
+                        <a:srgbClr val="E6E8EB"/>
+                      </a:solidFill>
+                    </a:lnT>
+                    <a:lnB w="9525">
+                      <a:solidFill>
+                        <a:srgbClr val="E6E8EB"/>
+                      </a:solidFill>
+                    </a:lnB>
+                    <a:noFill/>
+                  </a:tcPr>
+                </a:tc>
+                <a:tc>
+                  <a:txBody>
+                    <a:bodyPr wrap="square"/>
+                    <a:lstStyle/>
+                    <a:p>
+                      <a:pPr algn="l">
+                        <a:defRPr sz="1000"/>
+                      </a:pPr>
+                      <a:r>
+                        <a:rPr sz="1000" b="0">
+                          <a:solidFill>
+                            <a:srgbClr val="11181C"/>
+                          </a:solidFill>
+                          <a:latin typeface="Arial"/>
+                        </a:rPr>
+                        <a:t>Medium 25 – 45 tm: 196 units, Rp 156 M. Heavy &gt; 45 tm: 65 units, Rp 115 M.</a:t>
+                      </a:r>
+                      <a:endParaRPr sz="1000"/>
+                    </a:p>
+                  </a:txBody>
+                  <a:tcPr marL="50800" marR="50800" marT="25400" marB="25400" anchor="ctr">
+                    <a:lnL w="9525">
+                      <a:solidFill>
+                        <a:srgbClr val="E6E8EB"/>
+                      </a:solidFill>
+                    </a:lnL>
+                    <a:lnR w="9525">
+                      <a:solidFill>
+                        <a:srgbClr val="E6E8EB"/>
+                      </a:solidFill>
+                    </a:lnR>
+                    <a:lnT w="9525">
+                      <a:solidFill>
+                        <a:srgbClr val="E6E8EB"/>
+                      </a:solidFill>
+                    </a:lnT>
+                    <a:lnB w="9525">
+                      <a:solidFill>
+                        <a:srgbClr val="E6E8EB"/>
+                      </a:solidFill>
+                    </a:lnB>
+                    <a:noFill/>
+                  </a:tcPr>
+                </a:tc>
+              </a:tr>
+              <a:tr h="666750">
+                <a:tc vMerge="1">
+                  <a:txBody>
+                    <a:bodyPr/>
+                    <a:lstStyle/>
+                    <a:p/>
+                  </a:txBody>
+                  <a:tcPr>
+                    <a:lnL w="9525">
+                      <a:solidFill>
+                        <a:srgbClr val="E6E8EB"/>
+                      </a:solidFill>
+                    </a:lnL>
+                    <a:lnR w="9525">
+                      <a:solidFill>
+                        <a:srgbClr val="E6E8EB"/>
+                      </a:solidFill>
+                    </a:lnR>
+                    <a:lnT w="9525">
+                      <a:solidFill>
+                        <a:srgbClr val="E6E8EB"/>
+                      </a:solidFill>
+                    </a:lnT>
+                    <a:lnB w="9525">
+                      <a:solidFill>
+                        <a:srgbClr val="E6E8EB"/>
+                      </a:solidFill>
+                    </a:lnB>
+                  </a:tcPr>
+                </a:tc>
+                <a:tc>
+                  <a:txBody>
+                    <a:bodyPr wrap="square"/>
+                    <a:lstStyle/>
+                    <a:p>
+                      <a:pPr algn="l">
+                        <a:defRPr sz="1050"/>
+                      </a:pPr>
+                      <a:r>
+                        <a:rPr sz="1050" b="1">
+                          <a:solidFill>
+                            <a:srgbClr val="11181C"/>
+                          </a:solidFill>
+                          <a:latin typeface="Arial"/>
+                        </a:rPr>
+                        <a:t>Targeting</a:t>
+                      </a:r>
+                      <a:endParaRPr sz="1050"/>
+                    </a:p>
+                  </a:txBody>
+                  <a:tcPr marL="50800" marR="50800" marT="25400" marB="25400" anchor="ctr">
+                    <a:lnL w="9525">
+                      <a:solidFill>
+                        <a:srgbClr val="E6E8EB"/>
+                      </a:solidFill>
+                    </a:lnL>
+                    <a:lnR w="9525">
+                      <a:solidFill>
+                        <a:srgbClr val="E6E8EB"/>
+                      </a:solidFill>
+                    </a:lnR>
+                    <a:lnT w="9525">
+                      <a:solidFill>
+                        <a:srgbClr val="E6E8EB"/>
+                      </a:solidFill>
+                    </a:lnT>
+                    <a:lnB w="9525">
+                      <a:solidFill>
+                        <a:srgbClr val="E6E8EB"/>
+                      </a:solidFill>
+                    </a:lnB>
+                    <a:noFill/>
+                  </a:tcPr>
+                </a:tc>
+                <a:tc>
+                  <a:txBody>
+                    <a:bodyPr wrap="square"/>
+                    <a:lstStyle/>
+                    <a:p>
+                      <a:pPr algn="l">
+                        <a:defRPr sz="1050"/>
+                      </a:pPr>
+                      <a:r>
+                        <a:rPr sz="1050" b="1">
+                          <a:solidFill>
+                            <a:srgbClr val="11181C"/>
+                          </a:solidFill>
+                          <a:latin typeface="Arial"/>
+                        </a:rPr>
+                        <a:t>Take share from the Top 1 model in each tier</a:t>
+                      </a:r>
+                      <a:endParaRPr sz="1050"/>
+                    </a:p>
+                  </a:txBody>
+                  <a:tcPr marL="50800" marR="50800" marT="25400" marB="25400" anchor="ctr">
+                    <a:lnL w="9525">
+                      <a:solidFill>
+                        <a:srgbClr val="E6E8EB"/>
+                      </a:solidFill>
+                    </a:lnL>
+                    <a:lnR w="9525">
+                      <a:solidFill>
+                        <a:srgbClr val="E6E8EB"/>
+                      </a:solidFill>
+                    </a:lnR>
+                    <a:lnT w="9525">
+                      <a:solidFill>
+                        <a:srgbClr val="E6E8EB"/>
+                      </a:solidFill>
+                    </a:lnT>
+                    <a:lnB w="9525">
+                      <a:solidFill>
+                        <a:srgbClr val="E6E8EB"/>
+                      </a:solidFill>
+                    </a:lnB>
+                    <a:noFill/>
+                  </a:tcPr>
+                </a:tc>
+                <a:tc>
+                  <a:txBody>
+                    <a:bodyPr wrap="square"/>
+                    <a:lstStyle/>
+                    <a:p>
+                      <a:pPr algn="l">
+                        <a:defRPr sz="1000"/>
+                      </a:pPr>
+                      <a:r>
+                        <a:rPr sz="1000" b="0">
+                          <a:solidFill>
+                            <a:srgbClr val="11181C"/>
+                          </a:solidFill>
+                          <a:latin typeface="Arial"/>
+                        </a:rPr>
+                        <a:t>Medium: Sany Palfinger SPK32080, SPK36080, SPK42502. Heavy: Palfinger PK 53002, PK 76002, PK 88002.</a:t>
+                      </a:r>
+                      <a:endParaRPr sz="1000"/>
+                    </a:p>
+                  </a:txBody>
+                  <a:tcPr marL="50800" marR="50800" marT="25400" marB="25400" anchor="ctr">
+                    <a:lnL w="9525">
+                      <a:solidFill>
+                        <a:srgbClr val="E6E8EB"/>
+                      </a:solidFill>
+                    </a:lnL>
+                    <a:lnR w="9525">
+                      <a:solidFill>
+                        <a:srgbClr val="E6E8EB"/>
+                      </a:solidFill>
+                    </a:lnR>
+                    <a:lnT w="9525">
+                      <a:solidFill>
+                        <a:srgbClr val="E6E8EB"/>
+                      </a:solidFill>
+                    </a:lnT>
+                    <a:lnB w="9525">
+                      <a:solidFill>
+                        <a:srgbClr val="E6E8EB"/>
+                      </a:solidFill>
+                    </a:lnB>
+                    <a:noFill/>
+                  </a:tcPr>
+                </a:tc>
+              </a:tr>
+              <a:tr h="666750">
+                <a:tc vMerge="1">
+                  <a:txBody>
+                    <a:bodyPr/>
+                    <a:lstStyle/>
+                    <a:p/>
+                  </a:txBody>
+                  <a:tcPr>
+                    <a:lnL w="9525">
+                      <a:solidFill>
+                        <a:srgbClr val="E6E8EB"/>
+                      </a:solidFill>
+                    </a:lnL>
+                    <a:lnR w="9525">
+                      <a:solidFill>
+                        <a:srgbClr val="E6E8EB"/>
+                      </a:solidFill>
+                    </a:lnR>
+                    <a:lnT w="9525">
+                      <a:solidFill>
+                        <a:srgbClr val="E6E8EB"/>
+                      </a:solidFill>
+                    </a:lnT>
+                    <a:lnB w="9525">
+                      <a:solidFill>
+                        <a:srgbClr val="E6E8EB"/>
+                      </a:solidFill>
+                    </a:lnB>
+                  </a:tcPr>
+                </a:tc>
+                <a:tc>
+                  <a:txBody>
+                    <a:bodyPr wrap="square"/>
+                    <a:lstStyle/>
+                    <a:p>
+                      <a:pPr algn="l">
+                        <a:defRPr sz="1050"/>
+                      </a:pPr>
+                      <a:r>
+                        <a:rPr sz="1050" b="1">
+                          <a:solidFill>
+                            <a:srgbClr val="11181C"/>
+                          </a:solidFill>
+                          <a:latin typeface="Arial"/>
+                        </a:rPr>
+                        <a:t>Positioning</a:t>
+                      </a:r>
+                      <a:endParaRPr sz="1050"/>
+                    </a:p>
+                  </a:txBody>
+                  <a:tcPr marL="50800" marR="50800" marT="25400" marB="25400" anchor="ctr">
+                    <a:lnL w="9525">
+                      <a:solidFill>
+                        <a:srgbClr val="E6E8EB"/>
+                      </a:solidFill>
+                    </a:lnL>
+                    <a:lnR w="9525">
+                      <a:solidFill>
+                        <a:srgbClr val="E6E8EB"/>
+                      </a:solidFill>
+                    </a:lnR>
+                    <a:lnT w="9525">
+                      <a:solidFill>
+                        <a:srgbClr val="E6E8EB"/>
+                      </a:solidFill>
+                    </a:lnT>
+                    <a:lnB w="9525">
+                      <a:solidFill>
+                        <a:srgbClr val="E6E8EB"/>
+                      </a:solidFill>
+                    </a:lnB>
+                    <a:noFill/>
+                  </a:tcPr>
+                </a:tc>
+                <a:tc>
+                  <a:txBody>
+                    <a:bodyPr wrap="square"/>
+                    <a:lstStyle/>
+                    <a:p>
+                      <a:pPr algn="l">
+                        <a:defRPr sz="1050"/>
+                      </a:pPr>
+                      <a:r>
+                        <a:rPr sz="1050" b="1">
+                          <a:solidFill>
+                            <a:srgbClr val="11181C"/>
+                          </a:solidFill>
+                          <a:latin typeface="Arial"/>
+                        </a:rPr>
+                        <a:t>Two clear promises</a:t>
+                      </a:r>
+                      <a:endParaRPr sz="1050"/>
+                    </a:p>
+                  </a:txBody>
+                  <a:tcPr marL="50800" marR="50800" marT="25400" marB="25400" anchor="ctr">
+                    <a:lnL w="9525">
+                      <a:solidFill>
+                        <a:srgbClr val="E6E8EB"/>
+                      </a:solidFill>
+                    </a:lnL>
+                    <a:lnR w="9525">
+                      <a:solidFill>
+                        <a:srgbClr val="E6E8EB"/>
+                      </a:solidFill>
+                    </a:lnR>
+                    <a:lnT w="9525">
+                      <a:solidFill>
+                        <a:srgbClr val="E6E8EB"/>
+                      </a:solidFill>
+                    </a:lnT>
+                    <a:lnB w="9525">
+                      <a:solidFill>
+                        <a:srgbClr val="E6E8EB"/>
+                      </a:solidFill>
+                    </a:lnB>
+                    <a:noFill/>
+                  </a:tcPr>
+                </a:tc>
+                <a:tc>
+                  <a:txBody>
+                    <a:bodyPr wrap="square"/>
+                    <a:lstStyle/>
+                    <a:p>
+                      <a:pPr algn="l">
+                        <a:defRPr sz="1000"/>
+                      </a:pPr>
+                      <a:r>
+                        <a:rPr sz="1000" b="0">
+                          <a:solidFill>
+                            <a:srgbClr val="11181C"/>
+                          </a:solidFill>
+                          <a:latin typeface="Arial"/>
+                        </a:rPr>
+                        <a:t>XCMG: same capacity, lower price (SQZ365.4 −9% vs SPK36080). Ferrari: European features, cheaper where it wins (−23% at 25 – 30 tm, −32% at 45 – 50 tm) and faster delivery from China stock (~14 weeks).</a:t>
+                      </a:r>
+                      <a:endParaRPr sz="1000"/>
+                    </a:p>
+                  </a:txBody>
+                  <a:tcPr marL="50800" marR="50800" marT="25400" marB="25400" anchor="ctr">
+                    <a:lnL w="9525">
+                      <a:solidFill>
+                        <a:srgbClr val="E6E8EB"/>
+                      </a:solidFill>
+                    </a:lnL>
+                    <a:lnR w="9525">
+                      <a:solidFill>
+                        <a:srgbClr val="E6E8EB"/>
+                      </a:solidFill>
+                    </a:lnR>
+                    <a:lnT w="9525">
+                      <a:solidFill>
+                        <a:srgbClr val="E6E8EB"/>
+                      </a:solidFill>
+                    </a:lnT>
+                    <a:lnB w="9525">
+                      <a:solidFill>
+                        <a:srgbClr val="E6E8EB"/>
+                      </a:solidFill>
+                    </a:lnB>
+                    <a:noFill/>
+                  </a:tcPr>
+                </a:tc>
+              </a:tr>
+            </a:tbl>
+          </a:graphicData>
+        </a:graphic>
+      </p:graphicFrame>
+    </p:spTree>
+  </p:cSld>
+  <p:clrMapOvr>
+    <a:masterClrMapping/>
+  </p:clrMapOvr>
+</p:sld>
+</file>
+
+<file path=ppt/slides/slide9.xml><?xml version="1.0" encoding="utf-8"?>
+<p:sld xmlns:a="http://schemas.openxmlformats.org/drawingml/2006/main" xmlns:p="http://schemas.openxmlformats.org/presentationml/2006/main" xmlns:r="http://schemas.openxmlformats.org/officeDocument/2006/relationships">
+  <p:cSld>
+    <p:bg>
+      <p:bgPr>
+        <a:solidFill>
+          <a:srgbClr val="FFFFFF"/>
+        </a:solidFill>
+        <a:effectLst/>
+      </p:bgPr>
+    </p:bg>
+    <p:spTree>
+      <p:nvGrpSpPr>
+        <p:cNvPr id="1" name=""/>
+        <p:cNvGrpSpPr/>
+        <p:nvPr/>
+      </p:nvGrpSpPr>
+      <p:grpSpPr/>
+      <p:pic>
+        <p:nvPicPr>
+          <p:cNvPr id="2" name="Picture 1" descr="triatra_logo.png"/>
+          <p:cNvPicPr>
+            <a:picLocks noChangeAspect="1"/>
+          </p:cNvPicPr>
+          <p:nvPr/>
+        </p:nvPicPr>
+        <p:blipFill>
+          <a:blip r:embed="rId2"/>
+          <a:stretch>
+            <a:fillRect/>
+          </a:stretch>
+        </p:blipFill>
         <p:spPr>
           <a:xfrm>
-            <a:off x="533400" y="1447800"/>
-            <a:ext cx="3562350" cy="228600"/>
+            <a:off x="533400" y="228600"/>
+            <a:ext cx="457034" cy="209550"/>
           </a:xfrm>
           <a:prstGeom prst="rect">
             <a:avLst/>
           </a:prstGeom>
-          <a:solidFill>
-            <a:srgbClr val="076932"/>
-          </a:solidFill>
-          <a:ln>
-            <a:noFill/>
-          </a:ln>
         </p:spPr>
-        <p:txBody>
-          <a:bodyPr rtlCol="0" anchor="ctr"/>
-          <a:lstStyle/>
-          <a:p/>
-        </p:txBody>
-      </p:sp>
+      </p:pic>
       <p:sp>
         <p:nvSpPr>
-          <p:cNvPr id="11" name="TextBox 10"/>
+          <p:cNvPr id="3" name="TextBox 2"/>
           <p:cNvSpPr txBox="1"/>
           <p:nvPr/>
         </p:nvSpPr>
         <p:spPr>
           <a:xfrm>
-            <a:off x="628650" y="1447800"/>
-            <a:ext cx="3371850" cy="228600"/>
-          </a:xfrm>
-          <a:prstGeom prst="rect">
-            <a:avLst/>
-          </a:prstGeom>
-          <a:noFill/>
-        </p:spPr>
-        <p:txBody>
-          <a:bodyPr wrap="square" lIns="0" rIns="0" tIns="0" bIns="0" anchor="ctr">
-            <a:spAutoFit/>
-          </a:bodyPr>
-          <a:lstStyle/>
-          <a:p>
-            <a:pPr algn="l"/>
-            <a:r>
-              <a:rPr sz="1000" b="1" i="0" spc="50">
-                <a:solidFill>
-                  <a:srgbClr val="FFFFFF"/>
-                </a:solidFill>
-                <a:latin typeface="Arial"/>
-              </a:rPr>
-              <a:t>4C · BUSINESS LANDSCAPE</a:t>
-            </a:r>
-          </a:p>
-        </p:txBody>
-      </p:sp>
-      <p:sp>
-        <p:nvSpPr>
-          <p:cNvPr id="12" name="Rectangle 11"/>
-          <p:cNvSpPr/>
-          <p:nvPr/>
-        </p:nvSpPr>
-        <p:spPr>
-          <a:xfrm>
-            <a:off x="533400" y="1714500"/>
-            <a:ext cx="3562350" cy="1133475"/>
-          </a:xfrm>
-          <a:prstGeom prst="rect">
-            <a:avLst/>
-          </a:prstGeom>
-          <a:solidFill>
-            <a:srgbClr val="F9FAFB"/>
-          </a:solidFill>
-          <a:ln>
-            <a:noFill/>
-          </a:ln>
-        </p:spPr>
-        <p:txBody>
-          <a:bodyPr rtlCol="0" anchor="ctr"/>
-          <a:lstStyle/>
-          <a:p/>
-        </p:txBody>
-      </p:sp>
-      <p:sp>
-        <p:nvSpPr>
-          <p:cNvPr id="13" name="TextBox 12"/>
-          <p:cNvSpPr txBox="1"/>
-          <p:nvPr/>
-        </p:nvSpPr>
-        <p:spPr>
-          <a:xfrm>
-            <a:off x="609600" y="1762125"/>
-            <a:ext cx="3409950" cy="133350"/>
+            <a:off x="6096000" y="276225"/>
+            <a:ext cx="5562600" cy="133350"/>
           </a:xfrm>
           <a:prstGeom prst="rect">
             <a:avLst/>
@@ -3484,29 +4837,50 @@
           </a:bodyPr>
           <a:lstStyle/>
           <a:p>
-            <a:pPr algn="l"/>
-            <a:r>
-              <a:rPr sz="850" b="1" i="0" spc="50">
+            <a:pPr algn="r"/>
+            <a:r>
+              <a:rPr sz="750" b="0" i="0" spc="100">
                 <a:solidFill>
-                  <a:srgbClr val="076932"/>
+                  <a:srgbClr val="697177"/>
                 </a:solidFill>
                 <a:latin typeface="Arial"/>
               </a:rPr>
-              <a:t>CHANGE</a:t>
+              <a:t>NEDP 6-MONTH REVIEW  ·  4P · ACTION PLAN</a:t>
             </a:r>
           </a:p>
         </p:txBody>
       </p:sp>
+      <p:cxnSp>
+        <p:nvCxnSpPr>
+          <p:cNvPr id="4" name="Connector 3"/>
+          <p:cNvCxnSpPr/>
+          <p:nvPr/>
+        </p:nvCxnSpPr>
+        <p:spPr>
+          <a:xfrm>
+            <a:off x="533400" y="533400"/>
+            <a:ext cx="11125200" cy="0"/>
+          </a:xfrm>
+          <a:prstGeom prst="line">
+            <a:avLst/>
+          </a:prstGeom>
+          <a:ln w="9525">
+            <a:solidFill>
+              <a:srgbClr val="E6E8EB"/>
+            </a:solidFill>
+          </a:ln>
+        </p:spPr>
+      </p:cxnSp>
       <p:sp>
         <p:nvSpPr>
-          <p:cNvPr id="14" name="TextBox 13"/>
+          <p:cNvPr id="5" name="TextBox 4"/>
           <p:cNvSpPr txBox="1"/>
           <p:nvPr/>
         </p:nvSpPr>
         <p:spPr>
           <a:xfrm>
-            <a:off x="609600" y="1905000"/>
-            <a:ext cx="3409950" cy="923925"/>
+            <a:off x="533400" y="704850"/>
+            <a:ext cx="5715000" cy="133350"/>
           </a:xfrm>
           <a:prstGeom prst="rect">
             <a:avLst/>
@@ -3519,111 +4893,29 @@
           </a:bodyPr>
           <a:lstStyle/>
           <a:p>
-            <a:pPr algn="l">
-              <a:lnSpc>
-                <a:spcPct val="100000"/>
-              </a:lnSpc>
-            </a:pPr>
-            <a:r>
-              <a:rPr sz="1050" b="1" i="0">
+            <a:pPr algn="l"/>
+            <a:r>
+              <a:rPr sz="850" b="1" i="0" spc="150">
                 <a:solidFill>
-                  <a:srgbClr val="11181C"/>
+                  <a:srgbClr val="697177"/>
                 </a:solidFill>
                 <a:latin typeface="Arial"/>
               </a:rPr>
-              <a:t>HYVA has left; value sits in Medium + Heavy.</a:t>
-            </a:r>
-          </a:p>
-          <a:p>
-            <a:pPr marL="127000" indent="-127000">
-              <a:spcBef>
-                <a:spcPts val="300"/>
-              </a:spcBef>
-              <a:buChar char="•"/>
-            </a:pPr>
-            <a:r>
-              <a:rPr sz="950">
-                <a:solidFill>
-                  <a:srgbClr val="4D555C"/>
-                </a:solidFill>
-                <a:latin typeface="Arial"/>
-              </a:rPr>
-              <a:t>Triatra has no crane brand since HYVA stopped.</a:t>
-            </a:r>
-          </a:p>
-          <a:p>
-            <a:pPr marL="127000" indent="-127000">
-              <a:spcBef>
-                <a:spcPts val="300"/>
-              </a:spcBef>
-              <a:buChar char="•"/>
-            </a:pPr>
-            <a:r>
-              <a:rPr sz="950">
-                <a:solidFill>
-                  <a:srgbClr val="4D555C"/>
-                </a:solidFill>
-                <a:latin typeface="Arial"/>
-              </a:rPr>
-              <a:t>41% of units, 64% of value (2023 – 2026).</a:t>
-            </a:r>
-          </a:p>
-          <a:p>
-            <a:pPr marL="127000" indent="-127000">
-              <a:spcBef>
-                <a:spcPts val="300"/>
-              </a:spcBef>
-              <a:buChar char="•"/>
-            </a:pPr>
-            <a:r>
-              <a:rPr sz="950">
-                <a:solidFill>
-                  <a:srgbClr val="4D555C"/>
-                </a:solidFill>
-                <a:latin typeface="Arial"/>
-              </a:rPr>
-              <a:t>Heavy units: 12 → 17 → 35 (2023 – 2025).</a:t>
+              <a:t>4P · ACTION PLAN</a:t>
             </a:r>
           </a:p>
         </p:txBody>
       </p:sp>
       <p:sp>
         <p:nvSpPr>
-          <p:cNvPr id="15" name="Rectangle 14"/>
-          <p:cNvSpPr/>
-          <p:nvPr/>
-        </p:nvSpPr>
-        <p:spPr>
-          <a:xfrm>
-            <a:off x="533400" y="2914650"/>
-            <a:ext cx="3562350" cy="1133475"/>
-          </a:xfrm>
-          <a:prstGeom prst="rect">
-            <a:avLst/>
-          </a:prstGeom>
-          <a:solidFill>
-            <a:srgbClr val="F9FAFB"/>
-          </a:solidFill>
-          <a:ln>
-            <a:noFill/>
-          </a:ln>
-        </p:spPr>
-        <p:txBody>
-          <a:bodyPr rtlCol="0" anchor="ctr"/>
-          <a:lstStyle/>
-          <a:p/>
-        </p:txBody>
-      </p:sp>
-      <p:sp>
-        <p:nvSpPr>
-          <p:cNvPr id="16" name="TextBox 15"/>
+          <p:cNvPr id="6" name="TextBox 5"/>
           <p:cNvSpPr txBox="1"/>
           <p:nvPr/>
         </p:nvSpPr>
         <p:spPr>
           <a:xfrm>
-            <a:off x="609600" y="2962275"/>
-            <a:ext cx="3409950" cy="133350"/>
+            <a:off x="533400" y="857250"/>
+            <a:ext cx="11125200" cy="381000"/>
           </a:xfrm>
           <a:prstGeom prst="rect">
             <a:avLst/>
@@ -3638,27 +4930,66 @@
           <a:p>
             <a:pPr algn="l"/>
             <a:r>
-              <a:rPr sz="850" b="1" i="0" spc="50">
+              <a:rPr sz="2100" b="0" i="0">
+                <a:solidFill>
+                  <a:srgbClr val="11181C"/>
+                </a:solidFill>
+                <a:latin typeface="Georgia"/>
+              </a:rPr>
+              <a:t>Four actions to </a:t>
+            </a:r>
+            <a:r>
+              <a:rPr sz="2100" b="0" i="1">
                 <a:solidFill>
                   <a:srgbClr val="076932"/>
                 </a:solidFill>
-                <a:latin typeface="Arial"/>
+                <a:latin typeface="Georgia"/>
               </a:rPr>
-              <a:t>COMPETITOR</a:t>
+              <a:t>win the first sale</a:t>
+            </a:r>
+            <a:r>
+              <a:rPr sz="2100" b="0" i="0">
+                <a:solidFill>
+                  <a:srgbClr val="11181C"/>
+                </a:solidFill>
+                <a:latin typeface="Georgia"/>
+              </a:rPr>
+              <a:t>: features, price, stock and package</a:t>
             </a:r>
           </a:p>
         </p:txBody>
       </p:sp>
+      <p:cxnSp>
+        <p:nvCxnSpPr>
+          <p:cNvPr id="7" name="Connector 6"/>
+          <p:cNvCxnSpPr/>
+          <p:nvPr/>
+        </p:nvCxnSpPr>
+        <p:spPr>
+          <a:xfrm>
+            <a:off x="533400" y="6591300"/>
+            <a:ext cx="11125200" cy="0"/>
+          </a:xfrm>
+          <a:prstGeom prst="line">
+            <a:avLst/>
+          </a:prstGeom>
+          <a:ln w="9525">
+            <a:solidFill>
+              <a:srgbClr val="E6E8EB"/>
+            </a:solidFill>
+          </a:ln>
+        </p:spPr>
+      </p:cxnSp>
       <p:sp>
         <p:nvSpPr>
-          <p:cNvPr id="17" name="TextBox 16"/>
+          <p:cNvPr id="8" name="TextBox 7"/>
           <p:cNvSpPr txBox="1"/>
           <p:nvPr/>
         </p:nvSpPr>
         <p:spPr>
           <a:xfrm>
-            <a:off x="609600" y="3105150"/>
-            <a:ext cx="3409950" cy="923925"/>
+            <a:off x="533400" y="6648450"/>
+            <a:ext cx="5715000" cy="114300"/>
           </a:xfrm>
           <a:prstGeom prst="rect">
             <a:avLst/>
@@ -3671,94 +5002,29 @@
           </a:bodyPr>
           <a:lstStyle/>
           <a:p>
-            <a:pPr algn="l">
-              <a:lnSpc>
-                <a:spcPct val="100000"/>
-              </a:lnSpc>
-            </a:pPr>
-            <a:r>
-              <a:rPr sz="1050" b="1" i="0">
+            <a:pPr algn="l"/>
+            <a:r>
+              <a:rPr sz="700" b="1" i="0" spc="100">
                 <a:solidFill>
-                  <a:srgbClr val="11181C"/>
+                  <a:srgbClr val="889096"/>
                 </a:solidFill>
                 <a:latin typeface="Arial"/>
               </a:rPr>
-              <a:t>Two leaders, one per class.</a:t>
-            </a:r>
-          </a:p>
-          <a:p>
-            <a:pPr marL="127000" indent="-127000">
-              <a:spcBef>
-                <a:spcPts val="300"/>
-              </a:spcBef>
-              <a:buChar char="•"/>
-            </a:pPr>
-            <a:r>
-              <a:rPr sz="950">
-                <a:solidFill>
-                  <a:srgbClr val="4D555C"/>
-                </a:solidFill>
-                <a:latin typeface="Arial"/>
-              </a:rPr>
-              <a:t>Medium: Sany Palfinger, 38% of value (2023 – 2026).</a:t>
-            </a:r>
-          </a:p>
-          <a:p>
-            <a:pPr marL="127000" indent="-127000">
-              <a:spcBef>
-                <a:spcPts val="300"/>
-              </a:spcBef>
-              <a:buChar char="•"/>
-            </a:pPr>
-            <a:r>
-              <a:rPr sz="950">
-                <a:solidFill>
-                  <a:srgbClr val="4D555C"/>
-                </a:solidFill>
-                <a:latin typeface="Arial"/>
-              </a:rPr>
-              <a:t>Heavy: Palfinger, 66% of value; PK 53002 alone 39 units.</a:t>
+              <a:t>NEDP MID YEAR REVIEW 2026  ·  TIBERIAS K. SIMU</a:t>
             </a:r>
           </a:p>
         </p:txBody>
       </p:sp>
       <p:sp>
         <p:nvSpPr>
-          <p:cNvPr id="18" name="Rectangle 17"/>
-          <p:cNvSpPr/>
-          <p:nvPr/>
-        </p:nvSpPr>
-        <p:spPr>
-          <a:xfrm>
-            <a:off x="533400" y="4114800"/>
-            <a:ext cx="3562350" cy="1133475"/>
-          </a:xfrm>
-          <a:prstGeom prst="rect">
-            <a:avLst/>
-          </a:prstGeom>
-          <a:solidFill>
-            <a:srgbClr val="F9FAFB"/>
-          </a:solidFill>
-          <a:ln>
-            <a:noFill/>
-          </a:ln>
-        </p:spPr>
-        <p:txBody>
-          <a:bodyPr rtlCol="0" anchor="ctr"/>
-          <a:lstStyle/>
-          <a:p/>
-        </p:txBody>
-      </p:sp>
-      <p:sp>
-        <p:nvSpPr>
-          <p:cNvPr id="19" name="TextBox 18"/>
+          <p:cNvPr id="9" name="TextBox 8"/>
           <p:cNvSpPr txBox="1"/>
           <p:nvPr/>
         </p:nvSpPr>
         <p:spPr>
           <a:xfrm>
-            <a:off x="609600" y="4162425"/>
-            <a:ext cx="3409950" cy="133350"/>
+            <a:off x="9753600" y="6648450"/>
+            <a:ext cx="1905000" cy="114300"/>
           </a:xfrm>
           <a:prstGeom prst="rect">
             <a:avLst/>
@@ -3771,29 +5037,2287 @@
           </a:bodyPr>
           <a:lstStyle/>
           <a:p>
-            <a:pPr algn="l"/>
-            <a:r>
-              <a:rPr sz="850" b="1" i="0" spc="50">
+            <a:pPr algn="r"/>
+            <a:r>
+              <a:rPr sz="700" b="1" i="0" spc="100">
                 <a:solidFill>
-                  <a:srgbClr val="076932"/>
+                  <a:srgbClr val="889096"/>
                 </a:solidFill>
                 <a:latin typeface="Arial"/>
               </a:rPr>
-              <a:t>CUSTOMER</a:t>
+              <a:t>09 / 19</a:t>
             </a:r>
           </a:p>
         </p:txBody>
       </p:sp>
+      <p:graphicFrame>
+        <p:nvGraphicFramePr>
+          <p:cNvPr id="10" name="Table 9"/>
+          <p:cNvGraphicFramePr>
+            <a:graphicFrameLocks noGrp="1"/>
+          </p:cNvGraphicFramePr>
+          <p:nvPr/>
+        </p:nvGraphicFramePr>
+        <p:xfrm>
+          <a:off x="533400" y="1504950"/>
+          <a:ext cx="11125200" cy="4533900"/>
+        </p:xfrm>
+        <a:graphic>
+          <a:graphicData uri="http://schemas.openxmlformats.org/drawingml/2006/table">
+            <a:tbl>
+              <a:tblPr firstRow="0" bandRow="0">
+                <a:tableStyleId>{5940675A-B579-460E-94D1-54222C63F5DA}</a:tableStyleId>
+              </a:tblPr>
+              <a:tblGrid>
+                <a:gridCol w="1047750"/>
+                <a:gridCol w="2476500"/>
+                <a:gridCol w="2190750"/>
+                <a:gridCol w="5410200"/>
+              </a:tblGrid>
+              <a:tr h="323850">
+                <a:tc>
+                  <a:txBody>
+                    <a:bodyPr wrap="square"/>
+                    <a:lstStyle/>
+                    <a:p>
+                      <a:pPr algn="l">
+                        <a:defRPr sz="900"/>
+                      </a:pPr>
+                      <a:r>
+                        <a:rPr sz="900" b="1">
+                          <a:solidFill>
+                            <a:srgbClr val="11181C"/>
+                          </a:solidFill>
+                          <a:latin typeface="Arial"/>
+                        </a:rPr>
+                        <a:t>4P</a:t>
+                      </a:r>
+                      <a:endParaRPr sz="900"/>
+                    </a:p>
+                  </a:txBody>
+                  <a:tcPr marL="50800" marR="50800" marT="25400" marB="25400" anchor="ctr">
+                    <a:lnL w="9525">
+                      <a:solidFill>
+                        <a:srgbClr val="D7DBDF"/>
+                      </a:solidFill>
+                    </a:lnL>
+                    <a:lnR w="9525">
+                      <a:solidFill>
+                        <a:srgbClr val="D7DBDF"/>
+                      </a:solidFill>
+                    </a:lnR>
+                    <a:lnT w="9525">
+                      <a:solidFill>
+                        <a:srgbClr val="D7DBDF"/>
+                      </a:solidFill>
+                    </a:lnT>
+                    <a:lnB w="9525">
+                      <a:solidFill>
+                        <a:srgbClr val="D7DBDF"/>
+                      </a:solidFill>
+                    </a:lnB>
+                    <a:solidFill>
+                      <a:srgbClr val="F0F2F4"/>
+                    </a:solidFill>
+                  </a:tcPr>
+                </a:tc>
+                <a:tc>
+                  <a:txBody>
+                    <a:bodyPr wrap="square"/>
+                    <a:lstStyle/>
+                    <a:p>
+                      <a:pPr algn="l">
+                        <a:defRPr sz="900"/>
+                      </a:pPr>
+                      <a:r>
+                        <a:rPr sz="900" b="1">
+                          <a:solidFill>
+                            <a:srgbClr val="11181C"/>
+                          </a:solidFill>
+                          <a:latin typeface="Arial"/>
+                        </a:rPr>
+                        <a:t>To do</a:t>
+                      </a:r>
+                      <a:endParaRPr sz="900"/>
+                    </a:p>
+                  </a:txBody>
+                  <a:tcPr marL="50800" marR="50800" marT="25400" marB="25400" anchor="ctr">
+                    <a:lnL w="9525">
+                      <a:solidFill>
+                        <a:srgbClr val="D7DBDF"/>
+                      </a:solidFill>
+                    </a:lnL>
+                    <a:lnR w="9525">
+                      <a:solidFill>
+                        <a:srgbClr val="D7DBDF"/>
+                      </a:solidFill>
+                    </a:lnR>
+                    <a:lnT w="9525">
+                      <a:solidFill>
+                        <a:srgbClr val="D7DBDF"/>
+                      </a:solidFill>
+                    </a:lnT>
+                    <a:lnB w="9525">
+                      <a:solidFill>
+                        <a:srgbClr val="D7DBDF"/>
+                      </a:solidFill>
+                    </a:lnB>
+                    <a:solidFill>
+                      <a:srgbClr val="F0F2F4"/>
+                    </a:solidFill>
+                  </a:tcPr>
+                </a:tc>
+                <a:tc>
+                  <a:txBody>
+                    <a:bodyPr wrap="square"/>
+                    <a:lstStyle/>
+                    <a:p>
+                      <a:pPr algn="l">
+                        <a:defRPr sz="900"/>
+                      </a:pPr>
+                      <a:r>
+                        <a:rPr sz="900" b="1">
+                          <a:solidFill>
+                            <a:srgbClr val="11181C"/>
+                          </a:solidFill>
+                          <a:latin typeface="Arial"/>
+                        </a:rPr>
+                        <a:t>Item</a:t>
+                      </a:r>
+                      <a:endParaRPr sz="900"/>
+                    </a:p>
+                  </a:txBody>
+                  <a:tcPr marL="50800" marR="50800" marT="25400" marB="25400" anchor="ctr">
+                    <a:lnL w="9525">
+                      <a:solidFill>
+                        <a:srgbClr val="D7DBDF"/>
+                      </a:solidFill>
+                    </a:lnL>
+                    <a:lnR w="9525">
+                      <a:solidFill>
+                        <a:srgbClr val="D7DBDF"/>
+                      </a:solidFill>
+                    </a:lnR>
+                    <a:lnT w="9525">
+                      <a:solidFill>
+                        <a:srgbClr val="D7DBDF"/>
+                      </a:solidFill>
+                    </a:lnT>
+                    <a:lnB w="9525">
+                      <a:solidFill>
+                        <a:srgbClr val="D7DBDF"/>
+                      </a:solidFill>
+                    </a:lnB>
+                    <a:solidFill>
+                      <a:srgbClr val="F0F2F4"/>
+                    </a:solidFill>
+                  </a:tcPr>
+                </a:tc>
+                <a:tc>
+                  <a:txBody>
+                    <a:bodyPr wrap="square"/>
+                    <a:lstStyle/>
+                    <a:p>
+                      <a:pPr algn="l">
+                        <a:defRPr sz="900"/>
+                      </a:pPr>
+                      <a:r>
+                        <a:rPr sz="900" b="1">
+                          <a:solidFill>
+                            <a:srgbClr val="11181C"/>
+                          </a:solidFill>
+                          <a:latin typeface="Arial"/>
+                        </a:rPr>
+                        <a:t>Detail</a:t>
+                      </a:r>
+                      <a:endParaRPr sz="900"/>
+                    </a:p>
+                  </a:txBody>
+                  <a:tcPr marL="50800" marR="50800" marT="25400" marB="25400" anchor="ctr">
+                    <a:lnL w="9525">
+                      <a:solidFill>
+                        <a:srgbClr val="D7DBDF"/>
+                      </a:solidFill>
+                    </a:lnL>
+                    <a:lnR w="9525">
+                      <a:solidFill>
+                        <a:srgbClr val="D7DBDF"/>
+                      </a:solidFill>
+                    </a:lnR>
+                    <a:lnT w="9525">
+                      <a:solidFill>
+                        <a:srgbClr val="D7DBDF"/>
+                      </a:solidFill>
+                    </a:lnT>
+                    <a:lnB w="9525">
+                      <a:solidFill>
+                        <a:srgbClr val="D7DBDF"/>
+                      </a:solidFill>
+                    </a:lnB>
+                    <a:solidFill>
+                      <a:srgbClr val="F0F2F4"/>
+                    </a:solidFill>
+                  </a:tcPr>
+                </a:tc>
+              </a:tr>
+              <a:tr h="323850">
+                <a:tc rowSpan="6">
+                  <a:txBody>
+                    <a:bodyPr wrap="square"/>
+                    <a:lstStyle/>
+                    <a:p>
+                      <a:pPr algn="l">
+                        <a:defRPr sz="1100"/>
+                      </a:pPr>
+                      <a:r>
+                        <a:rPr sz="1100" b="1">
+                          <a:solidFill>
+                            <a:srgbClr val="076932"/>
+                          </a:solidFill>
+                          <a:latin typeface="Arial"/>
+                        </a:rPr>
+                        <a:t>Product</a:t>
+                      </a:r>
+                      <a:endParaRPr sz="1100"/>
+                    </a:p>
+                  </a:txBody>
+                  <a:tcPr marL="50800" marR="50800" marT="25400" marB="25400" anchor="ctr">
+                    <a:lnL w="9525">
+                      <a:solidFill>
+                        <a:srgbClr val="E6E8EB"/>
+                      </a:solidFill>
+                    </a:lnL>
+                    <a:lnR w="9525">
+                      <a:solidFill>
+                        <a:srgbClr val="E6E8EB"/>
+                      </a:solidFill>
+                    </a:lnR>
+                    <a:lnT w="9525">
+                      <a:solidFill>
+                        <a:srgbClr val="E6E8EB"/>
+                      </a:solidFill>
+                    </a:lnT>
+                    <a:lnB w="9525">
+                      <a:solidFill>
+                        <a:srgbClr val="E6E8EB"/>
+                      </a:solidFill>
+                    </a:lnB>
+                    <a:noFill/>
+                  </a:tcPr>
+                </a:tc>
+                <a:tc rowSpan="6">
+                  <a:txBody>
+                    <a:bodyPr wrap="square"/>
+                    <a:lstStyle/>
+                    <a:p>
+                      <a:pPr algn="l">
+                        <a:defRPr sz="1050"/>
+                      </a:pPr>
+                      <a:r>
+                        <a:rPr sz="1050" b="1">
+                          <a:solidFill>
+                            <a:srgbClr val="11181C"/>
+                          </a:solidFill>
+                          <a:latin typeface="Arial"/>
+                        </a:rPr>
+                        <a:t>Offer Ferrari models that beat the Top 1 on features</a:t>
+                      </a:r>
+                      <a:endParaRPr sz="1050"/>
+                    </a:p>
+                  </a:txBody>
+                  <a:tcPr marL="50800" marR="50800" marT="25400" marB="25400" anchor="ctr">
+                    <a:lnL w="9525">
+                      <a:solidFill>
+                        <a:srgbClr val="E6E8EB"/>
+                      </a:solidFill>
+                    </a:lnL>
+                    <a:lnR w="9525">
+                      <a:solidFill>
+                        <a:srgbClr val="E6E8EB"/>
+                      </a:solidFill>
+                    </a:lnR>
+                    <a:lnT w="9525">
+                      <a:solidFill>
+                        <a:srgbClr val="E6E8EB"/>
+                      </a:solidFill>
+                    </a:lnT>
+                    <a:lnB w="9525">
+                      <a:solidFill>
+                        <a:srgbClr val="E6E8EB"/>
+                      </a:solidFill>
+                    </a:lnB>
+                    <a:noFill/>
+                  </a:tcPr>
+                </a:tc>
+                <a:tc>
+                  <a:txBody>
+                    <a:bodyPr wrap="square"/>
+                    <a:lstStyle/>
+                    <a:p>
+                      <a:pPr algn="l">
+                        <a:defRPr sz="950"/>
+                      </a:pPr>
+                      <a:r>
+                        <a:rPr sz="950" b="1">
+                          <a:solidFill>
+                            <a:srgbClr val="11181C"/>
+                          </a:solidFill>
+                          <a:latin typeface="Arial"/>
+                        </a:rPr>
+                        <a:t>Red Power</a:t>
+                      </a:r>
+                      <a:endParaRPr sz="950"/>
+                    </a:p>
+                  </a:txBody>
+                  <a:tcPr marL="50800" marR="50800" marT="25400" marB="25400" anchor="ctr">
+                    <a:lnL w="9525">
+                      <a:solidFill>
+                        <a:srgbClr val="E6E8EB"/>
+                      </a:solidFill>
+                    </a:lnL>
+                    <a:lnR w="9525">
+                      <a:solidFill>
+                        <a:srgbClr val="E6E8EB"/>
+                      </a:solidFill>
+                    </a:lnR>
+                    <a:lnT w="9525">
+                      <a:solidFill>
+                        <a:srgbClr val="E6E8EB"/>
+                      </a:solidFill>
+                    </a:lnT>
+                    <a:lnB w="9525">
+                      <a:solidFill>
+                        <a:srgbClr val="E6E8EB"/>
+                      </a:solidFill>
+                    </a:lnB>
+                    <a:noFill/>
+                  </a:tcPr>
+                </a:tc>
+                <a:tc>
+                  <a:txBody>
+                    <a:bodyPr wrap="square"/>
+                    <a:lstStyle/>
+                    <a:p>
+                      <a:pPr algn="l">
+                        <a:defRPr sz="950"/>
+                      </a:pPr>
+                      <a:r>
+                        <a:rPr sz="950" b="0">
+                          <a:solidFill>
+                            <a:srgbClr val="11181C"/>
+                          </a:solidFill>
+                          <a:latin typeface="Arial"/>
+                        </a:rPr>
+                        <a:t>Articulated linkage that adds working range and versatility. Amco Veba and Palfinger have their own version; Sany Palfinger has none.</a:t>
+                      </a:r>
+                      <a:endParaRPr sz="950"/>
+                    </a:p>
+                  </a:txBody>
+                  <a:tcPr marL="50800" marR="50800" marT="25400" marB="25400" anchor="ctr">
+                    <a:lnL w="9525">
+                      <a:solidFill>
+                        <a:srgbClr val="E6E8EB"/>
+                      </a:solidFill>
+                    </a:lnL>
+                    <a:lnR w="9525">
+                      <a:solidFill>
+                        <a:srgbClr val="E6E8EB"/>
+                      </a:solidFill>
+                    </a:lnR>
+                    <a:lnT w="9525">
+                      <a:solidFill>
+                        <a:srgbClr val="E6E8EB"/>
+                      </a:solidFill>
+                    </a:lnT>
+                    <a:lnB w="9525">
+                      <a:solidFill>
+                        <a:srgbClr val="E6E8EB"/>
+                      </a:solidFill>
+                    </a:lnB>
+                    <a:noFill/>
+                  </a:tcPr>
+                </a:tc>
+              </a:tr>
+              <a:tr h="323850">
+                <a:tc vMerge="1">
+                  <a:txBody>
+                    <a:bodyPr/>
+                    <a:lstStyle/>
+                    <a:p/>
+                  </a:txBody>
+                  <a:tcPr>
+                    <a:lnL w="9525">
+                      <a:solidFill>
+                        <a:srgbClr val="E6E8EB"/>
+                      </a:solidFill>
+                    </a:lnL>
+                    <a:lnR w="9525">
+                      <a:solidFill>
+                        <a:srgbClr val="E6E8EB"/>
+                      </a:solidFill>
+                    </a:lnR>
+                    <a:lnT w="9525">
+                      <a:solidFill>
+                        <a:srgbClr val="E6E8EB"/>
+                      </a:solidFill>
+                    </a:lnT>
+                    <a:lnB w="9525">
+                      <a:solidFill>
+                        <a:srgbClr val="E6E8EB"/>
+                      </a:solidFill>
+                    </a:lnB>
+                  </a:tcPr>
+                </a:tc>
+                <a:tc vMerge="1">
+                  <a:txBody>
+                    <a:bodyPr/>
+                    <a:lstStyle/>
+                    <a:p/>
+                  </a:txBody>
+                  <a:tcPr>
+                    <a:lnL w="9525">
+                      <a:solidFill>
+                        <a:srgbClr val="E6E8EB"/>
+                      </a:solidFill>
+                    </a:lnL>
+                    <a:lnR w="9525">
+                      <a:solidFill>
+                        <a:srgbClr val="E6E8EB"/>
+                      </a:solidFill>
+                    </a:lnR>
+                    <a:lnT w="9525">
+                      <a:solidFill>
+                        <a:srgbClr val="E6E8EB"/>
+                      </a:solidFill>
+                    </a:lnT>
+                    <a:lnB w="9525">
+                      <a:solidFill>
+                        <a:srgbClr val="E6E8EB"/>
+                      </a:solidFill>
+                    </a:lnB>
+                  </a:tcPr>
+                </a:tc>
+                <a:tc>
+                  <a:txBody>
+                    <a:bodyPr wrap="square"/>
+                    <a:lstStyle/>
+                    <a:p>
+                      <a:pPr algn="l">
+                        <a:defRPr sz="950"/>
+                      </a:pPr>
+                      <a:r>
+                        <a:rPr sz="950" b="1">
+                          <a:solidFill>
+                            <a:srgbClr val="11181C"/>
+                          </a:solidFill>
+                          <a:latin typeface="Arial"/>
+                        </a:rPr>
+                        <a:t>SDV (Smooth Descent Valve)</a:t>
+                      </a:r>
+                      <a:endParaRPr sz="950"/>
+                    </a:p>
+                  </a:txBody>
+                  <a:tcPr marL="50800" marR="50800" marT="25400" marB="25400" anchor="ctr">
+                    <a:lnL w="9525">
+                      <a:solidFill>
+                        <a:srgbClr val="E6E8EB"/>
+                      </a:solidFill>
+                    </a:lnL>
+                    <a:lnR w="9525">
+                      <a:solidFill>
+                        <a:srgbClr val="E6E8EB"/>
+                      </a:solidFill>
+                    </a:lnR>
+                    <a:lnT w="9525">
+                      <a:solidFill>
+                        <a:srgbClr val="E6E8EB"/>
+                      </a:solidFill>
+                    </a:lnT>
+                    <a:lnB w="9525">
+                      <a:solidFill>
+                        <a:srgbClr val="E6E8EB"/>
+                      </a:solidFill>
+                    </a:lnB>
+                    <a:noFill/>
+                  </a:tcPr>
+                </a:tc>
+                <a:tc>
+                  <a:txBody>
+                    <a:bodyPr wrap="square"/>
+                    <a:lstStyle/>
+                    <a:p>
+                      <a:pPr algn="l">
+                        <a:defRPr sz="950"/>
+                      </a:pPr>
+                      <a:r>
+                        <a:rPr sz="950" b="0">
+                          <a:solidFill>
+                            <a:srgbClr val="11181C"/>
+                          </a:solidFill>
+                          <a:latin typeface="Arial"/>
+                        </a:rPr>
+                        <a:t>Cuts boom flex and dynamic load when lowering. Amco Veba and Sany Palfinger have no equal.</a:t>
+                      </a:r>
+                      <a:endParaRPr sz="950"/>
+                    </a:p>
+                  </a:txBody>
+                  <a:tcPr marL="50800" marR="50800" marT="25400" marB="25400" anchor="ctr">
+                    <a:lnL w="9525">
+                      <a:solidFill>
+                        <a:srgbClr val="E6E8EB"/>
+                      </a:solidFill>
+                    </a:lnL>
+                    <a:lnR w="9525">
+                      <a:solidFill>
+                        <a:srgbClr val="E6E8EB"/>
+                      </a:solidFill>
+                    </a:lnR>
+                    <a:lnT w="9525">
+                      <a:solidFill>
+                        <a:srgbClr val="E6E8EB"/>
+                      </a:solidFill>
+                    </a:lnT>
+                    <a:lnB w="9525">
+                      <a:solidFill>
+                        <a:srgbClr val="E6E8EB"/>
+                      </a:solidFill>
+                    </a:lnB>
+                    <a:noFill/>
+                  </a:tcPr>
+                </a:tc>
+              </a:tr>
+              <a:tr h="323850">
+                <a:tc vMerge="1">
+                  <a:txBody>
+                    <a:bodyPr/>
+                    <a:lstStyle/>
+                    <a:p/>
+                  </a:txBody>
+                  <a:tcPr>
+                    <a:lnL w="9525">
+                      <a:solidFill>
+                        <a:srgbClr val="E6E8EB"/>
+                      </a:solidFill>
+                    </a:lnL>
+                    <a:lnR w="9525">
+                      <a:solidFill>
+                        <a:srgbClr val="E6E8EB"/>
+                      </a:solidFill>
+                    </a:lnR>
+                    <a:lnT w="9525">
+                      <a:solidFill>
+                        <a:srgbClr val="E6E8EB"/>
+                      </a:solidFill>
+                    </a:lnT>
+                    <a:lnB w="9525">
+                      <a:solidFill>
+                        <a:srgbClr val="E6E8EB"/>
+                      </a:solidFill>
+                    </a:lnB>
+                  </a:tcPr>
+                </a:tc>
+                <a:tc vMerge="1">
+                  <a:txBody>
+                    <a:bodyPr/>
+                    <a:lstStyle/>
+                    <a:p/>
+                  </a:txBody>
+                  <a:tcPr>
+                    <a:lnL w="9525">
+                      <a:solidFill>
+                        <a:srgbClr val="E6E8EB"/>
+                      </a:solidFill>
+                    </a:lnL>
+                    <a:lnR w="9525">
+                      <a:solidFill>
+                        <a:srgbClr val="E6E8EB"/>
+                      </a:solidFill>
+                    </a:lnR>
+                    <a:lnT w="9525">
+                      <a:solidFill>
+                        <a:srgbClr val="E6E8EB"/>
+                      </a:solidFill>
+                    </a:lnT>
+                    <a:lnB w="9525">
+                      <a:solidFill>
+                        <a:srgbClr val="E6E8EB"/>
+                      </a:solidFill>
+                    </a:lnB>
+                  </a:tcPr>
+                </a:tc>
+                <a:tc>
+                  <a:txBody>
+                    <a:bodyPr wrap="square"/>
+                    <a:lstStyle/>
+                    <a:p>
+                      <a:pPr algn="l">
+                        <a:defRPr sz="950"/>
+                      </a:pPr>
+                      <a:r>
+                        <a:rPr sz="950" b="1">
+                          <a:solidFill>
+                            <a:srgbClr val="11181C"/>
+                          </a:solidFill>
+                          <a:latin typeface="Arial"/>
+                        </a:rPr>
+                        <a:t>Magic Touch</a:t>
+                      </a:r>
+                      <a:endParaRPr sz="950"/>
+                    </a:p>
+                  </a:txBody>
+                  <a:tcPr marL="50800" marR="50800" marT="25400" marB="25400" anchor="ctr">
+                    <a:lnL w="9525">
+                      <a:solidFill>
+                        <a:srgbClr val="E6E8EB"/>
+                      </a:solidFill>
+                    </a:lnL>
+                    <a:lnR w="9525">
+                      <a:solidFill>
+                        <a:srgbClr val="E6E8EB"/>
+                      </a:solidFill>
+                    </a:lnR>
+                    <a:lnT w="9525">
+                      <a:solidFill>
+                        <a:srgbClr val="E6E8EB"/>
+                      </a:solidFill>
+                    </a:lnT>
+                    <a:lnB w="9525">
+                      <a:solidFill>
+                        <a:srgbClr val="E6E8EB"/>
+                      </a:solidFill>
+                    </a:lnB>
+                    <a:noFill/>
+                  </a:tcPr>
+                </a:tc>
+                <a:tc>
+                  <a:txBody>
+                    <a:bodyPr wrap="square"/>
+                    <a:lstStyle/>
+                    <a:p>
+                      <a:pPr algn="l">
+                        <a:defRPr sz="950"/>
+                      </a:pPr>
+                      <a:r>
+                        <a:rPr sz="950" b="0">
+                          <a:solidFill>
+                            <a:srgbClr val="11181C"/>
+                          </a:solidFill>
+                          <a:latin typeface="Arial"/>
+                        </a:rPr>
+                        <a:t>Opens and stows the crane automatically from the cab. Sany Palfinger has no equal.</a:t>
+                      </a:r>
+                      <a:endParaRPr sz="950"/>
+                    </a:p>
+                  </a:txBody>
+                  <a:tcPr marL="50800" marR="50800" marT="25400" marB="25400" anchor="ctr">
+                    <a:lnL w="9525">
+                      <a:solidFill>
+                        <a:srgbClr val="E6E8EB"/>
+                      </a:solidFill>
+                    </a:lnL>
+                    <a:lnR w="9525">
+                      <a:solidFill>
+                        <a:srgbClr val="E6E8EB"/>
+                      </a:solidFill>
+                    </a:lnR>
+                    <a:lnT w="9525">
+                      <a:solidFill>
+                        <a:srgbClr val="E6E8EB"/>
+                      </a:solidFill>
+                    </a:lnT>
+                    <a:lnB w="9525">
+                      <a:solidFill>
+                        <a:srgbClr val="E6E8EB"/>
+                      </a:solidFill>
+                    </a:lnB>
+                    <a:noFill/>
+                  </a:tcPr>
+                </a:tc>
+              </a:tr>
+              <a:tr h="323850">
+                <a:tc vMerge="1">
+                  <a:txBody>
+                    <a:bodyPr/>
+                    <a:lstStyle/>
+                    <a:p/>
+                  </a:txBody>
+                  <a:tcPr>
+                    <a:lnL w="9525">
+                      <a:solidFill>
+                        <a:srgbClr val="E6E8EB"/>
+                      </a:solidFill>
+                    </a:lnL>
+                    <a:lnR w="9525">
+                      <a:solidFill>
+                        <a:srgbClr val="E6E8EB"/>
+                      </a:solidFill>
+                    </a:lnR>
+                    <a:lnT w="9525">
+                      <a:solidFill>
+                        <a:srgbClr val="E6E8EB"/>
+                      </a:solidFill>
+                    </a:lnT>
+                    <a:lnB w="9525">
+                      <a:solidFill>
+                        <a:srgbClr val="E6E8EB"/>
+                      </a:solidFill>
+                    </a:lnB>
+                  </a:tcPr>
+                </a:tc>
+                <a:tc vMerge="1">
+                  <a:txBody>
+                    <a:bodyPr/>
+                    <a:lstStyle/>
+                    <a:p/>
+                  </a:txBody>
+                  <a:tcPr>
+                    <a:lnL w="9525">
+                      <a:solidFill>
+                        <a:srgbClr val="E6E8EB"/>
+                      </a:solidFill>
+                    </a:lnL>
+                    <a:lnR w="9525">
+                      <a:solidFill>
+                        <a:srgbClr val="E6E8EB"/>
+                      </a:solidFill>
+                    </a:lnR>
+                    <a:lnT w="9525">
+                      <a:solidFill>
+                        <a:srgbClr val="E6E8EB"/>
+                      </a:solidFill>
+                    </a:lnT>
+                    <a:lnB w="9525">
+                      <a:solidFill>
+                        <a:srgbClr val="E6E8EB"/>
+                      </a:solidFill>
+                    </a:lnB>
+                  </a:tcPr>
+                </a:tc>
+                <a:tc>
+                  <a:txBody>
+                    <a:bodyPr wrap="square"/>
+                    <a:lstStyle/>
+                    <a:p>
+                      <a:pPr algn="l">
+                        <a:defRPr sz="950"/>
+                      </a:pPr>
+                      <a:r>
+                        <a:rPr sz="950" b="1">
+                          <a:solidFill>
+                            <a:srgbClr val="11181C"/>
+                          </a:solidFill>
+                          <a:latin typeface="Arial"/>
+                        </a:rPr>
+                        <a:t>PB (Power Boost)*</a:t>
+                      </a:r>
+                      <a:endParaRPr sz="950"/>
+                    </a:p>
+                  </a:txBody>
+                  <a:tcPr marL="50800" marR="50800" marT="25400" marB="25400" anchor="ctr">
+                    <a:lnL w="9525">
+                      <a:solidFill>
+                        <a:srgbClr val="E6E8EB"/>
+                      </a:solidFill>
+                    </a:lnL>
+                    <a:lnR w="9525">
+                      <a:solidFill>
+                        <a:srgbClr val="E6E8EB"/>
+                      </a:solidFill>
+                    </a:lnR>
+                    <a:lnT w="9525">
+                      <a:solidFill>
+                        <a:srgbClr val="E6E8EB"/>
+                      </a:solidFill>
+                    </a:lnT>
+                    <a:lnB w="9525">
+                      <a:solidFill>
+                        <a:srgbClr val="E6E8EB"/>
+                      </a:solidFill>
+                    </a:lnB>
+                    <a:noFill/>
+                  </a:tcPr>
+                </a:tc>
+                <a:tc>
+                  <a:txBody>
+                    <a:bodyPr wrap="square"/>
+                    <a:lstStyle/>
+                    <a:p>
+                      <a:pPr algn="l">
+                        <a:defRPr sz="950"/>
+                      </a:pPr>
+                      <a:r>
+                        <a:rPr sz="950" b="0">
+                          <a:solidFill>
+                            <a:srgbClr val="11181C"/>
+                          </a:solidFill>
+                          <a:latin typeface="Arial"/>
+                        </a:rPr>
+                        <a:t>Extra lifting capacity on demand. Equal to Palfinger HPLS and Amco Veba AVPS.</a:t>
+                      </a:r>
+                      <a:endParaRPr sz="950"/>
+                    </a:p>
+                  </a:txBody>
+                  <a:tcPr marL="50800" marR="50800" marT="25400" marB="25400" anchor="ctr">
+                    <a:lnL w="9525">
+                      <a:solidFill>
+                        <a:srgbClr val="E6E8EB"/>
+                      </a:solidFill>
+                    </a:lnL>
+                    <a:lnR w="9525">
+                      <a:solidFill>
+                        <a:srgbClr val="E6E8EB"/>
+                      </a:solidFill>
+                    </a:lnR>
+                    <a:lnT w="9525">
+                      <a:solidFill>
+                        <a:srgbClr val="E6E8EB"/>
+                      </a:solidFill>
+                    </a:lnT>
+                    <a:lnB w="9525">
+                      <a:solidFill>
+                        <a:srgbClr val="E6E8EB"/>
+                      </a:solidFill>
+                    </a:lnB>
+                    <a:noFill/>
+                  </a:tcPr>
+                </a:tc>
+              </a:tr>
+              <a:tr h="323850">
+                <a:tc vMerge="1">
+                  <a:txBody>
+                    <a:bodyPr/>
+                    <a:lstStyle/>
+                    <a:p/>
+                  </a:txBody>
+                  <a:tcPr>
+                    <a:lnL w="9525">
+                      <a:solidFill>
+                        <a:srgbClr val="E6E8EB"/>
+                      </a:solidFill>
+                    </a:lnL>
+                    <a:lnR w="9525">
+                      <a:solidFill>
+                        <a:srgbClr val="E6E8EB"/>
+                      </a:solidFill>
+                    </a:lnR>
+                    <a:lnT w="9525">
+                      <a:solidFill>
+                        <a:srgbClr val="E6E8EB"/>
+                      </a:solidFill>
+                    </a:lnT>
+                    <a:lnB w="9525">
+                      <a:solidFill>
+                        <a:srgbClr val="E6E8EB"/>
+                      </a:solidFill>
+                    </a:lnB>
+                  </a:tcPr>
+                </a:tc>
+                <a:tc vMerge="1">
+                  <a:txBody>
+                    <a:bodyPr/>
+                    <a:lstStyle/>
+                    <a:p/>
+                  </a:txBody>
+                  <a:tcPr>
+                    <a:lnL w="9525">
+                      <a:solidFill>
+                        <a:srgbClr val="E6E8EB"/>
+                      </a:solidFill>
+                    </a:lnL>
+                    <a:lnR w="9525">
+                      <a:solidFill>
+                        <a:srgbClr val="E6E8EB"/>
+                      </a:solidFill>
+                    </a:lnR>
+                    <a:lnT w="9525">
+                      <a:solidFill>
+                        <a:srgbClr val="E6E8EB"/>
+                      </a:solidFill>
+                    </a:lnT>
+                    <a:lnB w="9525">
+                      <a:solidFill>
+                        <a:srgbClr val="E6E8EB"/>
+                      </a:solidFill>
+                    </a:lnB>
+                  </a:tcPr>
+                </a:tc>
+                <a:tc>
+                  <a:txBody>
+                    <a:bodyPr wrap="square"/>
+                    <a:lstStyle/>
+                    <a:p>
+                      <a:pPr algn="l">
+                        <a:defRPr sz="950"/>
+                      </a:pPr>
+                      <a:r>
+                        <a:rPr sz="950" b="1">
+                          <a:solidFill>
+                            <a:srgbClr val="11181C"/>
+                          </a:solidFill>
+                          <a:latin typeface="Arial"/>
+                        </a:rPr>
+                        <a:t>RS*</a:t>
+                      </a:r>
+                      <a:endParaRPr sz="950"/>
+                    </a:p>
+                  </a:txBody>
+                  <a:tcPr marL="50800" marR="50800" marT="25400" marB="25400" anchor="ctr">
+                    <a:lnL w="9525">
+                      <a:solidFill>
+                        <a:srgbClr val="E6E8EB"/>
+                      </a:solidFill>
+                    </a:lnL>
+                    <a:lnR w="9525">
+                      <a:solidFill>
+                        <a:srgbClr val="E6E8EB"/>
+                      </a:solidFill>
+                    </a:lnR>
+                    <a:lnT w="9525">
+                      <a:solidFill>
+                        <a:srgbClr val="E6E8EB"/>
+                      </a:solidFill>
+                    </a:lnT>
+                    <a:lnB w="9525">
+                      <a:solidFill>
+                        <a:srgbClr val="E6E8EB"/>
+                      </a:solidFill>
+                    </a:lnB>
+                    <a:noFill/>
+                  </a:tcPr>
+                </a:tc>
+                <a:tc>
+                  <a:txBody>
+                    <a:bodyPr wrap="square"/>
+                    <a:lstStyle/>
+                    <a:p>
+                      <a:pPr algn="l">
+                        <a:defRPr sz="950"/>
+                      </a:pPr>
+                      <a:r>
+                        <a:rPr sz="950" b="0">
+                          <a:solidFill>
+                            <a:srgbClr val="11181C"/>
+                          </a:solidFill>
+                          <a:latin typeface="Arial"/>
+                        </a:rPr>
+                        <a:t>Faster boom extension. Equal to Palfinger High Speed Extension; Amco Veba has none.</a:t>
+                      </a:r>
+                      <a:endParaRPr sz="950"/>
+                    </a:p>
+                  </a:txBody>
+                  <a:tcPr marL="50800" marR="50800" marT="25400" marB="25400" anchor="ctr">
+                    <a:lnL w="9525">
+                      <a:solidFill>
+                        <a:srgbClr val="E6E8EB"/>
+                      </a:solidFill>
+                    </a:lnL>
+                    <a:lnR w="9525">
+                      <a:solidFill>
+                        <a:srgbClr val="E6E8EB"/>
+                      </a:solidFill>
+                    </a:lnR>
+                    <a:lnT w="9525">
+                      <a:solidFill>
+                        <a:srgbClr val="E6E8EB"/>
+                      </a:solidFill>
+                    </a:lnT>
+                    <a:lnB w="9525">
+                      <a:solidFill>
+                        <a:srgbClr val="E6E8EB"/>
+                      </a:solidFill>
+                    </a:lnB>
+                    <a:noFill/>
+                  </a:tcPr>
+                </a:tc>
+              </a:tr>
+              <a:tr h="323850">
+                <a:tc vMerge="1">
+                  <a:txBody>
+                    <a:bodyPr/>
+                    <a:lstStyle/>
+                    <a:p/>
+                  </a:txBody>
+                  <a:tcPr>
+                    <a:lnL w="9525">
+                      <a:solidFill>
+                        <a:srgbClr val="E6E8EB"/>
+                      </a:solidFill>
+                    </a:lnL>
+                    <a:lnR w="9525">
+                      <a:solidFill>
+                        <a:srgbClr val="E6E8EB"/>
+                      </a:solidFill>
+                    </a:lnR>
+                    <a:lnT w="9525">
+                      <a:solidFill>
+                        <a:srgbClr val="E6E8EB"/>
+                      </a:solidFill>
+                    </a:lnT>
+                    <a:lnB w="9525">
+                      <a:solidFill>
+                        <a:srgbClr val="E6E8EB"/>
+                      </a:solidFill>
+                    </a:lnB>
+                  </a:tcPr>
+                </a:tc>
+                <a:tc vMerge="1">
+                  <a:txBody>
+                    <a:bodyPr/>
+                    <a:lstStyle/>
+                    <a:p/>
+                  </a:txBody>
+                  <a:tcPr>
+                    <a:lnL w="9525">
+                      <a:solidFill>
+                        <a:srgbClr val="E6E8EB"/>
+                      </a:solidFill>
+                    </a:lnL>
+                    <a:lnR w="9525">
+                      <a:solidFill>
+                        <a:srgbClr val="E6E8EB"/>
+                      </a:solidFill>
+                    </a:lnR>
+                    <a:lnT w="9525">
+                      <a:solidFill>
+                        <a:srgbClr val="E6E8EB"/>
+                      </a:solidFill>
+                    </a:lnT>
+                    <a:lnB w="9525">
+                      <a:solidFill>
+                        <a:srgbClr val="E6E8EB"/>
+                      </a:solidFill>
+                    </a:lnB>
+                  </a:tcPr>
+                </a:tc>
+                <a:tc>
+                  <a:txBody>
+                    <a:bodyPr wrap="square"/>
+                    <a:lstStyle/>
+                    <a:p>
+                      <a:pPr algn="l">
+                        <a:defRPr sz="950"/>
+                      </a:pPr>
+                      <a:r>
+                        <a:rPr sz="950" b="1">
+                          <a:solidFill>
+                            <a:srgbClr val="11181C"/>
+                          </a:solidFill>
+                          <a:latin typeface="Arial"/>
+                        </a:rPr>
+                        <a:t>ECM*</a:t>
+                      </a:r>
+                      <a:endParaRPr sz="950"/>
+                    </a:p>
+                  </a:txBody>
+                  <a:tcPr marL="50800" marR="50800" marT="25400" marB="25400" anchor="ctr">
+                    <a:lnL w="9525">
+                      <a:solidFill>
+                        <a:srgbClr val="E6E8EB"/>
+                      </a:solidFill>
+                    </a:lnL>
+                    <a:lnR w="9525">
+                      <a:solidFill>
+                        <a:srgbClr val="E6E8EB"/>
+                      </a:solidFill>
+                    </a:lnR>
+                    <a:lnT w="9525">
+                      <a:solidFill>
+                        <a:srgbClr val="E6E8EB"/>
+                      </a:solidFill>
+                    </a:lnT>
+                    <a:lnB w="9525">
+                      <a:solidFill>
+                        <a:srgbClr val="E6E8EB"/>
+                      </a:solidFill>
+                    </a:lnB>
+                    <a:noFill/>
+                  </a:tcPr>
+                </a:tc>
+                <a:tc>
+                  <a:txBody>
+                    <a:bodyPr wrap="square"/>
+                    <a:lstStyle/>
+                    <a:p>
+                      <a:pPr algn="l">
+                        <a:defRPr sz="950"/>
+                      </a:pPr>
+                      <a:r>
+                        <a:rPr sz="950" b="0">
+                          <a:solidFill>
+                            <a:srgbClr val="11181C"/>
+                          </a:solidFill>
+                          <a:latin typeface="Arial"/>
+                        </a:rPr>
+                        <a:t>Electronic control and overload protection. Equal to Palfinger PALTRONIC and Amco Veba EBB.</a:t>
+                      </a:r>
+                      <a:endParaRPr sz="950"/>
+                    </a:p>
+                  </a:txBody>
+                  <a:tcPr marL="50800" marR="50800" marT="25400" marB="25400" anchor="ctr">
+                    <a:lnL w="9525">
+                      <a:solidFill>
+                        <a:srgbClr val="E6E8EB"/>
+                      </a:solidFill>
+                    </a:lnL>
+                    <a:lnR w="9525">
+                      <a:solidFill>
+                        <a:srgbClr val="E6E8EB"/>
+                      </a:solidFill>
+                    </a:lnR>
+                    <a:lnT w="9525">
+                      <a:solidFill>
+                        <a:srgbClr val="E6E8EB"/>
+                      </a:solidFill>
+                    </a:lnT>
+                    <a:lnB w="9525">
+                      <a:solidFill>
+                        <a:srgbClr val="E6E8EB"/>
+                      </a:solidFill>
+                    </a:lnB>
+                    <a:noFill/>
+                  </a:tcPr>
+                </a:tc>
+              </a:tr>
+              <a:tr h="323850">
+                <a:tc rowSpan="2">
+                  <a:txBody>
+                    <a:bodyPr wrap="square"/>
+                    <a:lstStyle/>
+                    <a:p>
+                      <a:pPr algn="l">
+                        <a:defRPr sz="1100"/>
+                      </a:pPr>
+                      <a:r>
+                        <a:rPr sz="1100" b="1">
+                          <a:solidFill>
+                            <a:srgbClr val="076932"/>
+                          </a:solidFill>
+                          <a:latin typeface="Arial"/>
+                        </a:rPr>
+                        <a:t>Price</a:t>
+                      </a:r>
+                      <a:endParaRPr sz="1100"/>
+                    </a:p>
+                  </a:txBody>
+                  <a:tcPr marL="50800" marR="50800" marT="25400" marB="25400" anchor="ctr">
+                    <a:lnL w="9525">
+                      <a:solidFill>
+                        <a:srgbClr val="E6E8EB"/>
+                      </a:solidFill>
+                    </a:lnL>
+                    <a:lnR w="9525">
+                      <a:solidFill>
+                        <a:srgbClr val="E6E8EB"/>
+                      </a:solidFill>
+                    </a:lnR>
+                    <a:lnT w="9525">
+                      <a:solidFill>
+                        <a:srgbClr val="E6E8EB"/>
+                      </a:solidFill>
+                    </a:lnT>
+                    <a:lnB w="9525">
+                      <a:solidFill>
+                        <a:srgbClr val="E6E8EB"/>
+                      </a:solidFill>
+                    </a:lnB>
+                    <a:noFill/>
+                  </a:tcPr>
+                </a:tc>
+                <a:tc rowSpan="2">
+                  <a:txBody>
+                    <a:bodyPr wrap="square"/>
+                    <a:lstStyle/>
+                    <a:p>
+                      <a:pPr algn="l">
+                        <a:defRPr sz="1050"/>
+                      </a:pPr>
+                      <a:r>
+                        <a:rPr sz="1050" b="1">
+                          <a:solidFill>
+                            <a:srgbClr val="11181C"/>
+                          </a:solidFill>
+                          <a:latin typeface="Arial"/>
+                        </a:rPr>
+                        <a:t>Negotiate a better price with F.lli Ferrari and XCMG</a:t>
+                      </a:r>
+                      <a:endParaRPr sz="1050"/>
+                    </a:p>
+                  </a:txBody>
+                  <a:tcPr marL="50800" marR="50800" marT="25400" marB="25400" anchor="ctr">
+                    <a:lnL w="9525">
+                      <a:solidFill>
+                        <a:srgbClr val="E6E8EB"/>
+                      </a:solidFill>
+                    </a:lnL>
+                    <a:lnR w="9525">
+                      <a:solidFill>
+                        <a:srgbClr val="E6E8EB"/>
+                      </a:solidFill>
+                    </a:lnR>
+                    <a:lnT w="9525">
+                      <a:solidFill>
+                        <a:srgbClr val="E6E8EB"/>
+                      </a:solidFill>
+                    </a:lnT>
+                    <a:lnB w="9525">
+                      <a:solidFill>
+                        <a:srgbClr val="E6E8EB"/>
+                      </a:solidFill>
+                    </a:lnB>
+                    <a:noFill/>
+                  </a:tcPr>
+                </a:tc>
+                <a:tc>
+                  <a:txBody>
+                    <a:bodyPr wrap="square"/>
+                    <a:lstStyle/>
+                    <a:p>
+                      <a:pPr algn="l">
+                        <a:defRPr sz="950"/>
+                      </a:pPr>
+                      <a:r>
+                        <a:rPr sz="950" b="1">
+                          <a:solidFill>
+                            <a:srgbClr val="11181C"/>
+                          </a:solidFill>
+                          <a:latin typeface="Arial"/>
+                        </a:rPr>
+                        <a:t>Ferrari 746 A4 · 9601CR A8 · 990R</a:t>
+                      </a:r>
+                      <a:endParaRPr sz="950"/>
+                    </a:p>
+                  </a:txBody>
+                  <a:tcPr marL="50800" marR="50800" marT="25400" marB="25400" anchor="ctr">
+                    <a:lnL w="9525">
+                      <a:solidFill>
+                        <a:srgbClr val="E6E8EB"/>
+                      </a:solidFill>
+                    </a:lnL>
+                    <a:lnR w="9525">
+                      <a:solidFill>
+                        <a:srgbClr val="E6E8EB"/>
+                      </a:solidFill>
+                    </a:lnR>
+                    <a:lnT w="9525">
+                      <a:solidFill>
+                        <a:srgbClr val="E6E8EB"/>
+                      </a:solidFill>
+                    </a:lnT>
+                    <a:lnB w="9525">
+                      <a:solidFill>
+                        <a:srgbClr val="E6E8EB"/>
+                      </a:solidFill>
+                    </a:lnB>
+                    <a:noFill/>
+                  </a:tcPr>
+                </a:tc>
+                <a:tc>
+                  <a:txBody>
+                    <a:bodyPr wrap="square"/>
+                    <a:lstStyle/>
+                    <a:p>
+                      <a:pPr algn="l">
+                        <a:defRPr sz="950"/>
+                      </a:pPr>
+                      <a:r>
+                        <a:rPr sz="950" b="0">
+                          <a:solidFill>
+                            <a:srgbClr val="11181C"/>
+                          </a:solidFill>
+                          <a:latin typeface="Arial"/>
+                        </a:rPr>
+                        <a:t>Ask for a lower price: 40–45 tm (+48%), 50–55 tm (+85%), 70–75 tm (+79%) vs the Top 1.</a:t>
+                      </a:r>
+                      <a:endParaRPr sz="950"/>
+                    </a:p>
+                  </a:txBody>
+                  <a:tcPr marL="50800" marR="50800" marT="25400" marB="25400" anchor="ctr">
+                    <a:lnL w="9525">
+                      <a:solidFill>
+                        <a:srgbClr val="E6E8EB"/>
+                      </a:solidFill>
+                    </a:lnL>
+                    <a:lnR w="9525">
+                      <a:solidFill>
+                        <a:srgbClr val="E6E8EB"/>
+                      </a:solidFill>
+                    </a:lnR>
+                    <a:lnT w="9525">
+                      <a:solidFill>
+                        <a:srgbClr val="E6E8EB"/>
+                      </a:solidFill>
+                    </a:lnT>
+                    <a:lnB w="9525">
+                      <a:solidFill>
+                        <a:srgbClr val="E6E8EB"/>
+                      </a:solidFill>
+                    </a:lnB>
+                    <a:noFill/>
+                  </a:tcPr>
+                </a:tc>
+              </a:tr>
+              <a:tr h="323850">
+                <a:tc vMerge="1">
+                  <a:txBody>
+                    <a:bodyPr/>
+                    <a:lstStyle/>
+                    <a:p/>
+                  </a:txBody>
+                  <a:tcPr>
+                    <a:lnL w="9525">
+                      <a:solidFill>
+                        <a:srgbClr val="E6E8EB"/>
+                      </a:solidFill>
+                    </a:lnL>
+                    <a:lnR w="9525">
+                      <a:solidFill>
+                        <a:srgbClr val="E6E8EB"/>
+                      </a:solidFill>
+                    </a:lnR>
+                    <a:lnT w="9525">
+                      <a:solidFill>
+                        <a:srgbClr val="E6E8EB"/>
+                      </a:solidFill>
+                    </a:lnT>
+                    <a:lnB w="9525">
+                      <a:solidFill>
+                        <a:srgbClr val="E6E8EB"/>
+                      </a:solidFill>
+                    </a:lnB>
+                  </a:tcPr>
+                </a:tc>
+                <a:tc vMerge="1">
+                  <a:txBody>
+                    <a:bodyPr/>
+                    <a:lstStyle/>
+                    <a:p/>
+                  </a:txBody>
+                  <a:tcPr>
+                    <a:lnL w="9525">
+                      <a:solidFill>
+                        <a:srgbClr val="E6E8EB"/>
+                      </a:solidFill>
+                    </a:lnL>
+                    <a:lnR w="9525">
+                      <a:solidFill>
+                        <a:srgbClr val="E6E8EB"/>
+                      </a:solidFill>
+                    </a:lnR>
+                    <a:lnT w="9525">
+                      <a:solidFill>
+                        <a:srgbClr val="E6E8EB"/>
+                      </a:solidFill>
+                    </a:lnT>
+                    <a:lnB w="9525">
+                      <a:solidFill>
+                        <a:srgbClr val="E6E8EB"/>
+                      </a:solidFill>
+                    </a:lnB>
+                  </a:tcPr>
+                </a:tc>
+                <a:tc>
+                  <a:txBody>
+                    <a:bodyPr wrap="square"/>
+                    <a:lstStyle/>
+                    <a:p>
+                      <a:pPr algn="l">
+                        <a:defRPr sz="950"/>
+                      </a:pPr>
+                      <a:r>
+                        <a:rPr sz="950" b="1">
+                          <a:solidFill>
+                            <a:srgbClr val="11181C"/>
+                          </a:solidFill>
+                          <a:latin typeface="Arial"/>
+                        </a:rPr>
+                        <a:t>XCMG SQZ325.4 · SQZ365.4</a:t>
+                      </a:r>
+                      <a:endParaRPr sz="950"/>
+                    </a:p>
+                  </a:txBody>
+                  <a:tcPr marL="50800" marR="50800" marT="25400" marB="25400" anchor="ctr">
+                    <a:lnL w="9525">
+                      <a:solidFill>
+                        <a:srgbClr val="E6E8EB"/>
+                      </a:solidFill>
+                    </a:lnL>
+                    <a:lnR w="9525">
+                      <a:solidFill>
+                        <a:srgbClr val="E6E8EB"/>
+                      </a:solidFill>
+                    </a:lnR>
+                    <a:lnT w="9525">
+                      <a:solidFill>
+                        <a:srgbClr val="E6E8EB"/>
+                      </a:solidFill>
+                    </a:lnT>
+                    <a:lnB w="9525">
+                      <a:solidFill>
+                        <a:srgbClr val="E6E8EB"/>
+                      </a:solidFill>
+                    </a:lnB>
+                    <a:noFill/>
+                  </a:tcPr>
+                </a:tc>
+                <a:tc>
+                  <a:txBody>
+                    <a:bodyPr wrap="square"/>
+                    <a:lstStyle/>
+                    <a:p>
+                      <a:pPr algn="l">
+                        <a:defRPr sz="950"/>
+                      </a:pPr>
+                      <a:r>
+                        <a:rPr sz="950" b="0">
+                          <a:solidFill>
+                            <a:srgbClr val="11181C"/>
+                          </a:solidFill>
+                          <a:latin typeface="Arial"/>
+                        </a:rPr>
+                        <a:t>Ask for a Triatra special price: 30–35 tm (+4%), 35–40 tm (−9%).</a:t>
+                      </a:r>
+                      <a:endParaRPr sz="950"/>
+                    </a:p>
+                  </a:txBody>
+                  <a:tcPr marL="50800" marR="50800" marT="25400" marB="25400" anchor="ctr">
+                    <a:lnL w="9525">
+                      <a:solidFill>
+                        <a:srgbClr val="E6E8EB"/>
+                      </a:solidFill>
+                    </a:lnL>
+                    <a:lnR w="9525">
+                      <a:solidFill>
+                        <a:srgbClr val="E6E8EB"/>
+                      </a:solidFill>
+                    </a:lnR>
+                    <a:lnT w="9525">
+                      <a:solidFill>
+                        <a:srgbClr val="E6E8EB"/>
+                      </a:solidFill>
+                    </a:lnT>
+                    <a:lnB w="9525">
+                      <a:solidFill>
+                        <a:srgbClr val="E6E8EB"/>
+                      </a:solidFill>
+                    </a:lnB>
+                    <a:noFill/>
+                  </a:tcPr>
+                </a:tc>
+              </a:tr>
+              <a:tr h="323850">
+                <a:tc rowSpan="3">
+                  <a:txBody>
+                    <a:bodyPr wrap="square"/>
+                    <a:lstStyle/>
+                    <a:p>
+                      <a:pPr algn="l">
+                        <a:defRPr sz="1100"/>
+                      </a:pPr>
+                      <a:r>
+                        <a:rPr sz="1100" b="1">
+                          <a:solidFill>
+                            <a:srgbClr val="076932"/>
+                          </a:solidFill>
+                          <a:latin typeface="Arial"/>
+                        </a:rPr>
+                        <a:t>Place</a:t>
+                      </a:r>
+                      <a:endParaRPr sz="1100"/>
+                    </a:p>
+                  </a:txBody>
+                  <a:tcPr marL="50800" marR="50800" marT="25400" marB="25400" anchor="ctr">
+                    <a:lnL w="9525">
+                      <a:solidFill>
+                        <a:srgbClr val="E6E8EB"/>
+                      </a:solidFill>
+                    </a:lnL>
+                    <a:lnR w="9525">
+                      <a:solidFill>
+                        <a:srgbClr val="E6E8EB"/>
+                      </a:solidFill>
+                    </a:lnR>
+                    <a:lnT w="9525">
+                      <a:solidFill>
+                        <a:srgbClr val="E6E8EB"/>
+                      </a:solidFill>
+                    </a:lnT>
+                    <a:lnB w="9525">
+                      <a:solidFill>
+                        <a:srgbClr val="E6E8EB"/>
+                      </a:solidFill>
+                    </a:lnB>
+                    <a:noFill/>
+                  </a:tcPr>
+                </a:tc>
+                <a:tc rowSpan="3">
+                  <a:txBody>
+                    <a:bodyPr wrap="square"/>
+                    <a:lstStyle/>
+                    <a:p>
+                      <a:pPr algn="l">
+                        <a:defRPr sz="1050"/>
+                      </a:pPr>
+                      <a:r>
+                        <a:rPr sz="1050" b="1">
+                          <a:solidFill>
+                            <a:srgbClr val="11181C"/>
+                          </a:solidFill>
+                          <a:latin typeface="Arial"/>
+                        </a:rPr>
+                        <a:t>Negotiate stock to cut lead time</a:t>
+                      </a:r>
+                      <a:endParaRPr sz="1050"/>
+                    </a:p>
+                  </a:txBody>
+                  <a:tcPr marL="50800" marR="50800" marT="25400" marB="25400" anchor="ctr">
+                    <a:lnL w="9525">
+                      <a:solidFill>
+                        <a:srgbClr val="E6E8EB"/>
+                      </a:solidFill>
+                    </a:lnL>
+                    <a:lnR w="9525">
+                      <a:solidFill>
+                        <a:srgbClr val="E6E8EB"/>
+                      </a:solidFill>
+                    </a:lnR>
+                    <a:lnT w="9525">
+                      <a:solidFill>
+                        <a:srgbClr val="E6E8EB"/>
+                      </a:solidFill>
+                    </a:lnT>
+                    <a:lnB w="9525">
+                      <a:solidFill>
+                        <a:srgbClr val="E6E8EB"/>
+                      </a:solidFill>
+                    </a:lnB>
+                    <a:noFill/>
+                  </a:tcPr>
+                </a:tc>
+                <a:tc>
+                  <a:txBody>
+                    <a:bodyPr wrap="square"/>
+                    <a:lstStyle/>
+                    <a:p>
+                      <a:pPr algn="l">
+                        <a:defRPr sz="950"/>
+                      </a:pPr>
+                      <a:r>
+                        <a:rPr sz="950" b="1">
+                          <a:solidFill>
+                            <a:srgbClr val="11181C"/>
+                          </a:solidFill>
+                          <a:latin typeface="Arial"/>
+                        </a:rPr>
+                        <a:t>Ferrari 268 A4 · FBR450R A4</a:t>
+                      </a:r>
+                      <a:endParaRPr sz="950"/>
+                    </a:p>
+                  </a:txBody>
+                  <a:tcPr marL="50800" marR="50800" marT="25400" marB="25400" anchor="ctr">
+                    <a:lnL w="9525">
+                      <a:solidFill>
+                        <a:srgbClr val="E6E8EB"/>
+                      </a:solidFill>
+                    </a:lnL>
+                    <a:lnR w="9525">
+                      <a:solidFill>
+                        <a:srgbClr val="E6E8EB"/>
+                      </a:solidFill>
+                    </a:lnR>
+                    <a:lnT w="9525">
+                      <a:solidFill>
+                        <a:srgbClr val="E6E8EB"/>
+                      </a:solidFill>
+                    </a:lnT>
+                    <a:lnB w="9525">
+                      <a:solidFill>
+                        <a:srgbClr val="E6E8EB"/>
+                      </a:solidFill>
+                    </a:lnB>
+                    <a:noFill/>
+                  </a:tcPr>
+                </a:tc>
+                <a:tc>
+                  <a:txBody>
+                    <a:bodyPr wrap="square"/>
+                    <a:lstStyle/>
+                    <a:p>
+                      <a:pPr algn="l">
+                        <a:defRPr sz="950"/>
+                      </a:pPr>
+                      <a:r>
+                        <a:rPr sz="950" b="0">
+                          <a:solidFill>
+                            <a:srgbClr val="11181C"/>
+                          </a:solidFill>
+                          <a:latin typeface="Arial"/>
+                        </a:rPr>
+                        <a:t>Stock at the Ferrari China factory for a 14-week lead time (25–30 tm −23%, 45–50 tm −32%).</a:t>
+                      </a:r>
+                      <a:endParaRPr sz="950"/>
+                    </a:p>
+                  </a:txBody>
+                  <a:tcPr marL="50800" marR="50800" marT="25400" marB="25400" anchor="ctr">
+                    <a:lnL w="9525">
+                      <a:solidFill>
+                        <a:srgbClr val="E6E8EB"/>
+                      </a:solidFill>
+                    </a:lnL>
+                    <a:lnR w="9525">
+                      <a:solidFill>
+                        <a:srgbClr val="E6E8EB"/>
+                      </a:solidFill>
+                    </a:lnR>
+                    <a:lnT w="9525">
+                      <a:solidFill>
+                        <a:srgbClr val="E6E8EB"/>
+                      </a:solidFill>
+                    </a:lnT>
+                    <a:lnB w="9525">
+                      <a:solidFill>
+                        <a:srgbClr val="E6E8EB"/>
+                      </a:solidFill>
+                    </a:lnB>
+                    <a:noFill/>
+                  </a:tcPr>
+                </a:tc>
+              </a:tr>
+              <a:tr h="323850">
+                <a:tc vMerge="1">
+                  <a:txBody>
+                    <a:bodyPr/>
+                    <a:lstStyle/>
+                    <a:p/>
+                  </a:txBody>
+                  <a:tcPr>
+                    <a:lnL w="9525">
+                      <a:solidFill>
+                        <a:srgbClr val="E6E8EB"/>
+                      </a:solidFill>
+                    </a:lnL>
+                    <a:lnR w="9525">
+                      <a:solidFill>
+                        <a:srgbClr val="E6E8EB"/>
+                      </a:solidFill>
+                    </a:lnR>
+                    <a:lnT w="9525">
+                      <a:solidFill>
+                        <a:srgbClr val="E6E8EB"/>
+                      </a:solidFill>
+                    </a:lnT>
+                    <a:lnB w="9525">
+                      <a:solidFill>
+                        <a:srgbClr val="E6E8EB"/>
+                      </a:solidFill>
+                    </a:lnB>
+                  </a:tcPr>
+                </a:tc>
+                <a:tc vMerge="1">
+                  <a:txBody>
+                    <a:bodyPr/>
+                    <a:lstStyle/>
+                    <a:p/>
+                  </a:txBody>
+                  <a:tcPr>
+                    <a:lnL w="9525">
+                      <a:solidFill>
+                        <a:srgbClr val="E6E8EB"/>
+                      </a:solidFill>
+                    </a:lnL>
+                    <a:lnR w="9525">
+                      <a:solidFill>
+                        <a:srgbClr val="E6E8EB"/>
+                      </a:solidFill>
+                    </a:lnR>
+                    <a:lnT w="9525">
+                      <a:solidFill>
+                        <a:srgbClr val="E6E8EB"/>
+                      </a:solidFill>
+                    </a:lnT>
+                    <a:lnB w="9525">
+                      <a:solidFill>
+                        <a:srgbClr val="E6E8EB"/>
+                      </a:solidFill>
+                    </a:lnB>
+                  </a:tcPr>
+                </a:tc>
+                <a:tc>
+                  <a:txBody>
+                    <a:bodyPr wrap="square"/>
+                    <a:lstStyle/>
+                    <a:p>
+                      <a:pPr algn="l">
+                        <a:defRPr sz="950"/>
+                      </a:pPr>
+                      <a:r>
+                        <a:rPr sz="950" b="1">
+                          <a:solidFill>
+                            <a:srgbClr val="11181C"/>
+                          </a:solidFill>
+                          <a:latin typeface="Arial"/>
+                        </a:rPr>
+                        <a:t>Ferrari main components</a:t>
+                      </a:r>
+                      <a:endParaRPr sz="950"/>
+                    </a:p>
+                  </a:txBody>
+                  <a:tcPr marL="50800" marR="50800" marT="25400" marB="25400" anchor="ctr">
+                    <a:lnL w="9525">
+                      <a:solidFill>
+                        <a:srgbClr val="E6E8EB"/>
+                      </a:solidFill>
+                    </a:lnL>
+                    <a:lnR w="9525">
+                      <a:solidFill>
+                        <a:srgbClr val="E6E8EB"/>
+                      </a:solidFill>
+                    </a:lnR>
+                    <a:lnT w="9525">
+                      <a:solidFill>
+                        <a:srgbClr val="E6E8EB"/>
+                      </a:solidFill>
+                    </a:lnT>
+                    <a:lnB w="9525">
+                      <a:solidFill>
+                        <a:srgbClr val="E6E8EB"/>
+                      </a:solidFill>
+                    </a:lnB>
+                    <a:noFill/>
+                  </a:tcPr>
+                </a:tc>
+                <a:tc>
+                  <a:txBody>
+                    <a:bodyPr wrap="square"/>
+                    <a:lstStyle/>
+                    <a:p>
+                      <a:pPr algn="l">
+                        <a:defRPr sz="950"/>
+                      </a:pPr>
+                      <a:r>
+                        <a:rPr sz="950" b="0">
+                          <a:solidFill>
+                            <a:srgbClr val="11181C"/>
+                          </a:solidFill>
+                          <a:latin typeface="Arial"/>
+                        </a:rPr>
+                        <a:t>Stock main components and spare parts in Malaysia.</a:t>
+                      </a:r>
+                      <a:endParaRPr sz="950"/>
+                    </a:p>
+                  </a:txBody>
+                  <a:tcPr marL="50800" marR="50800" marT="25400" marB="25400" anchor="ctr">
+                    <a:lnL w="9525">
+                      <a:solidFill>
+                        <a:srgbClr val="E6E8EB"/>
+                      </a:solidFill>
+                    </a:lnL>
+                    <a:lnR w="9525">
+                      <a:solidFill>
+                        <a:srgbClr val="E6E8EB"/>
+                      </a:solidFill>
+                    </a:lnR>
+                    <a:lnT w="9525">
+                      <a:solidFill>
+                        <a:srgbClr val="E6E8EB"/>
+                      </a:solidFill>
+                    </a:lnT>
+                    <a:lnB w="9525">
+                      <a:solidFill>
+                        <a:srgbClr val="E6E8EB"/>
+                      </a:solidFill>
+                    </a:lnB>
+                    <a:noFill/>
+                  </a:tcPr>
+                </a:tc>
+              </a:tr>
+              <a:tr h="323850">
+                <a:tc vMerge="1">
+                  <a:txBody>
+                    <a:bodyPr/>
+                    <a:lstStyle/>
+                    <a:p/>
+                  </a:txBody>
+                  <a:tcPr>
+                    <a:lnL w="9525">
+                      <a:solidFill>
+                        <a:srgbClr val="E6E8EB"/>
+                      </a:solidFill>
+                    </a:lnL>
+                    <a:lnR w="9525">
+                      <a:solidFill>
+                        <a:srgbClr val="E6E8EB"/>
+                      </a:solidFill>
+                    </a:lnR>
+                    <a:lnT w="9525">
+                      <a:solidFill>
+                        <a:srgbClr val="E6E8EB"/>
+                      </a:solidFill>
+                    </a:lnT>
+                    <a:lnB w="9525">
+                      <a:solidFill>
+                        <a:srgbClr val="E6E8EB"/>
+                      </a:solidFill>
+                    </a:lnB>
+                  </a:tcPr>
+                </a:tc>
+                <a:tc vMerge="1">
+                  <a:txBody>
+                    <a:bodyPr/>
+                    <a:lstStyle/>
+                    <a:p/>
+                  </a:txBody>
+                  <a:tcPr>
+                    <a:lnL w="9525">
+                      <a:solidFill>
+                        <a:srgbClr val="E6E8EB"/>
+                      </a:solidFill>
+                    </a:lnL>
+                    <a:lnR w="9525">
+                      <a:solidFill>
+                        <a:srgbClr val="E6E8EB"/>
+                      </a:solidFill>
+                    </a:lnR>
+                    <a:lnT w="9525">
+                      <a:solidFill>
+                        <a:srgbClr val="E6E8EB"/>
+                      </a:solidFill>
+                    </a:lnT>
+                    <a:lnB w="9525">
+                      <a:solidFill>
+                        <a:srgbClr val="E6E8EB"/>
+                      </a:solidFill>
+                    </a:lnB>
+                  </a:tcPr>
+                </a:tc>
+                <a:tc>
+                  <a:txBody>
+                    <a:bodyPr wrap="square"/>
+                    <a:lstStyle/>
+                    <a:p>
+                      <a:pPr algn="l">
+                        <a:defRPr sz="950"/>
+                      </a:pPr>
+                      <a:r>
+                        <a:rPr sz="950" b="1">
+                          <a:solidFill>
+                            <a:srgbClr val="11181C"/>
+                          </a:solidFill>
+                          <a:latin typeface="Arial"/>
+                        </a:rPr>
+                        <a:t>XCMG</a:t>
+                      </a:r>
+                      <a:endParaRPr sz="950"/>
+                    </a:p>
+                  </a:txBody>
+                  <a:tcPr marL="50800" marR="50800" marT="25400" marB="25400" anchor="ctr">
+                    <a:lnL w="9525">
+                      <a:solidFill>
+                        <a:srgbClr val="E6E8EB"/>
+                      </a:solidFill>
+                    </a:lnL>
+                    <a:lnR w="9525">
+                      <a:solidFill>
+                        <a:srgbClr val="E6E8EB"/>
+                      </a:solidFill>
+                    </a:lnR>
+                    <a:lnT w="9525">
+                      <a:solidFill>
+                        <a:srgbClr val="E6E8EB"/>
+                      </a:solidFill>
+                    </a:lnT>
+                    <a:lnB w="9525">
+                      <a:solidFill>
+                        <a:srgbClr val="E6E8EB"/>
+                      </a:solidFill>
+                    </a:lnB>
+                    <a:noFill/>
+                  </a:tcPr>
+                </a:tc>
+                <a:tc>
+                  <a:txBody>
+                    <a:bodyPr wrap="square"/>
+                    <a:lstStyle/>
+                    <a:p>
+                      <a:pPr algn="l">
+                        <a:defRPr sz="950"/>
+                      </a:pPr>
+                      <a:r>
+                        <a:rPr sz="950" b="0">
+                          <a:solidFill>
+                            <a:srgbClr val="11181C"/>
+                          </a:solidFill>
+                          <a:latin typeface="Arial"/>
+                        </a:rPr>
+                        <a:t>Agree supply terms with its official distributor, GM Tractors.</a:t>
+                      </a:r>
+                      <a:endParaRPr sz="950"/>
+                    </a:p>
+                  </a:txBody>
+                  <a:tcPr marL="50800" marR="50800" marT="25400" marB="25400" anchor="ctr">
+                    <a:lnL w="9525">
+                      <a:solidFill>
+                        <a:srgbClr val="E6E8EB"/>
+                      </a:solidFill>
+                    </a:lnL>
+                    <a:lnR w="9525">
+                      <a:solidFill>
+                        <a:srgbClr val="E6E8EB"/>
+                      </a:solidFill>
+                    </a:lnR>
+                    <a:lnT w="9525">
+                      <a:solidFill>
+                        <a:srgbClr val="E6E8EB"/>
+                      </a:solidFill>
+                    </a:lnT>
+                    <a:lnB w="9525">
+                      <a:solidFill>
+                        <a:srgbClr val="E6E8EB"/>
+                      </a:solidFill>
+                    </a:lnB>
+                    <a:noFill/>
+                  </a:tcPr>
+                </a:tc>
+              </a:tr>
+              <a:tr h="323850">
+                <a:tc rowSpan="2">
+                  <a:txBody>
+                    <a:bodyPr wrap="square"/>
+                    <a:lstStyle/>
+                    <a:p>
+                      <a:pPr algn="l">
+                        <a:defRPr sz="1100"/>
+                      </a:pPr>
+                      <a:r>
+                        <a:rPr sz="1100" b="1">
+                          <a:solidFill>
+                            <a:srgbClr val="076932"/>
+                          </a:solidFill>
+                          <a:latin typeface="Arial"/>
+                        </a:rPr>
+                        <a:t>Promotion</a:t>
+                      </a:r>
+                      <a:endParaRPr sz="1100"/>
+                    </a:p>
+                  </a:txBody>
+                  <a:tcPr marL="50800" marR="50800" marT="25400" marB="25400" anchor="ctr">
+                    <a:lnL w="9525">
+                      <a:solidFill>
+                        <a:srgbClr val="E6E8EB"/>
+                      </a:solidFill>
+                    </a:lnL>
+                    <a:lnR w="9525">
+                      <a:solidFill>
+                        <a:srgbClr val="E6E8EB"/>
+                      </a:solidFill>
+                    </a:lnR>
+                    <a:lnT w="9525">
+                      <a:solidFill>
+                        <a:srgbClr val="E6E8EB"/>
+                      </a:solidFill>
+                    </a:lnT>
+                    <a:lnB w="9525">
+                      <a:solidFill>
+                        <a:srgbClr val="E6E8EB"/>
+                      </a:solidFill>
+                    </a:lnB>
+                    <a:noFill/>
+                  </a:tcPr>
+                </a:tc>
+                <a:tc rowSpan="2">
+                  <a:txBody>
+                    <a:bodyPr wrap="square"/>
+                    <a:lstStyle/>
+                    <a:p>
+                      <a:pPr algn="l">
+                        <a:defRPr sz="1050"/>
+                      </a:pPr>
+                      <a:r>
+                        <a:rPr sz="1050" b="1">
+                          <a:solidFill>
+                            <a:srgbClr val="11181C"/>
+                          </a:solidFill>
+                          <a:latin typeface="Arial"/>
+                        </a:rPr>
+                        <a:t>Sell a ready-to-work package</a:t>
+                      </a:r>
+                      <a:endParaRPr sz="1050"/>
+                    </a:p>
+                  </a:txBody>
+                  <a:tcPr marL="50800" marR="50800" marT="25400" marB="25400" anchor="ctr">
+                    <a:lnL w="9525">
+                      <a:solidFill>
+                        <a:srgbClr val="E6E8EB"/>
+                      </a:solidFill>
+                    </a:lnL>
+                    <a:lnR w="9525">
+                      <a:solidFill>
+                        <a:srgbClr val="E6E8EB"/>
+                      </a:solidFill>
+                    </a:lnR>
+                    <a:lnT w="9525">
+                      <a:solidFill>
+                        <a:srgbClr val="E6E8EB"/>
+                      </a:solidFill>
+                    </a:lnT>
+                    <a:lnB w="9525">
+                      <a:solidFill>
+                        <a:srgbClr val="E6E8EB"/>
+                      </a:solidFill>
+                    </a:lnB>
+                    <a:noFill/>
+                  </a:tcPr>
+                </a:tc>
+                <a:tc>
+                  <a:txBody>
+                    <a:bodyPr wrap="square"/>
+                    <a:lstStyle/>
+                    <a:p>
+                      <a:pPr algn="l">
+                        <a:defRPr sz="950"/>
+                      </a:pPr>
+                      <a:r>
+                        <a:rPr sz="950" b="1">
+                          <a:solidFill>
+                            <a:srgbClr val="11181C"/>
+                          </a:solidFill>
+                          <a:latin typeface="Arial"/>
+                        </a:rPr>
+                        <a:t>Package</a:t>
+                      </a:r>
+                      <a:endParaRPr sz="950"/>
+                    </a:p>
+                  </a:txBody>
+                  <a:tcPr marL="50800" marR="50800" marT="25400" marB="25400" anchor="ctr">
+                    <a:lnL w="9525">
+                      <a:solidFill>
+                        <a:srgbClr val="E6E8EB"/>
+                      </a:solidFill>
+                    </a:lnL>
+                    <a:lnR w="9525">
+                      <a:solidFill>
+                        <a:srgbClr val="E6E8EB"/>
+                      </a:solidFill>
+                    </a:lnR>
+                    <a:lnT w="9525">
+                      <a:solidFill>
+                        <a:srgbClr val="E6E8EB"/>
+                      </a:solidFill>
+                    </a:lnT>
+                    <a:lnB w="9525">
+                      <a:solidFill>
+                        <a:srgbClr val="E6E8EB"/>
+                      </a:solidFill>
+                    </a:lnB>
+                    <a:noFill/>
+                  </a:tcPr>
+                </a:tc>
+                <a:tc>
+                  <a:txBody>
+                    <a:bodyPr wrap="square"/>
+                    <a:lstStyle/>
+                    <a:p>
+                      <a:pPr algn="l">
+                        <a:defRPr sz="950"/>
+                      </a:pPr>
+                      <a:r>
+                        <a:rPr sz="950" b="0">
+                          <a:solidFill>
+                            <a:srgbClr val="11181C"/>
+                          </a:solidFill>
+                          <a:latin typeface="Arial"/>
+                        </a:rPr>
+                        <a:t>Crane + flatdeck + installation as one offer; add a 2-year warranty on Ferrari.</a:t>
+                      </a:r>
+                      <a:endParaRPr sz="950"/>
+                    </a:p>
+                  </a:txBody>
+                  <a:tcPr marL="50800" marR="50800" marT="25400" marB="25400" anchor="ctr">
+                    <a:lnL w="9525">
+                      <a:solidFill>
+                        <a:srgbClr val="E6E8EB"/>
+                      </a:solidFill>
+                    </a:lnL>
+                    <a:lnR w="9525">
+                      <a:solidFill>
+                        <a:srgbClr val="E6E8EB"/>
+                      </a:solidFill>
+                    </a:lnR>
+                    <a:lnT w="9525">
+                      <a:solidFill>
+                        <a:srgbClr val="E6E8EB"/>
+                      </a:solidFill>
+                    </a:lnT>
+                    <a:lnB w="9525">
+                      <a:solidFill>
+                        <a:srgbClr val="E6E8EB"/>
+                      </a:solidFill>
+                    </a:lnB>
+                    <a:noFill/>
+                  </a:tcPr>
+                </a:tc>
+              </a:tr>
+              <a:tr h="323850">
+                <a:tc vMerge="1">
+                  <a:txBody>
+                    <a:bodyPr/>
+                    <a:lstStyle/>
+                    <a:p/>
+                  </a:txBody>
+                  <a:tcPr>
+                    <a:lnL w="9525">
+                      <a:solidFill>
+                        <a:srgbClr val="E6E8EB"/>
+                      </a:solidFill>
+                    </a:lnL>
+                    <a:lnR w="9525">
+                      <a:solidFill>
+                        <a:srgbClr val="E6E8EB"/>
+                      </a:solidFill>
+                    </a:lnR>
+                    <a:lnT w="9525">
+                      <a:solidFill>
+                        <a:srgbClr val="E6E8EB"/>
+                      </a:solidFill>
+                    </a:lnT>
+                    <a:lnB w="9525">
+                      <a:solidFill>
+                        <a:srgbClr val="E6E8EB"/>
+                      </a:solidFill>
+                    </a:lnB>
+                  </a:tcPr>
+                </a:tc>
+                <a:tc vMerge="1">
+                  <a:txBody>
+                    <a:bodyPr/>
+                    <a:lstStyle/>
+                    <a:p/>
+                  </a:txBody>
+                  <a:tcPr>
+                    <a:lnL w="9525">
+                      <a:solidFill>
+                        <a:srgbClr val="E6E8EB"/>
+                      </a:solidFill>
+                    </a:lnL>
+                    <a:lnR w="9525">
+                      <a:solidFill>
+                        <a:srgbClr val="E6E8EB"/>
+                      </a:solidFill>
+                    </a:lnR>
+                    <a:lnT w="9525">
+                      <a:solidFill>
+                        <a:srgbClr val="E6E8EB"/>
+                      </a:solidFill>
+                    </a:lnT>
+                    <a:lnB w="9525">
+                      <a:solidFill>
+                        <a:srgbClr val="E6E8EB"/>
+                      </a:solidFill>
+                    </a:lnB>
+                  </a:tcPr>
+                </a:tc>
+                <a:tc>
+                  <a:txBody>
+                    <a:bodyPr wrap="square"/>
+                    <a:lstStyle/>
+                    <a:p>
+                      <a:pPr algn="l">
+                        <a:defRPr sz="950"/>
+                      </a:pPr>
+                      <a:r>
+                        <a:rPr sz="950" b="1">
+                          <a:solidFill>
+                            <a:srgbClr val="11181C"/>
+                          </a:solidFill>
+                          <a:latin typeface="Arial"/>
+                        </a:rPr>
+                        <a:t>Exhibition and visits</a:t>
+                      </a:r>
+                      <a:endParaRPr sz="950"/>
+                    </a:p>
+                  </a:txBody>
+                  <a:tcPr marL="50800" marR="50800" marT="25400" marB="25400" anchor="ctr">
+                    <a:lnL w="9525">
+                      <a:solidFill>
+                        <a:srgbClr val="E6E8EB"/>
+                      </a:solidFill>
+                    </a:lnL>
+                    <a:lnR w="9525">
+                      <a:solidFill>
+                        <a:srgbClr val="E6E8EB"/>
+                      </a:solidFill>
+                    </a:lnR>
+                    <a:lnT w="9525">
+                      <a:solidFill>
+                        <a:srgbClr val="E6E8EB"/>
+                      </a:solidFill>
+                    </a:lnT>
+                    <a:lnB w="9525">
+                      <a:solidFill>
+                        <a:srgbClr val="E6E8EB"/>
+                      </a:solidFill>
+                    </a:lnB>
+                    <a:noFill/>
+                  </a:tcPr>
+                </a:tc>
+                <a:tc>
+                  <a:txBody>
+                    <a:bodyPr wrap="square"/>
+                    <a:lstStyle/>
+                    <a:p>
+                      <a:pPr algn="l">
+                        <a:defRPr sz="950"/>
+                      </a:pPr>
+                      <a:r>
+                        <a:rPr sz="950" b="0">
+                          <a:solidFill>
+                            <a:srgbClr val="11181C"/>
+                          </a:solidFill>
+                          <a:latin typeface="Arial"/>
+                        </a:rPr>
+                        <a:t>Show 268 A4 and FBR450R A4 at mining exhibitions and customer visits with a Marcom sales kit.</a:t>
+                      </a:r>
+                      <a:endParaRPr sz="950"/>
+                    </a:p>
+                  </a:txBody>
+                  <a:tcPr marL="50800" marR="50800" marT="25400" marB="25400" anchor="ctr">
+                    <a:lnL w="9525">
+                      <a:solidFill>
+                        <a:srgbClr val="E6E8EB"/>
+                      </a:solidFill>
+                    </a:lnL>
+                    <a:lnR w="9525">
+                      <a:solidFill>
+                        <a:srgbClr val="E6E8EB"/>
+                      </a:solidFill>
+                    </a:lnR>
+                    <a:lnT w="9525">
+                      <a:solidFill>
+                        <a:srgbClr val="E6E8EB"/>
+                      </a:solidFill>
+                    </a:lnT>
+                    <a:lnB w="9525">
+                      <a:solidFill>
+                        <a:srgbClr val="E6E8EB"/>
+                      </a:solidFill>
+                    </a:lnB>
+                    <a:noFill/>
+                  </a:tcPr>
+                </a:tc>
+              </a:tr>
+            </a:tbl>
+          </a:graphicData>
+        </a:graphic>
+      </p:graphicFrame>
       <p:sp>
         <p:nvSpPr>
-          <p:cNvPr id="20" name="TextBox 19"/>
+          <p:cNvPr id="11" name="TextBox 10"/>
           <p:cNvSpPr txBox="1"/>
           <p:nvPr/>
         </p:nvSpPr>
         <p:spPr>
           <a:xfrm>
-            <a:off x="609600" y="4305300"/>
-            <a:ext cx="3409950" cy="923925"/>
+            <a:off x="533400" y="6305550"/>
+            <a:ext cx="11125200" cy="190500"/>
           </a:xfrm>
           <a:prstGeom prst="rect">
             <a:avLst/>
@@ -3806,1352 +7330,15 @@
           </a:bodyPr>
           <a:lstStyle/>
           <a:p>
-            <a:pPr algn="l">
-              <a:lnSpc>
-                <a:spcPct val="100000"/>
-              </a:lnSpc>
-            </a:pPr>
-            <a:r>
-              <a:rPr sz="1050" b="1" i="0">
+            <a:pPr algn="l"/>
+            <a:r>
+              <a:rPr sz="850" b="0" i="0">
                 <a:solidFill>
-                  <a:srgbClr val="11181C"/>
+                  <a:srgbClr val="697177"/>
                 </a:solidFill>
                 <a:latin typeface="Arial"/>
               </a:rPr>
-              <a:t>Medium buys on price, Heavy buys on quality.</a:t>
-            </a:r>
-          </a:p>
-          <a:p>
-            <a:pPr marL="127000" indent="-127000">
-              <a:spcBef>
-                <a:spcPts val="300"/>
-              </a:spcBef>
-              <a:buChar char="•"/>
-            </a:pPr>
-            <a:r>
-              <a:rPr sz="950">
-                <a:solidFill>
-                  <a:srgbClr val="4D555C"/>
-                </a:solidFill>
-                <a:latin typeface="Arial"/>
-              </a:rPr>
-              <a:t>Medium: China brands take 73% of value.</a:t>
-            </a:r>
-          </a:p>
-          <a:p>
-            <a:pPr marL="127000" indent="-127000">
-              <a:spcBef>
-                <a:spcPts val="300"/>
-              </a:spcBef>
-              <a:buChar char="•"/>
-            </a:pPr>
-            <a:r>
-              <a:rPr sz="950">
-                <a:solidFill>
-                  <a:srgbClr val="4D555C"/>
-                </a:solidFill>
-                <a:latin typeface="Arial"/>
-              </a:rPr>
-              <a:t>Heavy: European brands take 85% of value.</a:t>
-            </a:r>
-          </a:p>
-          <a:p>
-            <a:pPr marL="127000" indent="-127000">
-              <a:spcBef>
-                <a:spcPts val="300"/>
-              </a:spcBef>
-              <a:buChar char="•"/>
-            </a:pPr>
-            <a:r>
-              <a:rPr sz="950">
-                <a:solidFill>
-                  <a:srgbClr val="4D555C"/>
-                </a:solidFill>
-                <a:latin typeface="Arial"/>
-              </a:rPr>
-              <a:t>88% go on trucks ≥ 24 t GVW (mining, construction).</a:t>
-            </a:r>
-          </a:p>
-        </p:txBody>
-      </p:sp>
-      <p:sp>
-        <p:nvSpPr>
-          <p:cNvPr id="21" name="Rectangle 20"/>
-          <p:cNvSpPr/>
-          <p:nvPr/>
-        </p:nvSpPr>
-        <p:spPr>
-          <a:xfrm>
-            <a:off x="533400" y="5314950"/>
-            <a:ext cx="3562350" cy="1133475"/>
-          </a:xfrm>
-          <a:prstGeom prst="rect">
-            <a:avLst/>
-          </a:prstGeom>
-          <a:solidFill>
-            <a:srgbClr val="E1F9EC"/>
-          </a:solidFill>
-          <a:ln>
-            <a:noFill/>
-          </a:ln>
-        </p:spPr>
-        <p:txBody>
-          <a:bodyPr rtlCol="0" anchor="ctr"/>
-          <a:lstStyle/>
-          <a:p/>
-        </p:txBody>
-      </p:sp>
-      <p:sp>
-        <p:nvSpPr>
-          <p:cNvPr id="22" name="TextBox 21"/>
-          <p:cNvSpPr txBox="1"/>
-          <p:nvPr/>
-        </p:nvSpPr>
-        <p:spPr>
-          <a:xfrm>
-            <a:off x="609600" y="5362575"/>
-            <a:ext cx="3409950" cy="133350"/>
-          </a:xfrm>
-          <a:prstGeom prst="rect">
-            <a:avLst/>
-          </a:prstGeom>
-          <a:noFill/>
-        </p:spPr>
-        <p:txBody>
-          <a:bodyPr wrap="square" lIns="0" rIns="0" tIns="0" bIns="0" anchor="t">
-            <a:spAutoFit/>
-          </a:bodyPr>
-          <a:lstStyle/>
-          <a:p>
-            <a:pPr algn="l"/>
-            <a:r>
-              <a:rPr sz="850" b="1" i="0" spc="50">
-                <a:solidFill>
-                  <a:srgbClr val="076932"/>
-                </a:solidFill>
-                <a:latin typeface="Arial"/>
-              </a:rPr>
-              <a:t>COMPANY</a:t>
-            </a:r>
-          </a:p>
-        </p:txBody>
-      </p:sp>
-      <p:sp>
-        <p:nvSpPr>
-          <p:cNvPr id="23" name="TextBox 22"/>
-          <p:cNvSpPr txBox="1"/>
-          <p:nvPr/>
-        </p:nvSpPr>
-        <p:spPr>
-          <a:xfrm>
-            <a:off x="609600" y="5505450"/>
-            <a:ext cx="3409950" cy="923925"/>
-          </a:xfrm>
-          <a:prstGeom prst="rect">
-            <a:avLst/>
-          </a:prstGeom>
-          <a:noFill/>
-        </p:spPr>
-        <p:txBody>
-          <a:bodyPr wrap="square" lIns="0" rIns="0" tIns="0" bIns="0" anchor="t">
-            <a:spAutoFit/>
-          </a:bodyPr>
-          <a:lstStyle/>
-          <a:p>
-            <a:pPr algn="l">
-              <a:lnSpc>
-                <a:spcPct val="100000"/>
-              </a:lnSpc>
-            </a:pPr>
-            <a:r>
-              <a:rPr sz="1050" b="1" i="0">
-                <a:solidFill>
-                  <a:srgbClr val="11181C"/>
-                </a:solidFill>
-                <a:latin typeface="Arial"/>
-              </a:rPr>
-              <a:t>Triatra partners two brands to serve both buyers.</a:t>
-            </a:r>
-          </a:p>
-          <a:p>
-            <a:pPr marL="127000" indent="-127000">
-              <a:spcBef>
-                <a:spcPts val="300"/>
-              </a:spcBef>
-              <a:buChar char="•"/>
-            </a:pPr>
-            <a:r>
-              <a:rPr sz="950">
-                <a:solidFill>
-                  <a:srgbClr val="4D555C"/>
-                </a:solidFill>
-                <a:latin typeface="Arial"/>
-              </a:rPr>
-              <a:t>XCMG for price-oriented buyers.</a:t>
-            </a:r>
-          </a:p>
-          <a:p>
-            <a:pPr marL="127000" indent="-127000">
-              <a:spcBef>
-                <a:spcPts val="300"/>
-              </a:spcBef>
-              <a:buChar char="•"/>
-            </a:pPr>
-            <a:r>
-              <a:rPr sz="950">
-                <a:solidFill>
-                  <a:srgbClr val="4D555C"/>
-                </a:solidFill>
-                <a:latin typeface="Arial"/>
-              </a:rPr>
-              <a:t>F.lli Ferrari for quality-oriented buyers.</a:t>
-            </a:r>
-          </a:p>
-        </p:txBody>
-      </p:sp>
-      <p:cxnSp>
-        <p:nvCxnSpPr>
-          <p:cNvPr id="24" name="Connector 23"/>
-          <p:cNvCxnSpPr/>
-          <p:nvPr/>
-        </p:nvCxnSpPr>
-        <p:spPr>
-          <a:xfrm>
-            <a:off x="4114800" y="4095750"/>
-            <a:ext cx="180975" cy="0"/>
-          </a:xfrm>
-          <a:prstGeom prst="line">
-            <a:avLst/>
-          </a:prstGeom>
-          <a:ln w="19050">
-            <a:solidFill>
-              <a:srgbClr val="22C96A"/>
-            </a:solidFill>
-            <a:tailEnd type="triangle" w="med" len="med"/>
-          </a:ln>
-        </p:spPr>
-      </p:cxnSp>
-      <p:sp>
-        <p:nvSpPr>
-          <p:cNvPr id="25" name="Rectangle 24"/>
-          <p:cNvSpPr/>
-          <p:nvPr/>
-        </p:nvSpPr>
-        <p:spPr>
-          <a:xfrm>
-            <a:off x="4314825" y="1447800"/>
-            <a:ext cx="3562350" cy="228600"/>
-          </a:xfrm>
-          <a:prstGeom prst="rect">
-            <a:avLst/>
-          </a:prstGeom>
-          <a:solidFill>
-            <a:srgbClr val="076932"/>
-          </a:solidFill>
-          <a:ln>
-            <a:noFill/>
-          </a:ln>
-        </p:spPr>
-        <p:txBody>
-          <a:bodyPr rtlCol="0" anchor="ctr"/>
-          <a:lstStyle/>
-          <a:p/>
-        </p:txBody>
-      </p:sp>
-      <p:sp>
-        <p:nvSpPr>
-          <p:cNvPr id="26" name="TextBox 25"/>
-          <p:cNvSpPr txBox="1"/>
-          <p:nvPr/>
-        </p:nvSpPr>
-        <p:spPr>
-          <a:xfrm>
-            <a:off x="4410075" y="1447800"/>
-            <a:ext cx="3371850" cy="228600"/>
-          </a:xfrm>
-          <a:prstGeom prst="rect">
-            <a:avLst/>
-          </a:prstGeom>
-          <a:noFill/>
-        </p:spPr>
-        <p:txBody>
-          <a:bodyPr wrap="square" lIns="0" rIns="0" tIns="0" bIns="0" anchor="ctr">
-            <a:spAutoFit/>
-          </a:bodyPr>
-          <a:lstStyle/>
-          <a:p>
-            <a:pPr algn="l"/>
-            <a:r>
-              <a:rPr sz="1000" b="1" i="0" spc="50">
-                <a:solidFill>
-                  <a:srgbClr val="FFFFFF"/>
-                </a:solidFill>
-                <a:latin typeface="Arial"/>
-              </a:rPr>
-              <a:t>STP · WHERE WE PLAY</a:t>
-            </a:r>
-          </a:p>
-        </p:txBody>
-      </p:sp>
-      <p:sp>
-        <p:nvSpPr>
-          <p:cNvPr id="27" name="Rectangle 26"/>
-          <p:cNvSpPr/>
-          <p:nvPr/>
-        </p:nvSpPr>
-        <p:spPr>
-          <a:xfrm>
-            <a:off x="4314825" y="1714500"/>
-            <a:ext cx="3562350" cy="1533525"/>
-          </a:xfrm>
-          <a:prstGeom prst="rect">
-            <a:avLst/>
-          </a:prstGeom>
-          <a:solidFill>
-            <a:srgbClr val="F9FAFB"/>
-          </a:solidFill>
-          <a:ln>
-            <a:noFill/>
-          </a:ln>
-        </p:spPr>
-        <p:txBody>
-          <a:bodyPr rtlCol="0" anchor="ctr"/>
-          <a:lstStyle/>
-          <a:p/>
-        </p:txBody>
-      </p:sp>
-      <p:sp>
-        <p:nvSpPr>
-          <p:cNvPr id="28" name="TextBox 27"/>
-          <p:cNvSpPr txBox="1"/>
-          <p:nvPr/>
-        </p:nvSpPr>
-        <p:spPr>
-          <a:xfrm>
-            <a:off x="4391025" y="1762125"/>
-            <a:ext cx="3409950" cy="133350"/>
-          </a:xfrm>
-          <a:prstGeom prst="rect">
-            <a:avLst/>
-          </a:prstGeom>
-          <a:noFill/>
-        </p:spPr>
-        <p:txBody>
-          <a:bodyPr wrap="square" lIns="0" rIns="0" tIns="0" bIns="0" anchor="t">
-            <a:spAutoFit/>
-          </a:bodyPr>
-          <a:lstStyle/>
-          <a:p>
-            <a:pPr algn="l"/>
-            <a:r>
-              <a:rPr sz="850" b="1" i="0" spc="50">
-                <a:solidFill>
-                  <a:srgbClr val="076932"/>
-                </a:solidFill>
-                <a:latin typeface="Arial"/>
-              </a:rPr>
-              <a:t>SEGMENTATION</a:t>
-            </a:r>
-          </a:p>
-        </p:txBody>
-      </p:sp>
-      <p:sp>
-        <p:nvSpPr>
-          <p:cNvPr id="29" name="TextBox 28"/>
-          <p:cNvSpPr txBox="1"/>
-          <p:nvPr/>
-        </p:nvSpPr>
-        <p:spPr>
-          <a:xfrm>
-            <a:off x="4391025" y="1905000"/>
-            <a:ext cx="3409950" cy="1323975"/>
-          </a:xfrm>
-          <a:prstGeom prst="rect">
-            <a:avLst/>
-          </a:prstGeom>
-          <a:noFill/>
-        </p:spPr>
-        <p:txBody>
-          <a:bodyPr wrap="square" lIns="0" rIns="0" tIns="0" bIns="0" anchor="t">
-            <a:spAutoFit/>
-          </a:bodyPr>
-          <a:lstStyle/>
-          <a:p>
-            <a:pPr algn="l">
-              <a:lnSpc>
-                <a:spcPct val="100000"/>
-              </a:lnSpc>
-            </a:pPr>
-            <a:r>
-              <a:rPr sz="1050" b="1" i="0">
-                <a:solidFill>
-                  <a:srgbClr val="11181C"/>
-                </a:solidFill>
-                <a:latin typeface="Arial"/>
-              </a:rPr>
-              <a:t>Two classes, ten 5-tm tiers.</a:t>
-            </a:r>
-          </a:p>
-          <a:p>
-            <a:pPr marL="127000" indent="-127000">
-              <a:spcBef>
-                <a:spcPts val="300"/>
-              </a:spcBef>
-              <a:buChar char="•"/>
-            </a:pPr>
-            <a:r>
-              <a:rPr sz="950">
-                <a:solidFill>
-                  <a:srgbClr val="4D555C"/>
-                </a:solidFill>
-                <a:latin typeface="Arial"/>
-              </a:rPr>
-              <a:t>Medium 25 – 45 tm: 196 units, Rp 156 M.</a:t>
-            </a:r>
-          </a:p>
-          <a:p>
-            <a:pPr marL="127000" indent="-127000">
-              <a:spcBef>
-                <a:spcPts val="300"/>
-              </a:spcBef>
-              <a:buChar char="•"/>
-            </a:pPr>
-            <a:r>
-              <a:rPr sz="950">
-                <a:solidFill>
-                  <a:srgbClr val="4D555C"/>
-                </a:solidFill>
-                <a:latin typeface="Arial"/>
-              </a:rPr>
-              <a:t>Heavy &gt; 45 tm: 65 units, Rp 115 M.</a:t>
-            </a:r>
-          </a:p>
-        </p:txBody>
-      </p:sp>
-      <p:sp>
-        <p:nvSpPr>
-          <p:cNvPr id="30" name="Rectangle 29"/>
-          <p:cNvSpPr/>
-          <p:nvPr/>
-        </p:nvSpPr>
-        <p:spPr>
-          <a:xfrm>
-            <a:off x="4314825" y="3314700"/>
-            <a:ext cx="3562350" cy="1533525"/>
-          </a:xfrm>
-          <a:prstGeom prst="rect">
-            <a:avLst/>
-          </a:prstGeom>
-          <a:solidFill>
-            <a:srgbClr val="F9FAFB"/>
-          </a:solidFill>
-          <a:ln>
-            <a:noFill/>
-          </a:ln>
-        </p:spPr>
-        <p:txBody>
-          <a:bodyPr rtlCol="0" anchor="ctr"/>
-          <a:lstStyle/>
-          <a:p/>
-        </p:txBody>
-      </p:sp>
-      <p:sp>
-        <p:nvSpPr>
-          <p:cNvPr id="31" name="TextBox 30"/>
-          <p:cNvSpPr txBox="1"/>
-          <p:nvPr/>
-        </p:nvSpPr>
-        <p:spPr>
-          <a:xfrm>
-            <a:off x="4391025" y="3362325"/>
-            <a:ext cx="3409950" cy="133350"/>
-          </a:xfrm>
-          <a:prstGeom prst="rect">
-            <a:avLst/>
-          </a:prstGeom>
-          <a:noFill/>
-        </p:spPr>
-        <p:txBody>
-          <a:bodyPr wrap="square" lIns="0" rIns="0" tIns="0" bIns="0" anchor="t">
-            <a:spAutoFit/>
-          </a:bodyPr>
-          <a:lstStyle/>
-          <a:p>
-            <a:pPr algn="l"/>
-            <a:r>
-              <a:rPr sz="850" b="1" i="0" spc="50">
-                <a:solidFill>
-                  <a:srgbClr val="076932"/>
-                </a:solidFill>
-                <a:latin typeface="Arial"/>
-              </a:rPr>
-              <a:t>TARGETING</a:t>
-            </a:r>
-          </a:p>
-        </p:txBody>
-      </p:sp>
-      <p:sp>
-        <p:nvSpPr>
-          <p:cNvPr id="32" name="TextBox 31"/>
-          <p:cNvSpPr txBox="1"/>
-          <p:nvPr/>
-        </p:nvSpPr>
-        <p:spPr>
-          <a:xfrm>
-            <a:off x="4391025" y="3505200"/>
-            <a:ext cx="3409950" cy="1323975"/>
-          </a:xfrm>
-          <a:prstGeom prst="rect">
-            <a:avLst/>
-          </a:prstGeom>
-          <a:noFill/>
-        </p:spPr>
-        <p:txBody>
-          <a:bodyPr wrap="square" lIns="0" rIns="0" tIns="0" bIns="0" anchor="t">
-            <a:spAutoFit/>
-          </a:bodyPr>
-          <a:lstStyle/>
-          <a:p>
-            <a:pPr algn="l">
-              <a:lnSpc>
-                <a:spcPct val="100000"/>
-              </a:lnSpc>
-            </a:pPr>
-            <a:r>
-              <a:rPr sz="1050" b="1" i="0">
-                <a:solidFill>
-                  <a:srgbClr val="11181C"/>
-                </a:solidFill>
-                <a:latin typeface="Arial"/>
-              </a:rPr>
-              <a:t>Take share from the Top 1 model in each tier.</a:t>
-            </a:r>
-          </a:p>
-          <a:p>
-            <a:pPr marL="127000" indent="-127000">
-              <a:spcBef>
-                <a:spcPts val="300"/>
-              </a:spcBef>
-              <a:buChar char="•"/>
-            </a:pPr>
-            <a:r>
-              <a:rPr sz="950">
-                <a:solidFill>
-                  <a:srgbClr val="4D555C"/>
-                </a:solidFill>
-                <a:latin typeface="Arial"/>
-              </a:rPr>
-              <a:t>Medium: Sany Palfinger SPK32080, SPK36080, SPK42502.</a:t>
-            </a:r>
-          </a:p>
-          <a:p>
-            <a:pPr marL="127000" indent="-127000">
-              <a:spcBef>
-                <a:spcPts val="300"/>
-              </a:spcBef>
-              <a:buChar char="•"/>
-            </a:pPr>
-            <a:r>
-              <a:rPr sz="950">
-                <a:solidFill>
-                  <a:srgbClr val="4D555C"/>
-                </a:solidFill>
-                <a:latin typeface="Arial"/>
-              </a:rPr>
-              <a:t>Heavy: Palfinger PK 53002, PK 76002, PK 88002.</a:t>
-            </a:r>
-          </a:p>
-        </p:txBody>
-      </p:sp>
-      <p:sp>
-        <p:nvSpPr>
-          <p:cNvPr id="33" name="Rectangle 32"/>
-          <p:cNvSpPr/>
-          <p:nvPr/>
-        </p:nvSpPr>
-        <p:spPr>
-          <a:xfrm>
-            <a:off x="4314825" y="4914900"/>
-            <a:ext cx="3562350" cy="1533525"/>
-          </a:xfrm>
-          <a:prstGeom prst="rect">
-            <a:avLst/>
-          </a:prstGeom>
-          <a:solidFill>
-            <a:srgbClr val="F9FAFB"/>
-          </a:solidFill>
-          <a:ln>
-            <a:noFill/>
-          </a:ln>
-        </p:spPr>
-        <p:txBody>
-          <a:bodyPr rtlCol="0" anchor="ctr"/>
-          <a:lstStyle/>
-          <a:p/>
-        </p:txBody>
-      </p:sp>
-      <p:sp>
-        <p:nvSpPr>
-          <p:cNvPr id="34" name="TextBox 33"/>
-          <p:cNvSpPr txBox="1"/>
-          <p:nvPr/>
-        </p:nvSpPr>
-        <p:spPr>
-          <a:xfrm>
-            <a:off x="4391025" y="4962525"/>
-            <a:ext cx="3409950" cy="133350"/>
-          </a:xfrm>
-          <a:prstGeom prst="rect">
-            <a:avLst/>
-          </a:prstGeom>
-          <a:noFill/>
-        </p:spPr>
-        <p:txBody>
-          <a:bodyPr wrap="square" lIns="0" rIns="0" tIns="0" bIns="0" anchor="t">
-            <a:spAutoFit/>
-          </a:bodyPr>
-          <a:lstStyle/>
-          <a:p>
-            <a:pPr algn="l"/>
-            <a:r>
-              <a:rPr sz="850" b="1" i="0" spc="50">
-                <a:solidFill>
-                  <a:srgbClr val="076932"/>
-                </a:solidFill>
-                <a:latin typeface="Arial"/>
-              </a:rPr>
-              <a:t>POSITIONING</a:t>
-            </a:r>
-          </a:p>
-        </p:txBody>
-      </p:sp>
-      <p:sp>
-        <p:nvSpPr>
-          <p:cNvPr id="35" name="TextBox 34"/>
-          <p:cNvSpPr txBox="1"/>
-          <p:nvPr/>
-        </p:nvSpPr>
-        <p:spPr>
-          <a:xfrm>
-            <a:off x="4391025" y="5105400"/>
-            <a:ext cx="3409950" cy="1323975"/>
-          </a:xfrm>
-          <a:prstGeom prst="rect">
-            <a:avLst/>
-          </a:prstGeom>
-          <a:noFill/>
-        </p:spPr>
-        <p:txBody>
-          <a:bodyPr wrap="square" lIns="0" rIns="0" tIns="0" bIns="0" anchor="t">
-            <a:spAutoFit/>
-          </a:bodyPr>
-          <a:lstStyle/>
-          <a:p>
-            <a:pPr algn="l">
-              <a:lnSpc>
-                <a:spcPct val="100000"/>
-              </a:lnSpc>
-            </a:pPr>
-            <a:r>
-              <a:rPr sz="1050" b="1" i="0">
-                <a:solidFill>
-                  <a:srgbClr val="11181C"/>
-                </a:solidFill>
-                <a:latin typeface="Arial"/>
-              </a:rPr>
-              <a:t>Two clear promises.</a:t>
-            </a:r>
-          </a:p>
-          <a:p>
-            <a:pPr marL="127000" indent="-127000">
-              <a:spcBef>
-                <a:spcPts val="300"/>
-              </a:spcBef>
-              <a:buChar char="•"/>
-            </a:pPr>
-            <a:r>
-              <a:rPr sz="950">
-                <a:solidFill>
-                  <a:srgbClr val="4D555C"/>
-                </a:solidFill>
-                <a:latin typeface="Arial"/>
-              </a:rPr>
-              <a:t>XCMG: same capacity as Sany Palfinger, lower price (SQZ365.4: −9% vs SPK36080).</a:t>
-            </a:r>
-          </a:p>
-          <a:p>
-            <a:pPr marL="127000" indent="-127000">
-              <a:spcBef>
-                <a:spcPts val="300"/>
-              </a:spcBef>
-              <a:buChar char="•"/>
-            </a:pPr>
-            <a:r>
-              <a:rPr sz="950">
-                <a:solidFill>
-                  <a:srgbClr val="4D555C"/>
-                </a:solidFill>
-                <a:latin typeface="Arial"/>
-              </a:rPr>
-              <a:t>Ferrari: European features at a lower price where it wins (−23% at 25 – 30 tm, −32% at 45 – 50 tm).</a:t>
-            </a:r>
-          </a:p>
-          <a:p>
-            <a:pPr marL="127000" indent="-127000">
-              <a:spcBef>
-                <a:spcPts val="300"/>
-              </a:spcBef>
-              <a:buChar char="•"/>
-            </a:pPr>
-            <a:r>
-              <a:rPr sz="950">
-                <a:solidFill>
-                  <a:srgbClr val="4D555C"/>
-                </a:solidFill>
-                <a:latin typeface="Arial"/>
-              </a:rPr>
-              <a:t>Ferrari: faster delivery than Europe-built leaders, from stock in China (~14 weeks).</a:t>
-            </a:r>
-          </a:p>
-        </p:txBody>
-      </p:sp>
-      <p:cxnSp>
-        <p:nvCxnSpPr>
-          <p:cNvPr id="36" name="Connector 35"/>
-          <p:cNvCxnSpPr/>
-          <p:nvPr/>
-        </p:nvCxnSpPr>
-        <p:spPr>
-          <a:xfrm>
-            <a:off x="7896225" y="4095750"/>
-            <a:ext cx="180975" cy="0"/>
-          </a:xfrm>
-          <a:prstGeom prst="line">
-            <a:avLst/>
-          </a:prstGeom>
-          <a:ln w="19050">
-            <a:solidFill>
-              <a:srgbClr val="22C96A"/>
-            </a:solidFill>
-            <a:tailEnd type="triangle" w="med" len="med"/>
-          </a:ln>
-        </p:spPr>
-      </p:cxnSp>
-      <p:sp>
-        <p:nvSpPr>
-          <p:cNvPr id="37" name="Rectangle 36"/>
-          <p:cNvSpPr/>
-          <p:nvPr/>
-        </p:nvSpPr>
-        <p:spPr>
-          <a:xfrm>
-            <a:off x="8096250" y="1714500"/>
-            <a:ext cx="3562350" cy="1133475"/>
-          </a:xfrm>
-          <a:prstGeom prst="rect">
-            <a:avLst/>
-          </a:prstGeom>
-          <a:solidFill>
-            <a:srgbClr val="F9FAFB"/>
-          </a:solidFill>
-          <a:ln>
-            <a:noFill/>
-          </a:ln>
-        </p:spPr>
-        <p:txBody>
-          <a:bodyPr rtlCol="0" anchor="ctr"/>
-          <a:lstStyle/>
-          <a:p/>
-        </p:txBody>
-      </p:sp>
-      <p:sp>
-        <p:nvSpPr>
-          <p:cNvPr id="38" name="TextBox 37"/>
-          <p:cNvSpPr txBox="1"/>
-          <p:nvPr/>
-        </p:nvSpPr>
-        <p:spPr>
-          <a:xfrm>
-            <a:off x="8172450" y="1762125"/>
-            <a:ext cx="3409950" cy="133350"/>
-          </a:xfrm>
-          <a:prstGeom prst="rect">
-            <a:avLst/>
-          </a:prstGeom>
-          <a:noFill/>
-        </p:spPr>
-        <p:txBody>
-          <a:bodyPr wrap="square" lIns="0" rIns="0" tIns="0" bIns="0" anchor="t">
-            <a:spAutoFit/>
-          </a:bodyPr>
-          <a:lstStyle/>
-          <a:p>
-            <a:pPr algn="l"/>
-            <a:r>
-              <a:rPr sz="850" b="1" i="0" spc="50">
-                <a:solidFill>
-                  <a:srgbClr val="076932"/>
-                </a:solidFill>
-                <a:latin typeface="Arial"/>
-              </a:rPr>
-              <a:t>PRODUCT</a:t>
-            </a:r>
-          </a:p>
-        </p:txBody>
-      </p:sp>
-      <p:sp>
-        <p:nvSpPr>
-          <p:cNvPr id="39" name="TextBox 38"/>
-          <p:cNvSpPr txBox="1"/>
-          <p:nvPr/>
-        </p:nvSpPr>
-        <p:spPr>
-          <a:xfrm>
-            <a:off x="8172450" y="1905000"/>
-            <a:ext cx="3409950" cy="923925"/>
-          </a:xfrm>
-          <a:prstGeom prst="rect">
-            <a:avLst/>
-          </a:prstGeom>
-          <a:noFill/>
-        </p:spPr>
-        <p:txBody>
-          <a:bodyPr wrap="square" lIns="0" rIns="0" tIns="0" bIns="0" anchor="t">
-            <a:spAutoFit/>
-          </a:bodyPr>
-          <a:lstStyle/>
-          <a:p>
-            <a:pPr algn="l">
-              <a:lnSpc>
-                <a:spcPct val="100000"/>
-              </a:lnSpc>
-            </a:pPr>
-            <a:r>
-              <a:rPr sz="1050" b="1" i="0">
-                <a:solidFill>
-                  <a:srgbClr val="11181C"/>
-                </a:solidFill>
-                <a:latin typeface="Arial"/>
-              </a:rPr>
-              <a:t>One challenger model per tier.</a:t>
-            </a:r>
-          </a:p>
-          <a:p>
-            <a:pPr marL="127000" indent="-127000">
-              <a:spcBef>
-                <a:spcPts val="300"/>
-              </a:spcBef>
-              <a:buChar char="•"/>
-            </a:pPr>
-            <a:r>
-              <a:rPr sz="950">
-                <a:solidFill>
-                  <a:srgbClr val="4D555C"/>
-                </a:solidFill>
-                <a:latin typeface="Arial"/>
-              </a:rPr>
-              <a:t>XCMG: 30–40 tm. Ferrari: 25–30, 40–45 tm, all Heavy.</a:t>
-            </a:r>
-          </a:p>
-          <a:p>
-            <a:pPr marL="127000" indent="-127000">
-              <a:spcBef>
-                <a:spcPts val="300"/>
-              </a:spcBef>
-              <a:buChar char="•"/>
-            </a:pPr>
-            <a:r>
-              <a:rPr sz="950">
-                <a:solidFill>
-                  <a:srgbClr val="4D555C"/>
-                </a:solidFill>
-                <a:latin typeface="Arial"/>
-              </a:rPr>
-              <a:t>Ferrari adds what leaders lack: RS, SDV, Red Power, Magic Touch.</a:t>
-            </a:r>
-          </a:p>
-        </p:txBody>
-      </p:sp>
-      <p:sp>
-        <p:nvSpPr>
-          <p:cNvPr id="40" name="Rectangle 39"/>
-          <p:cNvSpPr/>
-          <p:nvPr/>
-        </p:nvSpPr>
-        <p:spPr>
-          <a:xfrm>
-            <a:off x="8096250" y="2914650"/>
-            <a:ext cx="3562350" cy="1133475"/>
-          </a:xfrm>
-          <a:prstGeom prst="rect">
-            <a:avLst/>
-          </a:prstGeom>
-          <a:solidFill>
-            <a:srgbClr val="F9FAFB"/>
-          </a:solidFill>
-          <a:ln>
-            <a:noFill/>
-          </a:ln>
-        </p:spPr>
-        <p:txBody>
-          <a:bodyPr rtlCol="0" anchor="ctr"/>
-          <a:lstStyle/>
-          <a:p/>
-        </p:txBody>
-      </p:sp>
-      <p:sp>
-        <p:nvSpPr>
-          <p:cNvPr id="41" name="TextBox 40"/>
-          <p:cNvSpPr txBox="1"/>
-          <p:nvPr/>
-        </p:nvSpPr>
-        <p:spPr>
-          <a:xfrm>
-            <a:off x="8172450" y="2962275"/>
-            <a:ext cx="3409950" cy="133350"/>
-          </a:xfrm>
-          <a:prstGeom prst="rect">
-            <a:avLst/>
-          </a:prstGeom>
-          <a:noFill/>
-        </p:spPr>
-        <p:txBody>
-          <a:bodyPr wrap="square" lIns="0" rIns="0" tIns="0" bIns="0" anchor="t">
-            <a:spAutoFit/>
-          </a:bodyPr>
-          <a:lstStyle/>
-          <a:p>
-            <a:pPr algn="l"/>
-            <a:r>
-              <a:rPr sz="850" b="1" i="0" spc="50">
-                <a:solidFill>
-                  <a:srgbClr val="076932"/>
-                </a:solidFill>
-                <a:latin typeface="Arial"/>
-              </a:rPr>
-              <a:t>PRICE</a:t>
-            </a:r>
-          </a:p>
-        </p:txBody>
-      </p:sp>
-      <p:sp>
-        <p:nvSpPr>
-          <p:cNvPr id="42" name="TextBox 41"/>
-          <p:cNvSpPr txBox="1"/>
-          <p:nvPr/>
-        </p:nvSpPr>
-        <p:spPr>
-          <a:xfrm>
-            <a:off x="8172450" y="3105150"/>
-            <a:ext cx="3409950" cy="923925"/>
-          </a:xfrm>
-          <a:prstGeom prst="rect">
-            <a:avLst/>
-          </a:prstGeom>
-          <a:noFill/>
-        </p:spPr>
-        <p:txBody>
-          <a:bodyPr wrap="square" lIns="0" rIns="0" tIns="0" bIns="0" anchor="t">
-            <a:spAutoFit/>
-          </a:bodyPr>
-          <a:lstStyle/>
-          <a:p>
-            <a:pPr algn="l">
-              <a:lnSpc>
-                <a:spcPct val="100000"/>
-              </a:lnSpc>
-            </a:pPr>
-            <a:r>
-              <a:rPr sz="1050" b="1" i="0">
-                <a:solidFill>
-                  <a:srgbClr val="11181C"/>
-                </a:solidFill>
-                <a:latin typeface="Arial"/>
-              </a:rPr>
-              <a:t>Sell where cheaper; negotiate the rest.</a:t>
-            </a:r>
-          </a:p>
-          <a:p>
-            <a:pPr marL="127000" indent="-127000">
-              <a:spcBef>
-                <a:spcPts val="300"/>
-              </a:spcBef>
-              <a:buChar char="•"/>
-            </a:pPr>
-            <a:r>
-              <a:rPr sz="950">
-                <a:solidFill>
-                  <a:srgbClr val="4D555C"/>
-                </a:solidFill>
-                <a:latin typeface="Arial"/>
-              </a:rPr>
-              <a:t>Cheaper now: 25–30 (−23%), 35–40 (−9%), 45–50 tm (−32%).</a:t>
-            </a:r>
-          </a:p>
-          <a:p>
-            <a:pPr marL="127000" indent="-127000">
-              <a:spcBef>
-                <a:spcPts val="300"/>
-              </a:spcBef>
-              <a:buChar char="•"/>
-            </a:pPr>
-            <a:r>
-              <a:rPr sz="950">
-                <a:solidFill>
-                  <a:srgbClr val="4D555C"/>
-                </a:solidFill>
-                <a:latin typeface="Arial"/>
-              </a:rPr>
-              <a:t>Ferrari cut: 40–45 (+48%), 50–55 (+85%), 70–75 tm (+79%).</a:t>
-            </a:r>
-          </a:p>
-          <a:p>
-            <a:pPr marL="127000" indent="-127000">
-              <a:spcBef>
-                <a:spcPts val="300"/>
-              </a:spcBef>
-              <a:buChar char="•"/>
-            </a:pPr>
-            <a:r>
-              <a:rPr sz="950">
-                <a:solidFill>
-                  <a:srgbClr val="4D555C"/>
-                </a:solidFill>
-                <a:latin typeface="Arial"/>
-              </a:rPr>
-              <a:t>XCMG: special price for Triatra.</a:t>
-            </a:r>
-          </a:p>
-        </p:txBody>
-      </p:sp>
-      <p:sp>
-        <p:nvSpPr>
-          <p:cNvPr id="43" name="Rectangle 42"/>
-          <p:cNvSpPr/>
-          <p:nvPr/>
-        </p:nvSpPr>
-        <p:spPr>
-          <a:xfrm>
-            <a:off x="8096250" y="4114800"/>
-            <a:ext cx="3562350" cy="1133475"/>
-          </a:xfrm>
-          <a:prstGeom prst="rect">
-            <a:avLst/>
-          </a:prstGeom>
-          <a:solidFill>
-            <a:srgbClr val="F9FAFB"/>
-          </a:solidFill>
-          <a:ln>
-            <a:noFill/>
-          </a:ln>
-        </p:spPr>
-        <p:txBody>
-          <a:bodyPr rtlCol="0" anchor="ctr"/>
-          <a:lstStyle/>
-          <a:p/>
-        </p:txBody>
-      </p:sp>
-      <p:sp>
-        <p:nvSpPr>
-          <p:cNvPr id="44" name="TextBox 43"/>
-          <p:cNvSpPr txBox="1"/>
-          <p:nvPr/>
-        </p:nvSpPr>
-        <p:spPr>
-          <a:xfrm>
-            <a:off x="8172450" y="4162425"/>
-            <a:ext cx="3409950" cy="133350"/>
-          </a:xfrm>
-          <a:prstGeom prst="rect">
-            <a:avLst/>
-          </a:prstGeom>
-          <a:noFill/>
-        </p:spPr>
-        <p:txBody>
-          <a:bodyPr wrap="square" lIns="0" rIns="0" tIns="0" bIns="0" anchor="t">
-            <a:spAutoFit/>
-          </a:bodyPr>
-          <a:lstStyle/>
-          <a:p>
-            <a:pPr algn="l"/>
-            <a:r>
-              <a:rPr sz="850" b="1" i="0" spc="50">
-                <a:solidFill>
-                  <a:srgbClr val="076932"/>
-                </a:solidFill>
-                <a:latin typeface="Arial"/>
-              </a:rPr>
-              <a:t>PLACE</a:t>
-            </a:r>
-          </a:p>
-        </p:txBody>
-      </p:sp>
-      <p:sp>
-        <p:nvSpPr>
-          <p:cNvPr id="45" name="TextBox 44"/>
-          <p:cNvSpPr txBox="1"/>
-          <p:nvPr/>
-        </p:nvSpPr>
-        <p:spPr>
-          <a:xfrm>
-            <a:off x="8172450" y="4305300"/>
-            <a:ext cx="3409950" cy="923925"/>
-          </a:xfrm>
-          <a:prstGeom prst="rect">
-            <a:avLst/>
-          </a:prstGeom>
-          <a:noFill/>
-        </p:spPr>
-        <p:txBody>
-          <a:bodyPr wrap="square" lIns="0" rIns="0" tIns="0" bIns="0" anchor="t">
-            <a:spAutoFit/>
-          </a:bodyPr>
-          <a:lstStyle/>
-          <a:p>
-            <a:pPr algn="l">
-              <a:lnSpc>
-                <a:spcPct val="100000"/>
-              </a:lnSpc>
-            </a:pPr>
-            <a:r>
-              <a:rPr sz="1050" b="1" i="0">
-                <a:solidFill>
-                  <a:srgbClr val="11181C"/>
-                </a:solidFill>
-                <a:latin typeface="Arial"/>
-              </a:rPr>
-              <a:t>Win on availability.</a:t>
-            </a:r>
-          </a:p>
-          <a:p>
-            <a:pPr marL="127000" indent="-127000">
-              <a:spcBef>
-                <a:spcPts val="300"/>
-              </a:spcBef>
-              <a:buChar char="•"/>
-            </a:pPr>
-            <a:r>
-              <a:rPr sz="950">
-                <a:solidFill>
-                  <a:srgbClr val="4D555C"/>
-                </a:solidFill>
-                <a:latin typeface="Arial"/>
-              </a:rPr>
-              <a:t>Ferrari stocks units in China (~14 weeks) and parts in Malaysia.</a:t>
-            </a:r>
-          </a:p>
-          <a:p>
-            <a:pPr marL="127000" indent="-127000">
-              <a:spcBef>
-                <a:spcPts val="300"/>
-              </a:spcBef>
-              <a:buChar char="•"/>
-            </a:pPr>
-            <a:r>
-              <a:rPr sz="950">
-                <a:solidFill>
-                  <a:srgbClr val="4D555C"/>
-                </a:solidFill>
-                <a:latin typeface="Arial"/>
-              </a:rPr>
-              <a:t>XCMG through its official distributor, GM Tractors.</a:t>
-            </a:r>
-          </a:p>
-        </p:txBody>
-      </p:sp>
-      <p:sp>
-        <p:nvSpPr>
-          <p:cNvPr id="46" name="Rectangle 45"/>
-          <p:cNvSpPr/>
-          <p:nvPr/>
-        </p:nvSpPr>
-        <p:spPr>
-          <a:xfrm>
-            <a:off x="8096250" y="5314950"/>
-            <a:ext cx="3562350" cy="1133475"/>
-          </a:xfrm>
-          <a:prstGeom prst="rect">
-            <a:avLst/>
-          </a:prstGeom>
-          <a:solidFill>
-            <a:srgbClr val="F9FAFB"/>
-          </a:solidFill>
-          <a:ln>
-            <a:noFill/>
-          </a:ln>
-        </p:spPr>
-        <p:txBody>
-          <a:bodyPr rtlCol="0" anchor="ctr"/>
-          <a:lstStyle/>
-          <a:p/>
-        </p:txBody>
-      </p:sp>
-      <p:sp>
-        <p:nvSpPr>
-          <p:cNvPr id="47" name="TextBox 46"/>
-          <p:cNvSpPr txBox="1"/>
-          <p:nvPr/>
-        </p:nvSpPr>
-        <p:spPr>
-          <a:xfrm>
-            <a:off x="8172450" y="5362575"/>
-            <a:ext cx="3409950" cy="133350"/>
-          </a:xfrm>
-          <a:prstGeom prst="rect">
-            <a:avLst/>
-          </a:prstGeom>
-          <a:noFill/>
-        </p:spPr>
-        <p:txBody>
-          <a:bodyPr wrap="square" lIns="0" rIns="0" tIns="0" bIns="0" anchor="t">
-            <a:spAutoFit/>
-          </a:bodyPr>
-          <a:lstStyle/>
-          <a:p>
-            <a:pPr algn="l"/>
-            <a:r>
-              <a:rPr sz="850" b="1" i="0" spc="50">
-                <a:solidFill>
-                  <a:srgbClr val="076932"/>
-                </a:solidFill>
-                <a:latin typeface="Arial"/>
-              </a:rPr>
-              <a:t>PROMOTION</a:t>
-            </a:r>
-          </a:p>
-        </p:txBody>
-      </p:sp>
-      <p:sp>
-        <p:nvSpPr>
-          <p:cNvPr id="48" name="TextBox 47"/>
-          <p:cNvSpPr txBox="1"/>
-          <p:nvPr/>
-        </p:nvSpPr>
-        <p:spPr>
-          <a:xfrm>
-            <a:off x="8172450" y="5505450"/>
-            <a:ext cx="3409950" cy="923925"/>
-          </a:xfrm>
-          <a:prstGeom prst="rect">
-            <a:avLst/>
-          </a:prstGeom>
-          <a:noFill/>
-        </p:spPr>
-        <p:txBody>
-          <a:bodyPr wrap="square" lIns="0" rIns="0" tIns="0" bIns="0" anchor="t">
-            <a:spAutoFit/>
-          </a:bodyPr>
-          <a:lstStyle/>
-          <a:p>
-            <a:pPr algn="l">
-              <a:lnSpc>
-                <a:spcPct val="100000"/>
-              </a:lnSpc>
-            </a:pPr>
-            <a:r>
-              <a:rPr sz="1050" b="1" i="0">
-                <a:solidFill>
-                  <a:srgbClr val="11181C"/>
-                </a:solidFill>
-                <a:latin typeface="Arial"/>
-              </a:rPr>
-              <a:t>Sell a ready-to-work package.</a:t>
-            </a:r>
-          </a:p>
-          <a:p>
-            <a:pPr marL="127000" indent="-127000">
-              <a:spcBef>
-                <a:spcPts val="300"/>
-              </a:spcBef>
-              <a:buChar char="•"/>
-            </a:pPr>
-            <a:r>
-              <a:rPr sz="950">
-                <a:solidFill>
-                  <a:srgbClr val="4D555C"/>
-                </a:solidFill>
-                <a:latin typeface="Arial"/>
-              </a:rPr>
-              <a:t>Crane + flatdeck + installation (+2-yr warranty, Ferrari).</a:t>
-            </a:r>
-          </a:p>
-          <a:p>
-            <a:pPr marL="127000" indent="-127000">
-              <a:spcBef>
-                <a:spcPts val="300"/>
-              </a:spcBef>
-              <a:buChar char="•"/>
-            </a:pPr>
-            <a:r>
-              <a:rPr sz="950">
-                <a:solidFill>
-                  <a:srgbClr val="4D555C"/>
-                </a:solidFill>
-                <a:latin typeface="Arial"/>
-              </a:rPr>
-              <a:t>Exhibitions and customer visits with a Marcom sales kit.</a:t>
-            </a:r>
-          </a:p>
-        </p:txBody>
-      </p:sp>
-      <p:sp>
-        <p:nvSpPr>
-          <p:cNvPr id="49" name="Rectangle 48"/>
-          <p:cNvSpPr/>
-          <p:nvPr/>
-        </p:nvSpPr>
-        <p:spPr>
-          <a:xfrm>
-            <a:off x="8096250" y="1447800"/>
-            <a:ext cx="3562350" cy="228600"/>
-          </a:xfrm>
-          <a:prstGeom prst="rect">
-            <a:avLst/>
-          </a:prstGeom>
-          <a:solidFill>
-            <a:srgbClr val="076932"/>
-          </a:solidFill>
-          <a:ln>
-            <a:noFill/>
-          </a:ln>
-        </p:spPr>
-        <p:txBody>
-          <a:bodyPr rtlCol="0" anchor="ctr"/>
-          <a:lstStyle/>
-          <a:p/>
-        </p:txBody>
-      </p:sp>
-      <p:sp>
-        <p:nvSpPr>
-          <p:cNvPr id="50" name="TextBox 49"/>
-          <p:cNvSpPr txBox="1"/>
-          <p:nvPr/>
-        </p:nvSpPr>
-        <p:spPr>
-          <a:xfrm>
-            <a:off x="8191500" y="1447800"/>
-            <a:ext cx="3371850" cy="228600"/>
-          </a:xfrm>
-          <a:prstGeom prst="rect">
-            <a:avLst/>
-          </a:prstGeom>
-          <a:noFill/>
-        </p:spPr>
-        <p:txBody>
-          <a:bodyPr wrap="square" lIns="0" rIns="0" tIns="0" bIns="0" anchor="ctr">
-            <a:spAutoFit/>
-          </a:bodyPr>
-          <a:lstStyle/>
-          <a:p>
-            <a:pPr algn="l"/>
-            <a:r>
-              <a:rPr sz="1000" b="1" i="0" spc="50">
-                <a:solidFill>
-                  <a:srgbClr val="FFFFFF"/>
-                </a:solidFill>
-                <a:latin typeface="Arial"/>
-              </a:rPr>
-              <a:t>4P · HOW WE WIN</a:t>
+              <a:t>* Meaning of PB, RS and ECM to be confirmed with the F.lli Ferrari datasheet. Price gaps vs the Top 1 model in each tm tier (2023 – Aug 2026 import prices).</a:t>
             </a:r>
           </a:p>
         </p:txBody>

--- a/nedp_deck/v4/Slide08_Strategic_4C_STP_4P.pptx
+++ b/nedp_deck/v4/Slide08_Strategic_4C_STP_4P.pptx
@@ -6,7 +6,6 @@
   </p:sldMasterIdLst>
   <p:sldIdLst>
     <p:sldId id="263" r:id="rId14"/>
-    <p:sldId id="264" r:id="rId15"/>
   </p:sldIdLst>
   <p:sldSz cx="12192000" cy="6858000" type="screen4x3"/>
   <p:notesSz cx="6858000" cy="9144000"/>
@@ -3369,7 +3368,7 @@
                 </a:solidFill>
                 <a:latin typeface="Arial"/>
               </a:rPr>
-              <a:t>08 / 19</a:t>
+              <a:t>08 / 18</a:t>
             </a:r>
           </a:p>
         </p:txBody>
@@ -3384,7 +3383,7 @@
         </p:nvGraphicFramePr>
         <p:xfrm>
           <a:off x="533400" y="1504950"/>
-          <a:ext cx="11125200" cy="4933950"/>
+          <a:ext cx="11125200" cy="4910132"/>
         </p:xfrm>
         <a:graphic>
           <a:graphicData uri="http://schemas.openxmlformats.org/drawingml/2006/table">
@@ -3398,7 +3397,7 @@
                 <a:gridCol w="3143250"/>
                 <a:gridCol w="5886450"/>
               </a:tblGrid>
-              <a:tr h="266700">
+              <a:tr h="247650">
                 <a:tc>
                   <a:txBody>
                     <a:bodyPr wrap="square"/>
@@ -3584,7 +3583,7 @@
                   </a:tcPr>
                 </a:tc>
               </a:tr>
-              <a:tr h="666750">
+              <a:tr h="423862">
                 <a:tc rowSpan="4">
                   <a:txBody>
                     <a:bodyPr wrap="square"/>
@@ -3635,10 +3634,10 @@
                     <a:lstStyle/>
                     <a:p>
                       <a:pPr algn="l">
-                        <a:defRPr sz="1050"/>
+                        <a:defRPr sz="1000"/>
                       </a:pPr>
                       <a:r>
-                        <a:rPr sz="1050" b="1">
+                        <a:rPr sz="1000" b="1">
                           <a:solidFill>
                             <a:srgbClr val="11181C"/>
                           </a:solidFill>
@@ -3646,51 +3645,7 @@
                         </a:rPr>
                         <a:t>Change</a:t>
                       </a:r>
-                      <a:endParaRPr sz="1050"/>
-                    </a:p>
-                  </a:txBody>
-                  <a:tcPr marL="50800" marR="50800" marT="25400" marB="25400" anchor="ctr">
-                    <a:lnL w="9525">
-                      <a:solidFill>
-                        <a:srgbClr val="E6E8EB"/>
-                      </a:solidFill>
-                    </a:lnL>
-                    <a:lnR w="9525">
-                      <a:solidFill>
-                        <a:srgbClr val="E6E8EB"/>
-                      </a:solidFill>
-                    </a:lnR>
-                    <a:lnT w="9525">
-                      <a:solidFill>
-                        <a:srgbClr val="E6E8EB"/>
-                      </a:solidFill>
-                    </a:lnT>
-                    <a:lnB w="9525">
-                      <a:solidFill>
-                        <a:srgbClr val="E6E8EB"/>
-                      </a:solidFill>
-                    </a:lnB>
-                    <a:noFill/>
-                  </a:tcPr>
-                </a:tc>
-                <a:tc>
-                  <a:txBody>
-                    <a:bodyPr wrap="square"/>
-                    <a:lstStyle/>
-                    <a:p>
-                      <a:pPr algn="l">
-                        <a:defRPr sz="1050"/>
-                      </a:pPr>
-                      <a:r>
-                        <a:rPr sz="1050" b="1">
-                          <a:solidFill>
-                            <a:srgbClr val="11181C"/>
-                          </a:solidFill>
-                          <a:latin typeface="Arial"/>
-                        </a:rPr>
-                        <a:t>HYVA has left; value sits in Medium + Heavy</a:t>
-                      </a:r>
-                      <a:endParaRPr sz="1050"/>
+                      <a:endParaRPr sz="1000"/>
                     </a:p>
                   </a:txBody>
                   <a:tcPr marL="50800" marR="50800" marT="25400" marB="25400" anchor="ctr">
@@ -3726,90 +3681,15 @@
                         <a:defRPr sz="1000"/>
                       </a:pPr>
                       <a:r>
-                        <a:rPr sz="1000" b="0">
+                        <a:rPr sz="1000" b="1">
                           <a:solidFill>
                             <a:srgbClr val="11181C"/>
                           </a:solidFill>
                           <a:latin typeface="Arial"/>
                         </a:rPr>
-                        <a:t>Triatra has no crane brand since HYVA stopped. Medium + Heavy = 41% of units, 64% of value (2023 – 2026). Heavy units 12 → 17 → 35 (2023 – 2025).</a:t>
+                        <a:t>HYVA has left; value sits in Medium + Heavy</a:t>
                       </a:r>
                       <a:endParaRPr sz="1000"/>
-                    </a:p>
-                  </a:txBody>
-                  <a:tcPr marL="50800" marR="50800" marT="25400" marB="25400" anchor="ctr">
-                    <a:lnL w="9525">
-                      <a:solidFill>
-                        <a:srgbClr val="E6E8EB"/>
-                      </a:solidFill>
-                    </a:lnL>
-                    <a:lnR w="9525">
-                      <a:solidFill>
-                        <a:srgbClr val="E6E8EB"/>
-                      </a:solidFill>
-                    </a:lnR>
-                    <a:lnT w="9525">
-                      <a:solidFill>
-                        <a:srgbClr val="E6E8EB"/>
-                      </a:solidFill>
-                    </a:lnT>
-                    <a:lnB w="9525">
-                      <a:solidFill>
-                        <a:srgbClr val="E6E8EB"/>
-                      </a:solidFill>
-                    </a:lnB>
-                    <a:noFill/>
-                  </a:tcPr>
-                </a:tc>
-              </a:tr>
-              <a:tr h="666750">
-                <a:tc vMerge="1">
-                  <a:txBody>
-                    <a:bodyPr/>
-                    <a:lstStyle/>
-                    <a:p/>
-                  </a:txBody>
-                  <a:tcPr>
-                    <a:lnL w="9525">
-                      <a:solidFill>
-                        <a:srgbClr val="E6E8EB"/>
-                      </a:solidFill>
-                    </a:lnL>
-                    <a:lnR w="9525">
-                      <a:solidFill>
-                        <a:srgbClr val="E6E8EB"/>
-                      </a:solidFill>
-                    </a:lnR>
-                    <a:lnT w="9525">
-                      <a:solidFill>
-                        <a:srgbClr val="E6E8EB"/>
-                      </a:solidFill>
-                    </a:lnT>
-                    <a:lnB w="9525">
-                      <a:solidFill>
-                        <a:srgbClr val="E6E8EB"/>
-                      </a:solidFill>
-                    </a:lnB>
-                  </a:tcPr>
-                </a:tc>
-                <a:tc>
-                  <a:txBody>
-                    <a:bodyPr wrap="square"/>
-                    <a:lstStyle/>
-                    <a:p>
-                      <a:pPr algn="l">
-                        <a:defRPr sz="1050"/>
-                      </a:pPr>
-                      <a:r>
-                        <a:rPr sz="1050" b="1">
-                          <a:solidFill>
-                            <a:srgbClr val="11181C"/>
-                          </a:solidFill>
-                          <a:latin typeface="Arial"/>
-                        </a:rPr>
-                        <a:t>Competitor</a:t>
-                      </a:r>
-                      <a:endParaRPr sz="1050"/>
                     </a:p>
                   </a:txBody>
                   <a:tcPr marL="50800" marR="50800" marT="25400" marB="25400" anchor="ctr">
@@ -3842,18 +3722,93 @@
                     <a:lstStyle/>
                     <a:p>
                       <a:pPr algn="l">
-                        <a:defRPr sz="1050"/>
+                        <a:defRPr sz="950"/>
                       </a:pPr>
                       <a:r>
-                        <a:rPr sz="1050" b="1">
+                        <a:rPr sz="950" b="0">
                           <a:solidFill>
                             <a:srgbClr val="11181C"/>
                           </a:solidFill>
                           <a:latin typeface="Arial"/>
                         </a:rPr>
-                        <a:t>Two leaders, one per class</a:t>
+                        <a:t>Triatra has no crane brand since HYVA stopped. Medium + Heavy = 41% of units, 64% of value (2023 – 2026). Heavy units 12 → 17 → 35 (2023 – 2025).</a:t>
                       </a:r>
-                      <a:endParaRPr sz="1050"/>
+                      <a:endParaRPr sz="950"/>
+                    </a:p>
+                  </a:txBody>
+                  <a:tcPr marL="50800" marR="50800" marT="25400" marB="25400" anchor="ctr">
+                    <a:lnL w="9525">
+                      <a:solidFill>
+                        <a:srgbClr val="E6E8EB"/>
+                      </a:solidFill>
+                    </a:lnL>
+                    <a:lnR w="9525">
+                      <a:solidFill>
+                        <a:srgbClr val="E6E8EB"/>
+                      </a:solidFill>
+                    </a:lnR>
+                    <a:lnT w="9525">
+                      <a:solidFill>
+                        <a:srgbClr val="E6E8EB"/>
+                      </a:solidFill>
+                    </a:lnT>
+                    <a:lnB w="9525">
+                      <a:solidFill>
+                        <a:srgbClr val="E6E8EB"/>
+                      </a:solidFill>
+                    </a:lnB>
+                    <a:noFill/>
+                  </a:tcPr>
+                </a:tc>
+              </a:tr>
+              <a:tr h="423862">
+                <a:tc vMerge="1">
+                  <a:txBody>
+                    <a:bodyPr/>
+                    <a:lstStyle/>
+                    <a:p/>
+                  </a:txBody>
+                  <a:tcPr>
+                    <a:lnL w="9525">
+                      <a:solidFill>
+                        <a:srgbClr val="E6E8EB"/>
+                      </a:solidFill>
+                    </a:lnL>
+                    <a:lnR w="9525">
+                      <a:solidFill>
+                        <a:srgbClr val="E6E8EB"/>
+                      </a:solidFill>
+                    </a:lnR>
+                    <a:lnT w="9525">
+                      <a:solidFill>
+                        <a:srgbClr val="E6E8EB"/>
+                      </a:solidFill>
+                    </a:lnT>
+                    <a:lnB w="9525">
+                      <a:solidFill>
+                        <a:srgbClr val="E6E8EB"/>
+                      </a:solidFill>
+                    </a:lnB>
+                  </a:tcPr>
+                </a:tc>
+                <a:tc>
+                  <a:txBody>
+                    <a:bodyPr wrap="square"/>
+                    <a:lstStyle/>
+                    <a:p>
+                      <a:pPr algn="l">
+                        <a:defRPr sz="1000"/>
+                      </a:pPr>
+                      <a:r>
+                        <a:rPr sz="1000" b="1">
+                          <a:solidFill>
+                            <a:srgbClr val="11181C"/>
+                          </a:solidFill>
+                          <a:latin typeface="Arial"/>
+                        </a:rPr>
+                        <a:t>Competitor</a:t>
+                      </a:r>
+                      <a:endParaRPr sz="1000"/>
                     </a:p>
                   </a:txBody>
                   <a:tcPr marL="50800" marR="50800" marT="25400" marB="25400" anchor="ctr">
@@ -3889,90 +3844,15 @@
                         <a:defRPr sz="1000"/>
                       </a:pPr>
                       <a:r>
-                        <a:rPr sz="1000" b="0">
+                        <a:rPr sz="1000" b="1">
                           <a:solidFill>
                             <a:srgbClr val="11181C"/>
                           </a:solidFill>
                           <a:latin typeface="Arial"/>
                         </a:rPr>
-                        <a:t>Medium: Sany Palfinger, 38% of value. Heavy: Palfinger, 66% of value; PK 53002 alone sold 39 of 65 units (2023 – 2026).</a:t>
+                        <a:t>Two leaders, one per class</a:t>
                       </a:r>
                       <a:endParaRPr sz="1000"/>
-                    </a:p>
-                  </a:txBody>
-                  <a:tcPr marL="50800" marR="50800" marT="25400" marB="25400" anchor="ctr">
-                    <a:lnL w="9525">
-                      <a:solidFill>
-                        <a:srgbClr val="E6E8EB"/>
-                      </a:solidFill>
-                    </a:lnL>
-                    <a:lnR w="9525">
-                      <a:solidFill>
-                        <a:srgbClr val="E6E8EB"/>
-                      </a:solidFill>
-                    </a:lnR>
-                    <a:lnT w="9525">
-                      <a:solidFill>
-                        <a:srgbClr val="E6E8EB"/>
-                      </a:solidFill>
-                    </a:lnT>
-                    <a:lnB w="9525">
-                      <a:solidFill>
-                        <a:srgbClr val="E6E8EB"/>
-                      </a:solidFill>
-                    </a:lnB>
-                    <a:noFill/>
-                  </a:tcPr>
-                </a:tc>
-              </a:tr>
-              <a:tr h="666750">
-                <a:tc vMerge="1">
-                  <a:txBody>
-                    <a:bodyPr/>
-                    <a:lstStyle/>
-                    <a:p/>
-                  </a:txBody>
-                  <a:tcPr>
-                    <a:lnL w="9525">
-                      <a:solidFill>
-                        <a:srgbClr val="E6E8EB"/>
-                      </a:solidFill>
-                    </a:lnL>
-                    <a:lnR w="9525">
-                      <a:solidFill>
-                        <a:srgbClr val="E6E8EB"/>
-                      </a:solidFill>
-                    </a:lnR>
-                    <a:lnT w="9525">
-                      <a:solidFill>
-                        <a:srgbClr val="E6E8EB"/>
-                      </a:solidFill>
-                    </a:lnT>
-                    <a:lnB w="9525">
-                      <a:solidFill>
-                        <a:srgbClr val="E6E8EB"/>
-                      </a:solidFill>
-                    </a:lnB>
-                  </a:tcPr>
-                </a:tc>
-                <a:tc>
-                  <a:txBody>
-                    <a:bodyPr wrap="square"/>
-                    <a:lstStyle/>
-                    <a:p>
-                      <a:pPr algn="l">
-                        <a:defRPr sz="1050"/>
-                      </a:pPr>
-                      <a:r>
-                        <a:rPr sz="1050" b="1">
-                          <a:solidFill>
-                            <a:srgbClr val="11181C"/>
-                          </a:solidFill>
-                          <a:latin typeface="Arial"/>
-                        </a:rPr>
-                        <a:t>Customer</a:t>
-                      </a:r>
-                      <a:endParaRPr sz="1050"/>
                     </a:p>
                   </a:txBody>
                   <a:tcPr marL="50800" marR="50800" marT="25400" marB="25400" anchor="ctr">
@@ -4005,18 +3885,93 @@
                     <a:lstStyle/>
                     <a:p>
                       <a:pPr algn="l">
-                        <a:defRPr sz="1050"/>
+                        <a:defRPr sz="950"/>
                       </a:pPr>
                       <a:r>
-                        <a:rPr sz="1050" b="1">
+                        <a:rPr sz="950" b="0">
                           <a:solidFill>
                             <a:srgbClr val="11181C"/>
                           </a:solidFill>
                           <a:latin typeface="Arial"/>
                         </a:rPr>
-                        <a:t>Medium buys on price, Heavy buys on quality</a:t>
+                        <a:t>Medium: Sany Palfinger, 38% of value. Heavy: Palfinger, 66% of value; PK 53002 alone sold 39 of 65 units (2023 – 2026).</a:t>
                       </a:r>
-                      <a:endParaRPr sz="1050"/>
+                      <a:endParaRPr sz="950"/>
+                    </a:p>
+                  </a:txBody>
+                  <a:tcPr marL="50800" marR="50800" marT="25400" marB="25400" anchor="ctr">
+                    <a:lnL w="9525">
+                      <a:solidFill>
+                        <a:srgbClr val="E6E8EB"/>
+                      </a:solidFill>
+                    </a:lnL>
+                    <a:lnR w="9525">
+                      <a:solidFill>
+                        <a:srgbClr val="E6E8EB"/>
+                      </a:solidFill>
+                    </a:lnR>
+                    <a:lnT w="9525">
+                      <a:solidFill>
+                        <a:srgbClr val="E6E8EB"/>
+                      </a:solidFill>
+                    </a:lnT>
+                    <a:lnB w="9525">
+                      <a:solidFill>
+                        <a:srgbClr val="E6E8EB"/>
+                      </a:solidFill>
+                    </a:lnB>
+                    <a:noFill/>
+                  </a:tcPr>
+                </a:tc>
+              </a:tr>
+              <a:tr h="423862">
+                <a:tc vMerge="1">
+                  <a:txBody>
+                    <a:bodyPr/>
+                    <a:lstStyle/>
+                    <a:p/>
+                  </a:txBody>
+                  <a:tcPr>
+                    <a:lnL w="9525">
+                      <a:solidFill>
+                        <a:srgbClr val="E6E8EB"/>
+                      </a:solidFill>
+                    </a:lnL>
+                    <a:lnR w="9525">
+                      <a:solidFill>
+                        <a:srgbClr val="E6E8EB"/>
+                      </a:solidFill>
+                    </a:lnR>
+                    <a:lnT w="9525">
+                      <a:solidFill>
+                        <a:srgbClr val="E6E8EB"/>
+                      </a:solidFill>
+                    </a:lnT>
+                    <a:lnB w="9525">
+                      <a:solidFill>
+                        <a:srgbClr val="E6E8EB"/>
+                      </a:solidFill>
+                    </a:lnB>
+                  </a:tcPr>
+                </a:tc>
+                <a:tc>
+                  <a:txBody>
+                    <a:bodyPr wrap="square"/>
+                    <a:lstStyle/>
+                    <a:p>
+                      <a:pPr algn="l">
+                        <a:defRPr sz="1000"/>
+                      </a:pPr>
+                      <a:r>
+                        <a:rPr sz="1000" b="1">
+                          <a:solidFill>
+                            <a:srgbClr val="11181C"/>
+                          </a:solidFill>
+                          <a:latin typeface="Arial"/>
+                        </a:rPr>
+                        <a:t>Customer</a:t>
+                      </a:r>
+                      <a:endParaRPr sz="1000"/>
                     </a:p>
                   </a:txBody>
                   <a:tcPr marL="50800" marR="50800" marT="25400" marB="25400" anchor="ctr">
@@ -4052,7 +4007,51 @@
                         <a:defRPr sz="1000"/>
                       </a:pPr>
                       <a:r>
-                        <a:rPr sz="1000" b="0">
+                        <a:rPr sz="1000" b="1">
+                          <a:solidFill>
+                            <a:srgbClr val="11181C"/>
+                          </a:solidFill>
+                          <a:latin typeface="Arial"/>
+                        </a:rPr>
+                        <a:t>Medium buys on price, Heavy buys on quality</a:t>
+                      </a:r>
+                      <a:endParaRPr sz="1000"/>
+                    </a:p>
+                  </a:txBody>
+                  <a:tcPr marL="50800" marR="50800" marT="25400" marB="25400" anchor="ctr">
+                    <a:lnL w="9525">
+                      <a:solidFill>
+                        <a:srgbClr val="E6E8EB"/>
+                      </a:solidFill>
+                    </a:lnL>
+                    <a:lnR w="9525">
+                      <a:solidFill>
+                        <a:srgbClr val="E6E8EB"/>
+                      </a:solidFill>
+                    </a:lnR>
+                    <a:lnT w="9525">
+                      <a:solidFill>
+                        <a:srgbClr val="E6E8EB"/>
+                      </a:solidFill>
+                    </a:lnT>
+                    <a:lnB w="9525">
+                      <a:solidFill>
+                        <a:srgbClr val="E6E8EB"/>
+                      </a:solidFill>
+                    </a:lnB>
+                    <a:noFill/>
+                  </a:tcPr>
+                </a:tc>
+                <a:tc>
+                  <a:txBody>
+                    <a:bodyPr wrap="square"/>
+                    <a:lstStyle/>
+                    <a:p>
+                      <a:pPr algn="l">
+                        <a:defRPr sz="950"/>
+                      </a:pPr>
+                      <a:r>
+                        <a:rPr sz="950" b="0">
                           <a:solidFill>
                             <a:srgbClr val="11181C"/>
                           </a:solidFill>
@@ -4060,7 +4059,7 @@
                         </a:rPr>
                         <a:t>China brands take 73% of Medium value; European brands take 85% of Heavy value. 88% go on trucks ≥ 24 t GVW (mining, construction).</a:t>
                       </a:r>
-                      <a:endParaRPr sz="1000"/>
+                      <a:endParaRPr sz="950"/>
                     </a:p>
                   </a:txBody>
                   <a:tcPr marL="50800" marR="50800" marT="25400" marB="25400" anchor="ctr">
@@ -4088,7 +4087,7 @@
                   </a:tcPr>
                 </a:tc>
               </a:tr>
-              <a:tr h="666750">
+              <a:tr h="423862">
                 <a:tc vMerge="1">
                   <a:txBody>
                     <a:bodyPr/>
@@ -4124,10 +4123,10 @@
                     <a:lstStyle/>
                     <a:p>
                       <a:pPr algn="l">
-                        <a:defRPr sz="1050"/>
+                        <a:defRPr sz="1000"/>
                       </a:pPr>
                       <a:r>
-                        <a:rPr sz="1050" b="1">
+                        <a:rPr sz="1000" b="1">
                           <a:solidFill>
                             <a:srgbClr val="11181C"/>
                           </a:solidFill>
@@ -4135,53 +4134,7 @@
                         </a:rPr>
                         <a:t>Company</a:t>
                       </a:r>
-                      <a:endParaRPr sz="1050"/>
-                    </a:p>
-                  </a:txBody>
-                  <a:tcPr marL="50800" marR="50800" marT="25400" marB="25400" anchor="ctr">
-                    <a:lnL w="9525">
-                      <a:solidFill>
-                        <a:srgbClr val="E6E8EB"/>
-                      </a:solidFill>
-                    </a:lnL>
-                    <a:lnR w="9525">
-                      <a:solidFill>
-                        <a:srgbClr val="E6E8EB"/>
-                      </a:solidFill>
-                    </a:lnR>
-                    <a:lnT w="9525">
-                      <a:solidFill>
-                        <a:srgbClr val="E6E8EB"/>
-                      </a:solidFill>
-                    </a:lnT>
-                    <a:lnB w="9525">
-                      <a:solidFill>
-                        <a:srgbClr val="E6E8EB"/>
-                      </a:solidFill>
-                    </a:lnB>
-                    <a:solidFill>
-                      <a:srgbClr val="E1F9EC"/>
-                    </a:solidFill>
-                  </a:tcPr>
-                </a:tc>
-                <a:tc>
-                  <a:txBody>
-                    <a:bodyPr wrap="square"/>
-                    <a:lstStyle/>
-                    <a:p>
-                      <a:pPr algn="l">
-                        <a:defRPr sz="1050"/>
-                      </a:pPr>
-                      <a:r>
-                        <a:rPr sz="1050" b="1">
-                          <a:solidFill>
-                            <a:srgbClr val="11181C"/>
-                          </a:solidFill>
-                          <a:latin typeface="Arial"/>
-                        </a:rPr>
-                        <a:t>Partner two brands to serve both buyers</a:t>
-                      </a:r>
-                      <a:endParaRPr sz="1050"/>
+                      <a:endParaRPr sz="1000"/>
                     </a:p>
                   </a:txBody>
                   <a:tcPr marL="50800" marR="50800" marT="25400" marB="25400" anchor="ctr">
@@ -4219,7 +4172,53 @@
                         <a:defRPr sz="1000"/>
                       </a:pPr>
                       <a:r>
-                        <a:rPr sz="1000" b="0">
+                        <a:rPr sz="1000" b="1">
+                          <a:solidFill>
+                            <a:srgbClr val="11181C"/>
+                          </a:solidFill>
+                          <a:latin typeface="Arial"/>
+                        </a:rPr>
+                        <a:t>Partner two brands to serve both buyers</a:t>
+                      </a:r>
+                      <a:endParaRPr sz="1000"/>
+                    </a:p>
+                  </a:txBody>
+                  <a:tcPr marL="50800" marR="50800" marT="25400" marB="25400" anchor="ctr">
+                    <a:lnL w="9525">
+                      <a:solidFill>
+                        <a:srgbClr val="E6E8EB"/>
+                      </a:solidFill>
+                    </a:lnL>
+                    <a:lnR w="9525">
+                      <a:solidFill>
+                        <a:srgbClr val="E6E8EB"/>
+                      </a:solidFill>
+                    </a:lnR>
+                    <a:lnT w="9525">
+                      <a:solidFill>
+                        <a:srgbClr val="E6E8EB"/>
+                      </a:solidFill>
+                    </a:lnT>
+                    <a:lnB w="9525">
+                      <a:solidFill>
+                        <a:srgbClr val="E6E8EB"/>
+                      </a:solidFill>
+                    </a:lnB>
+                    <a:solidFill>
+                      <a:srgbClr val="E1F9EC"/>
+                    </a:solidFill>
+                  </a:tcPr>
+                </a:tc>
+                <a:tc>
+                  <a:txBody>
+                    <a:bodyPr wrap="square"/>
+                    <a:lstStyle/>
+                    <a:p>
+                      <a:pPr algn="l">
+                        <a:defRPr sz="950"/>
+                      </a:pPr>
+                      <a:r>
+                        <a:rPr sz="950" b="0">
                           <a:solidFill>
                             <a:srgbClr val="11181C"/>
                           </a:solidFill>
@@ -4227,7 +4226,7 @@
                         </a:rPr>
                         <a:t>XCMG for price-oriented buyers. F.lli Ferrari for quality-oriented buyers.</a:t>
                       </a:r>
-                      <a:endParaRPr sz="1000"/>
+                      <a:endParaRPr sz="950"/>
                     </a:p>
                   </a:txBody>
                   <a:tcPr marL="50800" marR="50800" marT="25400" marB="25400" anchor="ctr">
@@ -4257,7 +4256,7 @@
                   </a:tcPr>
                 </a:tc>
               </a:tr>
-              <a:tr h="666750">
+              <a:tr h="423862">
                 <a:tc rowSpan="3">
                   <a:txBody>
                     <a:bodyPr wrap="square"/>
@@ -4308,10 +4307,10 @@
                     <a:lstStyle/>
                     <a:p>
                       <a:pPr algn="l">
-                        <a:defRPr sz="1050"/>
+                        <a:defRPr sz="1000"/>
                       </a:pPr>
                       <a:r>
-                        <a:rPr sz="1050" b="1">
+                        <a:rPr sz="1000" b="1">
                           <a:solidFill>
                             <a:srgbClr val="11181C"/>
                           </a:solidFill>
@@ -4319,51 +4318,7 @@
                         </a:rPr>
                         <a:t>Segmentation</a:t>
                       </a:r>
-                      <a:endParaRPr sz="1050"/>
-                    </a:p>
-                  </a:txBody>
-                  <a:tcPr marL="50800" marR="50800" marT="25400" marB="25400" anchor="ctr">
-                    <a:lnL w="9525">
-                      <a:solidFill>
-                        <a:srgbClr val="E6E8EB"/>
-                      </a:solidFill>
-                    </a:lnL>
-                    <a:lnR w="9525">
-                      <a:solidFill>
-                        <a:srgbClr val="E6E8EB"/>
-                      </a:solidFill>
-                    </a:lnR>
-                    <a:lnT w="9525">
-                      <a:solidFill>
-                        <a:srgbClr val="E6E8EB"/>
-                      </a:solidFill>
-                    </a:lnT>
-                    <a:lnB w="9525">
-                      <a:solidFill>
-                        <a:srgbClr val="E6E8EB"/>
-                      </a:solidFill>
-                    </a:lnB>
-                    <a:noFill/>
-                  </a:tcPr>
-                </a:tc>
-                <a:tc>
-                  <a:txBody>
-                    <a:bodyPr wrap="square"/>
-                    <a:lstStyle/>
-                    <a:p>
-                      <a:pPr algn="l">
-                        <a:defRPr sz="1050"/>
-                      </a:pPr>
-                      <a:r>
-                        <a:rPr sz="1050" b="1">
-                          <a:solidFill>
-                            <a:srgbClr val="11181C"/>
-                          </a:solidFill>
-                          <a:latin typeface="Arial"/>
-                        </a:rPr>
-                        <a:t>Two classes, ten 5-tm tiers</a:t>
-                      </a:r>
-                      <a:endParaRPr sz="1050"/>
+                      <a:endParaRPr sz="1000"/>
                     </a:p>
                   </a:txBody>
                   <a:tcPr marL="50800" marR="50800" marT="25400" marB="25400" anchor="ctr">
@@ -4399,974 +4354,15 @@
                         <a:defRPr sz="1000"/>
                       </a:pPr>
                       <a:r>
-                        <a:rPr sz="1000" b="0">
+                        <a:rPr sz="1000" b="1">
                           <a:solidFill>
                             <a:srgbClr val="11181C"/>
                           </a:solidFill>
                           <a:latin typeface="Arial"/>
                         </a:rPr>
-                        <a:t>Medium 25 – 45 tm: 196 units, Rp 156 M. Heavy &gt; 45 tm: 65 units, Rp 115 M.</a:t>
+                        <a:t>Two classes, ten 5-tm tiers</a:t>
                       </a:r>
                       <a:endParaRPr sz="1000"/>
-                    </a:p>
-                  </a:txBody>
-                  <a:tcPr marL="50800" marR="50800" marT="25400" marB="25400" anchor="ctr">
-                    <a:lnL w="9525">
-                      <a:solidFill>
-                        <a:srgbClr val="E6E8EB"/>
-                      </a:solidFill>
-                    </a:lnL>
-                    <a:lnR w="9525">
-                      <a:solidFill>
-                        <a:srgbClr val="E6E8EB"/>
-                      </a:solidFill>
-                    </a:lnR>
-                    <a:lnT w="9525">
-                      <a:solidFill>
-                        <a:srgbClr val="E6E8EB"/>
-                      </a:solidFill>
-                    </a:lnT>
-                    <a:lnB w="9525">
-                      <a:solidFill>
-                        <a:srgbClr val="E6E8EB"/>
-                      </a:solidFill>
-                    </a:lnB>
-                    <a:noFill/>
-                  </a:tcPr>
-                </a:tc>
-              </a:tr>
-              <a:tr h="666750">
-                <a:tc vMerge="1">
-                  <a:txBody>
-                    <a:bodyPr/>
-                    <a:lstStyle/>
-                    <a:p/>
-                  </a:txBody>
-                  <a:tcPr>
-                    <a:lnL w="9525">
-                      <a:solidFill>
-                        <a:srgbClr val="E6E8EB"/>
-                      </a:solidFill>
-                    </a:lnL>
-                    <a:lnR w="9525">
-                      <a:solidFill>
-                        <a:srgbClr val="E6E8EB"/>
-                      </a:solidFill>
-                    </a:lnR>
-                    <a:lnT w="9525">
-                      <a:solidFill>
-                        <a:srgbClr val="E6E8EB"/>
-                      </a:solidFill>
-                    </a:lnT>
-                    <a:lnB w="9525">
-                      <a:solidFill>
-                        <a:srgbClr val="E6E8EB"/>
-                      </a:solidFill>
-                    </a:lnB>
-                  </a:tcPr>
-                </a:tc>
-                <a:tc>
-                  <a:txBody>
-                    <a:bodyPr wrap="square"/>
-                    <a:lstStyle/>
-                    <a:p>
-                      <a:pPr algn="l">
-                        <a:defRPr sz="1050"/>
-                      </a:pPr>
-                      <a:r>
-                        <a:rPr sz="1050" b="1">
-                          <a:solidFill>
-                            <a:srgbClr val="11181C"/>
-                          </a:solidFill>
-                          <a:latin typeface="Arial"/>
-                        </a:rPr>
-                        <a:t>Targeting</a:t>
-                      </a:r>
-                      <a:endParaRPr sz="1050"/>
-                    </a:p>
-                  </a:txBody>
-                  <a:tcPr marL="50800" marR="50800" marT="25400" marB="25400" anchor="ctr">
-                    <a:lnL w="9525">
-                      <a:solidFill>
-                        <a:srgbClr val="E6E8EB"/>
-                      </a:solidFill>
-                    </a:lnL>
-                    <a:lnR w="9525">
-                      <a:solidFill>
-                        <a:srgbClr val="E6E8EB"/>
-                      </a:solidFill>
-                    </a:lnR>
-                    <a:lnT w="9525">
-                      <a:solidFill>
-                        <a:srgbClr val="E6E8EB"/>
-                      </a:solidFill>
-                    </a:lnT>
-                    <a:lnB w="9525">
-                      <a:solidFill>
-                        <a:srgbClr val="E6E8EB"/>
-                      </a:solidFill>
-                    </a:lnB>
-                    <a:noFill/>
-                  </a:tcPr>
-                </a:tc>
-                <a:tc>
-                  <a:txBody>
-                    <a:bodyPr wrap="square"/>
-                    <a:lstStyle/>
-                    <a:p>
-                      <a:pPr algn="l">
-                        <a:defRPr sz="1050"/>
-                      </a:pPr>
-                      <a:r>
-                        <a:rPr sz="1050" b="1">
-                          <a:solidFill>
-                            <a:srgbClr val="11181C"/>
-                          </a:solidFill>
-                          <a:latin typeface="Arial"/>
-                        </a:rPr>
-                        <a:t>Take share from the Top 1 model in each tier</a:t>
-                      </a:r>
-                      <a:endParaRPr sz="1050"/>
-                    </a:p>
-                  </a:txBody>
-                  <a:tcPr marL="50800" marR="50800" marT="25400" marB="25400" anchor="ctr">
-                    <a:lnL w="9525">
-                      <a:solidFill>
-                        <a:srgbClr val="E6E8EB"/>
-                      </a:solidFill>
-                    </a:lnL>
-                    <a:lnR w="9525">
-                      <a:solidFill>
-                        <a:srgbClr val="E6E8EB"/>
-                      </a:solidFill>
-                    </a:lnR>
-                    <a:lnT w="9525">
-                      <a:solidFill>
-                        <a:srgbClr val="E6E8EB"/>
-                      </a:solidFill>
-                    </a:lnT>
-                    <a:lnB w="9525">
-                      <a:solidFill>
-                        <a:srgbClr val="E6E8EB"/>
-                      </a:solidFill>
-                    </a:lnB>
-                    <a:noFill/>
-                  </a:tcPr>
-                </a:tc>
-                <a:tc>
-                  <a:txBody>
-                    <a:bodyPr wrap="square"/>
-                    <a:lstStyle/>
-                    <a:p>
-                      <a:pPr algn="l">
-                        <a:defRPr sz="1000"/>
-                      </a:pPr>
-                      <a:r>
-                        <a:rPr sz="1000" b="0">
-                          <a:solidFill>
-                            <a:srgbClr val="11181C"/>
-                          </a:solidFill>
-                          <a:latin typeface="Arial"/>
-                        </a:rPr>
-                        <a:t>Medium: Sany Palfinger SPK32080, SPK36080, SPK42502. Heavy: Palfinger PK 53002, PK 76002, PK 88002.</a:t>
-                      </a:r>
-                      <a:endParaRPr sz="1000"/>
-                    </a:p>
-                  </a:txBody>
-                  <a:tcPr marL="50800" marR="50800" marT="25400" marB="25400" anchor="ctr">
-                    <a:lnL w="9525">
-                      <a:solidFill>
-                        <a:srgbClr val="E6E8EB"/>
-                      </a:solidFill>
-                    </a:lnL>
-                    <a:lnR w="9525">
-                      <a:solidFill>
-                        <a:srgbClr val="E6E8EB"/>
-                      </a:solidFill>
-                    </a:lnR>
-                    <a:lnT w="9525">
-                      <a:solidFill>
-                        <a:srgbClr val="E6E8EB"/>
-                      </a:solidFill>
-                    </a:lnT>
-                    <a:lnB w="9525">
-                      <a:solidFill>
-                        <a:srgbClr val="E6E8EB"/>
-                      </a:solidFill>
-                    </a:lnB>
-                    <a:noFill/>
-                  </a:tcPr>
-                </a:tc>
-              </a:tr>
-              <a:tr h="666750">
-                <a:tc vMerge="1">
-                  <a:txBody>
-                    <a:bodyPr/>
-                    <a:lstStyle/>
-                    <a:p/>
-                  </a:txBody>
-                  <a:tcPr>
-                    <a:lnL w="9525">
-                      <a:solidFill>
-                        <a:srgbClr val="E6E8EB"/>
-                      </a:solidFill>
-                    </a:lnL>
-                    <a:lnR w="9525">
-                      <a:solidFill>
-                        <a:srgbClr val="E6E8EB"/>
-                      </a:solidFill>
-                    </a:lnR>
-                    <a:lnT w="9525">
-                      <a:solidFill>
-                        <a:srgbClr val="E6E8EB"/>
-                      </a:solidFill>
-                    </a:lnT>
-                    <a:lnB w="9525">
-                      <a:solidFill>
-                        <a:srgbClr val="E6E8EB"/>
-                      </a:solidFill>
-                    </a:lnB>
-                  </a:tcPr>
-                </a:tc>
-                <a:tc>
-                  <a:txBody>
-                    <a:bodyPr wrap="square"/>
-                    <a:lstStyle/>
-                    <a:p>
-                      <a:pPr algn="l">
-                        <a:defRPr sz="1050"/>
-                      </a:pPr>
-                      <a:r>
-                        <a:rPr sz="1050" b="1">
-                          <a:solidFill>
-                            <a:srgbClr val="11181C"/>
-                          </a:solidFill>
-                          <a:latin typeface="Arial"/>
-                        </a:rPr>
-                        <a:t>Positioning</a:t>
-                      </a:r>
-                      <a:endParaRPr sz="1050"/>
-                    </a:p>
-                  </a:txBody>
-                  <a:tcPr marL="50800" marR="50800" marT="25400" marB="25400" anchor="ctr">
-                    <a:lnL w="9525">
-                      <a:solidFill>
-                        <a:srgbClr val="E6E8EB"/>
-                      </a:solidFill>
-                    </a:lnL>
-                    <a:lnR w="9525">
-                      <a:solidFill>
-                        <a:srgbClr val="E6E8EB"/>
-                      </a:solidFill>
-                    </a:lnR>
-                    <a:lnT w="9525">
-                      <a:solidFill>
-                        <a:srgbClr val="E6E8EB"/>
-                      </a:solidFill>
-                    </a:lnT>
-                    <a:lnB w="9525">
-                      <a:solidFill>
-                        <a:srgbClr val="E6E8EB"/>
-                      </a:solidFill>
-                    </a:lnB>
-                    <a:noFill/>
-                  </a:tcPr>
-                </a:tc>
-                <a:tc>
-                  <a:txBody>
-                    <a:bodyPr wrap="square"/>
-                    <a:lstStyle/>
-                    <a:p>
-                      <a:pPr algn="l">
-                        <a:defRPr sz="1050"/>
-                      </a:pPr>
-                      <a:r>
-                        <a:rPr sz="1050" b="1">
-                          <a:solidFill>
-                            <a:srgbClr val="11181C"/>
-                          </a:solidFill>
-                          <a:latin typeface="Arial"/>
-                        </a:rPr>
-                        <a:t>Two clear promises</a:t>
-                      </a:r>
-                      <a:endParaRPr sz="1050"/>
-                    </a:p>
-                  </a:txBody>
-                  <a:tcPr marL="50800" marR="50800" marT="25400" marB="25400" anchor="ctr">
-                    <a:lnL w="9525">
-                      <a:solidFill>
-                        <a:srgbClr val="E6E8EB"/>
-                      </a:solidFill>
-                    </a:lnL>
-                    <a:lnR w="9525">
-                      <a:solidFill>
-                        <a:srgbClr val="E6E8EB"/>
-                      </a:solidFill>
-                    </a:lnR>
-                    <a:lnT w="9525">
-                      <a:solidFill>
-                        <a:srgbClr val="E6E8EB"/>
-                      </a:solidFill>
-                    </a:lnT>
-                    <a:lnB w="9525">
-                      <a:solidFill>
-                        <a:srgbClr val="E6E8EB"/>
-                      </a:solidFill>
-                    </a:lnB>
-                    <a:noFill/>
-                  </a:tcPr>
-                </a:tc>
-                <a:tc>
-                  <a:txBody>
-                    <a:bodyPr wrap="square"/>
-                    <a:lstStyle/>
-                    <a:p>
-                      <a:pPr algn="l">
-                        <a:defRPr sz="1000"/>
-                      </a:pPr>
-                      <a:r>
-                        <a:rPr sz="1000" b="0">
-                          <a:solidFill>
-                            <a:srgbClr val="11181C"/>
-                          </a:solidFill>
-                          <a:latin typeface="Arial"/>
-                        </a:rPr>
-                        <a:t>XCMG: same capacity, lower price (SQZ365.4 −9% vs SPK36080). Ferrari: European features, cheaper where it wins (−23% at 25 – 30 tm, −32% at 45 – 50 tm) and faster delivery from China stock (~14 weeks).</a:t>
-                      </a:r>
-                      <a:endParaRPr sz="1000"/>
-                    </a:p>
-                  </a:txBody>
-                  <a:tcPr marL="50800" marR="50800" marT="25400" marB="25400" anchor="ctr">
-                    <a:lnL w="9525">
-                      <a:solidFill>
-                        <a:srgbClr val="E6E8EB"/>
-                      </a:solidFill>
-                    </a:lnL>
-                    <a:lnR w="9525">
-                      <a:solidFill>
-                        <a:srgbClr val="E6E8EB"/>
-                      </a:solidFill>
-                    </a:lnR>
-                    <a:lnT w="9525">
-                      <a:solidFill>
-                        <a:srgbClr val="E6E8EB"/>
-                      </a:solidFill>
-                    </a:lnT>
-                    <a:lnB w="9525">
-                      <a:solidFill>
-                        <a:srgbClr val="E6E8EB"/>
-                      </a:solidFill>
-                    </a:lnB>
-                    <a:noFill/>
-                  </a:tcPr>
-                </a:tc>
-              </a:tr>
-            </a:tbl>
-          </a:graphicData>
-        </a:graphic>
-      </p:graphicFrame>
-    </p:spTree>
-  </p:cSld>
-  <p:clrMapOvr>
-    <a:masterClrMapping/>
-  </p:clrMapOvr>
-</p:sld>
-</file>
-
-<file path=ppt/slides/slide9.xml><?xml version="1.0" encoding="utf-8"?>
-<p:sld xmlns:a="http://schemas.openxmlformats.org/drawingml/2006/main" xmlns:p="http://schemas.openxmlformats.org/presentationml/2006/main" xmlns:r="http://schemas.openxmlformats.org/officeDocument/2006/relationships">
-  <p:cSld>
-    <p:bg>
-      <p:bgPr>
-        <a:solidFill>
-          <a:srgbClr val="FFFFFF"/>
-        </a:solidFill>
-        <a:effectLst/>
-      </p:bgPr>
-    </p:bg>
-    <p:spTree>
-      <p:nvGrpSpPr>
-        <p:cNvPr id="1" name=""/>
-        <p:cNvGrpSpPr/>
-        <p:nvPr/>
-      </p:nvGrpSpPr>
-      <p:grpSpPr/>
-      <p:pic>
-        <p:nvPicPr>
-          <p:cNvPr id="2" name="Picture 1" descr="triatra_logo.png"/>
-          <p:cNvPicPr>
-            <a:picLocks noChangeAspect="1"/>
-          </p:cNvPicPr>
-          <p:nvPr/>
-        </p:nvPicPr>
-        <p:blipFill>
-          <a:blip r:embed="rId2"/>
-          <a:stretch>
-            <a:fillRect/>
-          </a:stretch>
-        </p:blipFill>
-        <p:spPr>
-          <a:xfrm>
-            <a:off x="533400" y="228600"/>
-            <a:ext cx="457034" cy="209550"/>
-          </a:xfrm>
-          <a:prstGeom prst="rect">
-            <a:avLst/>
-          </a:prstGeom>
-        </p:spPr>
-      </p:pic>
-      <p:sp>
-        <p:nvSpPr>
-          <p:cNvPr id="3" name="TextBox 2"/>
-          <p:cNvSpPr txBox="1"/>
-          <p:nvPr/>
-        </p:nvSpPr>
-        <p:spPr>
-          <a:xfrm>
-            <a:off x="6096000" y="276225"/>
-            <a:ext cx="5562600" cy="133350"/>
-          </a:xfrm>
-          <a:prstGeom prst="rect">
-            <a:avLst/>
-          </a:prstGeom>
-          <a:noFill/>
-        </p:spPr>
-        <p:txBody>
-          <a:bodyPr wrap="square" lIns="0" rIns="0" tIns="0" bIns="0" anchor="t">
-            <a:spAutoFit/>
-          </a:bodyPr>
-          <a:lstStyle/>
-          <a:p>
-            <a:pPr algn="r"/>
-            <a:r>
-              <a:rPr sz="750" b="0" i="0" spc="100">
-                <a:solidFill>
-                  <a:srgbClr val="697177"/>
-                </a:solidFill>
-                <a:latin typeface="Arial"/>
-              </a:rPr>
-              <a:t>NEDP 6-MONTH REVIEW  ·  4P · ACTION PLAN</a:t>
-            </a:r>
-          </a:p>
-        </p:txBody>
-      </p:sp>
-      <p:cxnSp>
-        <p:nvCxnSpPr>
-          <p:cNvPr id="4" name="Connector 3"/>
-          <p:cNvCxnSpPr/>
-          <p:nvPr/>
-        </p:nvCxnSpPr>
-        <p:spPr>
-          <a:xfrm>
-            <a:off x="533400" y="533400"/>
-            <a:ext cx="11125200" cy="0"/>
-          </a:xfrm>
-          <a:prstGeom prst="line">
-            <a:avLst/>
-          </a:prstGeom>
-          <a:ln w="9525">
-            <a:solidFill>
-              <a:srgbClr val="E6E8EB"/>
-            </a:solidFill>
-          </a:ln>
-        </p:spPr>
-      </p:cxnSp>
-      <p:sp>
-        <p:nvSpPr>
-          <p:cNvPr id="5" name="TextBox 4"/>
-          <p:cNvSpPr txBox="1"/>
-          <p:nvPr/>
-        </p:nvSpPr>
-        <p:spPr>
-          <a:xfrm>
-            <a:off x="533400" y="704850"/>
-            <a:ext cx="5715000" cy="133350"/>
-          </a:xfrm>
-          <a:prstGeom prst="rect">
-            <a:avLst/>
-          </a:prstGeom>
-          <a:noFill/>
-        </p:spPr>
-        <p:txBody>
-          <a:bodyPr wrap="square" lIns="0" rIns="0" tIns="0" bIns="0" anchor="t">
-            <a:spAutoFit/>
-          </a:bodyPr>
-          <a:lstStyle/>
-          <a:p>
-            <a:pPr algn="l"/>
-            <a:r>
-              <a:rPr sz="850" b="1" i="0" spc="150">
-                <a:solidFill>
-                  <a:srgbClr val="697177"/>
-                </a:solidFill>
-                <a:latin typeface="Arial"/>
-              </a:rPr>
-              <a:t>4P · ACTION PLAN</a:t>
-            </a:r>
-          </a:p>
-        </p:txBody>
-      </p:sp>
-      <p:sp>
-        <p:nvSpPr>
-          <p:cNvPr id="6" name="TextBox 5"/>
-          <p:cNvSpPr txBox="1"/>
-          <p:nvPr/>
-        </p:nvSpPr>
-        <p:spPr>
-          <a:xfrm>
-            <a:off x="533400" y="857250"/>
-            <a:ext cx="11125200" cy="381000"/>
-          </a:xfrm>
-          <a:prstGeom prst="rect">
-            <a:avLst/>
-          </a:prstGeom>
-          <a:noFill/>
-        </p:spPr>
-        <p:txBody>
-          <a:bodyPr wrap="square" lIns="0" rIns="0" tIns="0" bIns="0" anchor="t">
-            <a:spAutoFit/>
-          </a:bodyPr>
-          <a:lstStyle/>
-          <a:p>
-            <a:pPr algn="l"/>
-            <a:r>
-              <a:rPr sz="2100" b="0" i="0">
-                <a:solidFill>
-                  <a:srgbClr val="11181C"/>
-                </a:solidFill>
-                <a:latin typeface="Georgia"/>
-              </a:rPr>
-              <a:t>Four actions to </a:t>
-            </a:r>
-            <a:r>
-              <a:rPr sz="2100" b="0" i="1">
-                <a:solidFill>
-                  <a:srgbClr val="076932"/>
-                </a:solidFill>
-                <a:latin typeface="Georgia"/>
-              </a:rPr>
-              <a:t>win the first sale</a:t>
-            </a:r>
-            <a:r>
-              <a:rPr sz="2100" b="0" i="0">
-                <a:solidFill>
-                  <a:srgbClr val="11181C"/>
-                </a:solidFill>
-                <a:latin typeface="Georgia"/>
-              </a:rPr>
-              <a:t>: features, price, stock and package</a:t>
-            </a:r>
-          </a:p>
-        </p:txBody>
-      </p:sp>
-      <p:cxnSp>
-        <p:nvCxnSpPr>
-          <p:cNvPr id="7" name="Connector 6"/>
-          <p:cNvCxnSpPr/>
-          <p:nvPr/>
-        </p:nvCxnSpPr>
-        <p:spPr>
-          <a:xfrm>
-            <a:off x="533400" y="6591300"/>
-            <a:ext cx="11125200" cy="0"/>
-          </a:xfrm>
-          <a:prstGeom prst="line">
-            <a:avLst/>
-          </a:prstGeom>
-          <a:ln w="9525">
-            <a:solidFill>
-              <a:srgbClr val="E6E8EB"/>
-            </a:solidFill>
-          </a:ln>
-        </p:spPr>
-      </p:cxnSp>
-      <p:sp>
-        <p:nvSpPr>
-          <p:cNvPr id="8" name="TextBox 7"/>
-          <p:cNvSpPr txBox="1"/>
-          <p:nvPr/>
-        </p:nvSpPr>
-        <p:spPr>
-          <a:xfrm>
-            <a:off x="533400" y="6648450"/>
-            <a:ext cx="5715000" cy="114300"/>
-          </a:xfrm>
-          <a:prstGeom prst="rect">
-            <a:avLst/>
-          </a:prstGeom>
-          <a:noFill/>
-        </p:spPr>
-        <p:txBody>
-          <a:bodyPr wrap="square" lIns="0" rIns="0" tIns="0" bIns="0" anchor="t">
-            <a:spAutoFit/>
-          </a:bodyPr>
-          <a:lstStyle/>
-          <a:p>
-            <a:pPr algn="l"/>
-            <a:r>
-              <a:rPr sz="700" b="1" i="0" spc="100">
-                <a:solidFill>
-                  <a:srgbClr val="889096"/>
-                </a:solidFill>
-                <a:latin typeface="Arial"/>
-              </a:rPr>
-              <a:t>NEDP MID YEAR REVIEW 2026  ·  TIBERIAS K. SIMU</a:t>
-            </a:r>
-          </a:p>
-        </p:txBody>
-      </p:sp>
-      <p:sp>
-        <p:nvSpPr>
-          <p:cNvPr id="9" name="TextBox 8"/>
-          <p:cNvSpPr txBox="1"/>
-          <p:nvPr/>
-        </p:nvSpPr>
-        <p:spPr>
-          <a:xfrm>
-            <a:off x="9753600" y="6648450"/>
-            <a:ext cx="1905000" cy="114300"/>
-          </a:xfrm>
-          <a:prstGeom prst="rect">
-            <a:avLst/>
-          </a:prstGeom>
-          <a:noFill/>
-        </p:spPr>
-        <p:txBody>
-          <a:bodyPr wrap="square" lIns="0" rIns="0" tIns="0" bIns="0" anchor="t">
-            <a:spAutoFit/>
-          </a:bodyPr>
-          <a:lstStyle/>
-          <a:p>
-            <a:pPr algn="r"/>
-            <a:r>
-              <a:rPr sz="700" b="1" i="0" spc="100">
-                <a:solidFill>
-                  <a:srgbClr val="889096"/>
-                </a:solidFill>
-                <a:latin typeface="Arial"/>
-              </a:rPr>
-              <a:t>09 / 19</a:t>
-            </a:r>
-          </a:p>
-        </p:txBody>
-      </p:sp>
-      <p:graphicFrame>
-        <p:nvGraphicFramePr>
-          <p:cNvPr id="10" name="Table 9"/>
-          <p:cNvGraphicFramePr>
-            <a:graphicFrameLocks noGrp="1"/>
-          </p:cNvGraphicFramePr>
-          <p:nvPr/>
-        </p:nvGraphicFramePr>
-        <p:xfrm>
-          <a:off x="533400" y="1504950"/>
-          <a:ext cx="11125200" cy="4533900"/>
-        </p:xfrm>
-        <a:graphic>
-          <a:graphicData uri="http://schemas.openxmlformats.org/drawingml/2006/table">
-            <a:tbl>
-              <a:tblPr firstRow="0" bandRow="0">
-                <a:tableStyleId>{5940675A-B579-460E-94D1-54222C63F5DA}</a:tableStyleId>
-              </a:tblPr>
-              <a:tblGrid>
-                <a:gridCol w="1047750"/>
-                <a:gridCol w="2476500"/>
-                <a:gridCol w="2190750"/>
-                <a:gridCol w="5410200"/>
-              </a:tblGrid>
-              <a:tr h="323850">
-                <a:tc>
-                  <a:txBody>
-                    <a:bodyPr wrap="square"/>
-                    <a:lstStyle/>
-                    <a:p>
-                      <a:pPr algn="l">
-                        <a:defRPr sz="900"/>
-                      </a:pPr>
-                      <a:r>
-                        <a:rPr sz="900" b="1">
-                          <a:solidFill>
-                            <a:srgbClr val="11181C"/>
-                          </a:solidFill>
-                          <a:latin typeface="Arial"/>
-                        </a:rPr>
-                        <a:t>4P</a:t>
-                      </a:r>
-                      <a:endParaRPr sz="900"/>
-                    </a:p>
-                  </a:txBody>
-                  <a:tcPr marL="50800" marR="50800" marT="25400" marB="25400" anchor="ctr">
-                    <a:lnL w="9525">
-                      <a:solidFill>
-                        <a:srgbClr val="D7DBDF"/>
-                      </a:solidFill>
-                    </a:lnL>
-                    <a:lnR w="9525">
-                      <a:solidFill>
-                        <a:srgbClr val="D7DBDF"/>
-                      </a:solidFill>
-                    </a:lnR>
-                    <a:lnT w="9525">
-                      <a:solidFill>
-                        <a:srgbClr val="D7DBDF"/>
-                      </a:solidFill>
-                    </a:lnT>
-                    <a:lnB w="9525">
-                      <a:solidFill>
-                        <a:srgbClr val="D7DBDF"/>
-                      </a:solidFill>
-                    </a:lnB>
-                    <a:solidFill>
-                      <a:srgbClr val="F0F2F4"/>
-                    </a:solidFill>
-                  </a:tcPr>
-                </a:tc>
-                <a:tc>
-                  <a:txBody>
-                    <a:bodyPr wrap="square"/>
-                    <a:lstStyle/>
-                    <a:p>
-                      <a:pPr algn="l">
-                        <a:defRPr sz="900"/>
-                      </a:pPr>
-                      <a:r>
-                        <a:rPr sz="900" b="1">
-                          <a:solidFill>
-                            <a:srgbClr val="11181C"/>
-                          </a:solidFill>
-                          <a:latin typeface="Arial"/>
-                        </a:rPr>
-                        <a:t>To do</a:t>
-                      </a:r>
-                      <a:endParaRPr sz="900"/>
-                    </a:p>
-                  </a:txBody>
-                  <a:tcPr marL="50800" marR="50800" marT="25400" marB="25400" anchor="ctr">
-                    <a:lnL w="9525">
-                      <a:solidFill>
-                        <a:srgbClr val="D7DBDF"/>
-                      </a:solidFill>
-                    </a:lnL>
-                    <a:lnR w="9525">
-                      <a:solidFill>
-                        <a:srgbClr val="D7DBDF"/>
-                      </a:solidFill>
-                    </a:lnR>
-                    <a:lnT w="9525">
-                      <a:solidFill>
-                        <a:srgbClr val="D7DBDF"/>
-                      </a:solidFill>
-                    </a:lnT>
-                    <a:lnB w="9525">
-                      <a:solidFill>
-                        <a:srgbClr val="D7DBDF"/>
-                      </a:solidFill>
-                    </a:lnB>
-                    <a:solidFill>
-                      <a:srgbClr val="F0F2F4"/>
-                    </a:solidFill>
-                  </a:tcPr>
-                </a:tc>
-                <a:tc>
-                  <a:txBody>
-                    <a:bodyPr wrap="square"/>
-                    <a:lstStyle/>
-                    <a:p>
-                      <a:pPr algn="l">
-                        <a:defRPr sz="900"/>
-                      </a:pPr>
-                      <a:r>
-                        <a:rPr sz="900" b="1">
-                          <a:solidFill>
-                            <a:srgbClr val="11181C"/>
-                          </a:solidFill>
-                          <a:latin typeface="Arial"/>
-                        </a:rPr>
-                        <a:t>Item</a:t>
-                      </a:r>
-                      <a:endParaRPr sz="900"/>
-                    </a:p>
-                  </a:txBody>
-                  <a:tcPr marL="50800" marR="50800" marT="25400" marB="25400" anchor="ctr">
-                    <a:lnL w="9525">
-                      <a:solidFill>
-                        <a:srgbClr val="D7DBDF"/>
-                      </a:solidFill>
-                    </a:lnL>
-                    <a:lnR w="9525">
-                      <a:solidFill>
-                        <a:srgbClr val="D7DBDF"/>
-                      </a:solidFill>
-                    </a:lnR>
-                    <a:lnT w="9525">
-                      <a:solidFill>
-                        <a:srgbClr val="D7DBDF"/>
-                      </a:solidFill>
-                    </a:lnT>
-                    <a:lnB w="9525">
-                      <a:solidFill>
-                        <a:srgbClr val="D7DBDF"/>
-                      </a:solidFill>
-                    </a:lnB>
-                    <a:solidFill>
-                      <a:srgbClr val="F0F2F4"/>
-                    </a:solidFill>
-                  </a:tcPr>
-                </a:tc>
-                <a:tc>
-                  <a:txBody>
-                    <a:bodyPr wrap="square"/>
-                    <a:lstStyle/>
-                    <a:p>
-                      <a:pPr algn="l">
-                        <a:defRPr sz="900"/>
-                      </a:pPr>
-                      <a:r>
-                        <a:rPr sz="900" b="1">
-                          <a:solidFill>
-                            <a:srgbClr val="11181C"/>
-                          </a:solidFill>
-                          <a:latin typeface="Arial"/>
-                        </a:rPr>
-                        <a:t>Detail</a:t>
-                      </a:r>
-                      <a:endParaRPr sz="900"/>
-                    </a:p>
-                  </a:txBody>
-                  <a:tcPr marL="50800" marR="50800" marT="25400" marB="25400" anchor="ctr">
-                    <a:lnL w="9525">
-                      <a:solidFill>
-                        <a:srgbClr val="D7DBDF"/>
-                      </a:solidFill>
-                    </a:lnL>
-                    <a:lnR w="9525">
-                      <a:solidFill>
-                        <a:srgbClr val="D7DBDF"/>
-                      </a:solidFill>
-                    </a:lnR>
-                    <a:lnT w="9525">
-                      <a:solidFill>
-                        <a:srgbClr val="D7DBDF"/>
-                      </a:solidFill>
-                    </a:lnT>
-                    <a:lnB w="9525">
-                      <a:solidFill>
-                        <a:srgbClr val="D7DBDF"/>
-                      </a:solidFill>
-                    </a:lnB>
-                    <a:solidFill>
-                      <a:srgbClr val="F0F2F4"/>
-                    </a:solidFill>
-                  </a:tcPr>
-                </a:tc>
-              </a:tr>
-              <a:tr h="323850">
-                <a:tc rowSpan="6">
-                  <a:txBody>
-                    <a:bodyPr wrap="square"/>
-                    <a:lstStyle/>
-                    <a:p>
-                      <a:pPr algn="l">
-                        <a:defRPr sz="1100"/>
-                      </a:pPr>
-                      <a:r>
-                        <a:rPr sz="1100" b="1">
-                          <a:solidFill>
-                            <a:srgbClr val="076932"/>
-                          </a:solidFill>
-                          <a:latin typeface="Arial"/>
-                        </a:rPr>
-                        <a:t>Product</a:t>
-                      </a:r>
-                      <a:endParaRPr sz="1100"/>
-                    </a:p>
-                  </a:txBody>
-                  <a:tcPr marL="50800" marR="50800" marT="25400" marB="25400" anchor="ctr">
-                    <a:lnL w="9525">
-                      <a:solidFill>
-                        <a:srgbClr val="E6E8EB"/>
-                      </a:solidFill>
-                    </a:lnL>
-                    <a:lnR w="9525">
-                      <a:solidFill>
-                        <a:srgbClr val="E6E8EB"/>
-                      </a:solidFill>
-                    </a:lnR>
-                    <a:lnT w="9525">
-                      <a:solidFill>
-                        <a:srgbClr val="E6E8EB"/>
-                      </a:solidFill>
-                    </a:lnT>
-                    <a:lnB w="9525">
-                      <a:solidFill>
-                        <a:srgbClr val="E6E8EB"/>
-                      </a:solidFill>
-                    </a:lnB>
-                    <a:noFill/>
-                  </a:tcPr>
-                </a:tc>
-                <a:tc rowSpan="6">
-                  <a:txBody>
-                    <a:bodyPr wrap="square"/>
-                    <a:lstStyle/>
-                    <a:p>
-                      <a:pPr algn="l">
-                        <a:defRPr sz="1050"/>
-                      </a:pPr>
-                      <a:r>
-                        <a:rPr sz="1050" b="1">
-                          <a:solidFill>
-                            <a:srgbClr val="11181C"/>
-                          </a:solidFill>
-                          <a:latin typeface="Arial"/>
-                        </a:rPr>
-                        <a:t>Offer Ferrari models that beat the Top 1 on features</a:t>
-                      </a:r>
-                      <a:endParaRPr sz="1050"/>
-                    </a:p>
-                  </a:txBody>
-                  <a:tcPr marL="50800" marR="50800" marT="25400" marB="25400" anchor="ctr">
-                    <a:lnL w="9525">
-                      <a:solidFill>
-                        <a:srgbClr val="E6E8EB"/>
-                      </a:solidFill>
-                    </a:lnL>
-                    <a:lnR w="9525">
-                      <a:solidFill>
-                        <a:srgbClr val="E6E8EB"/>
-                      </a:solidFill>
-                    </a:lnR>
-                    <a:lnT w="9525">
-                      <a:solidFill>
-                        <a:srgbClr val="E6E8EB"/>
-                      </a:solidFill>
-                    </a:lnT>
-                    <a:lnB w="9525">
-                      <a:solidFill>
-                        <a:srgbClr val="E6E8EB"/>
-                      </a:solidFill>
-                    </a:lnB>
-                    <a:noFill/>
-                  </a:tcPr>
-                </a:tc>
-                <a:tc>
-                  <a:txBody>
-                    <a:bodyPr wrap="square"/>
-                    <a:lstStyle/>
-                    <a:p>
-                      <a:pPr algn="l">
-                        <a:defRPr sz="950"/>
-                      </a:pPr>
-                      <a:r>
-                        <a:rPr sz="950" b="1">
-                          <a:solidFill>
-                            <a:srgbClr val="11181C"/>
-                          </a:solidFill>
-                          <a:latin typeface="Arial"/>
-                        </a:rPr>
-                        <a:t>Red Power</a:t>
-                      </a:r>
-                      <a:endParaRPr sz="950"/>
                     </a:p>
                   </a:txBody>
                   <a:tcPr marL="50800" marR="50800" marT="25400" marB="25400" anchor="ctr">
@@ -5408,7 +4404,7 @@
                           </a:solidFill>
                           <a:latin typeface="Arial"/>
                         </a:rPr>
-                        <a:t>Articulated linkage that adds working range and versatility. Amco Veba and Palfinger have their own version; Sany Palfinger has none.</a:t>
+                        <a:t>Medium 25 – 45 tm: 196 units, Rp 156 M. Heavy &gt; 45 tm: 65 units, Rp 115 M.</a:t>
                       </a:r>
                       <a:endParaRPr sz="950"/>
                     </a:p>
@@ -5438,36 +4434,7 @@
                   </a:tcPr>
                 </a:tc>
               </a:tr>
-              <a:tr h="323850">
-                <a:tc vMerge="1">
-                  <a:txBody>
-                    <a:bodyPr/>
-                    <a:lstStyle/>
-                    <a:p/>
-                  </a:txBody>
-                  <a:tcPr>
-                    <a:lnL w="9525">
-                      <a:solidFill>
-                        <a:srgbClr val="E6E8EB"/>
-                      </a:solidFill>
-                    </a:lnL>
-                    <a:lnR w="9525">
-                      <a:solidFill>
-                        <a:srgbClr val="E6E8EB"/>
-                      </a:solidFill>
-                    </a:lnR>
-                    <a:lnT w="9525">
-                      <a:solidFill>
-                        <a:srgbClr val="E6E8EB"/>
-                      </a:solidFill>
-                    </a:lnT>
-                    <a:lnB w="9525">
-                      <a:solidFill>
-                        <a:srgbClr val="E6E8EB"/>
-                      </a:solidFill>
-                    </a:lnB>
-                  </a:tcPr>
-                </a:tc>
+              <a:tr h="423862">
                 <a:tc vMerge="1">
                   <a:txBody>
                     <a:bodyPr/>
@@ -5503,18 +4470,62 @@
                     <a:lstStyle/>
                     <a:p>
                       <a:pPr algn="l">
-                        <a:defRPr sz="950"/>
+                        <a:defRPr sz="1000"/>
                       </a:pPr>
                       <a:r>
-                        <a:rPr sz="950" b="1">
+                        <a:rPr sz="1000" b="1">
                           <a:solidFill>
                             <a:srgbClr val="11181C"/>
                           </a:solidFill>
                           <a:latin typeface="Arial"/>
                         </a:rPr>
-                        <a:t>SDV (Smooth Descent Valve)</a:t>
+                        <a:t>Targeting</a:t>
                       </a:r>
-                      <a:endParaRPr sz="950"/>
+                      <a:endParaRPr sz="1000"/>
+                    </a:p>
+                  </a:txBody>
+                  <a:tcPr marL="50800" marR="50800" marT="25400" marB="25400" anchor="ctr">
+                    <a:lnL w="9525">
+                      <a:solidFill>
+                        <a:srgbClr val="E6E8EB"/>
+                      </a:solidFill>
+                    </a:lnL>
+                    <a:lnR w="9525">
+                      <a:solidFill>
+                        <a:srgbClr val="E6E8EB"/>
+                      </a:solidFill>
+                    </a:lnR>
+                    <a:lnT w="9525">
+                      <a:solidFill>
+                        <a:srgbClr val="E6E8EB"/>
+                      </a:solidFill>
+                    </a:lnT>
+                    <a:lnB w="9525">
+                      <a:solidFill>
+                        <a:srgbClr val="E6E8EB"/>
+                      </a:solidFill>
+                    </a:lnB>
+                    <a:noFill/>
+                  </a:tcPr>
+                </a:tc>
+                <a:tc>
+                  <a:txBody>
+                    <a:bodyPr wrap="square"/>
+                    <a:lstStyle/>
+                    <a:p>
+                      <a:pPr algn="l">
+                        <a:defRPr sz="1000"/>
+                      </a:pPr>
+                      <a:r>
+                        <a:rPr sz="1000" b="1">
+                          <a:solidFill>
+                            <a:srgbClr val="11181C"/>
+                          </a:solidFill>
+                          <a:latin typeface="Arial"/>
+                        </a:rPr>
+                        <a:t>Take share from the Top 1 model in each tier</a:t>
+                      </a:r>
+                      <a:endParaRPr sz="1000"/>
                     </a:p>
                   </a:txBody>
                   <a:tcPr marL="50800" marR="50800" marT="25400" marB="25400" anchor="ctr">
@@ -5556,7 +4567,7 @@
                           </a:solidFill>
                           <a:latin typeface="Arial"/>
                         </a:rPr>
-                        <a:t>Cuts boom flex and dynamic load when lowering. Amco Veba and Sany Palfinger have no equal.</a:t>
+                        <a:t>Medium: Sany Palfinger SPK32080, SPK36080, SPK42502. Heavy: Palfinger PK 53002, PK 76002, PK 88002.</a:t>
                       </a:r>
                       <a:endParaRPr sz="950"/>
                     </a:p>
@@ -5586,36 +4597,7 @@
                   </a:tcPr>
                 </a:tc>
               </a:tr>
-              <a:tr h="323850">
-                <a:tc vMerge="1">
-                  <a:txBody>
-                    <a:bodyPr/>
-                    <a:lstStyle/>
-                    <a:p/>
-                  </a:txBody>
-                  <a:tcPr>
-                    <a:lnL w="9525">
-                      <a:solidFill>
-                        <a:srgbClr val="E6E8EB"/>
-                      </a:solidFill>
-                    </a:lnL>
-                    <a:lnR w="9525">
-                      <a:solidFill>
-                        <a:srgbClr val="E6E8EB"/>
-                      </a:solidFill>
-                    </a:lnR>
-                    <a:lnT w="9525">
-                      <a:solidFill>
-                        <a:srgbClr val="E6E8EB"/>
-                      </a:solidFill>
-                    </a:lnT>
-                    <a:lnB w="9525">
-                      <a:solidFill>
-                        <a:srgbClr val="E6E8EB"/>
-                      </a:solidFill>
-                    </a:lnB>
-                  </a:tcPr>
-                </a:tc>
+              <a:tr h="423862">
                 <a:tc vMerge="1">
                   <a:txBody>
                     <a:bodyPr/>
@@ -5651,18 +4633,62 @@
                     <a:lstStyle/>
                     <a:p>
                       <a:pPr algn="l">
-                        <a:defRPr sz="950"/>
+                        <a:defRPr sz="1000"/>
                       </a:pPr>
                       <a:r>
-                        <a:rPr sz="950" b="1">
+                        <a:rPr sz="1000" b="1">
                           <a:solidFill>
                             <a:srgbClr val="11181C"/>
                           </a:solidFill>
                           <a:latin typeface="Arial"/>
                         </a:rPr>
-                        <a:t>Magic Touch</a:t>
+                        <a:t>Positioning</a:t>
                       </a:r>
-                      <a:endParaRPr sz="950"/>
+                      <a:endParaRPr sz="1000"/>
+                    </a:p>
+                  </a:txBody>
+                  <a:tcPr marL="50800" marR="50800" marT="25400" marB="25400" anchor="ctr">
+                    <a:lnL w="9525">
+                      <a:solidFill>
+                        <a:srgbClr val="E6E8EB"/>
+                      </a:solidFill>
+                    </a:lnL>
+                    <a:lnR w="9525">
+                      <a:solidFill>
+                        <a:srgbClr val="E6E8EB"/>
+                      </a:solidFill>
+                    </a:lnR>
+                    <a:lnT w="9525">
+                      <a:solidFill>
+                        <a:srgbClr val="E6E8EB"/>
+                      </a:solidFill>
+                    </a:lnT>
+                    <a:lnB w="9525">
+                      <a:solidFill>
+                        <a:srgbClr val="E6E8EB"/>
+                      </a:solidFill>
+                    </a:lnB>
+                    <a:noFill/>
+                  </a:tcPr>
+                </a:tc>
+                <a:tc>
+                  <a:txBody>
+                    <a:bodyPr wrap="square"/>
+                    <a:lstStyle/>
+                    <a:p>
+                      <a:pPr algn="l">
+                        <a:defRPr sz="1000"/>
+                      </a:pPr>
+                      <a:r>
+                        <a:rPr sz="1000" b="1">
+                          <a:solidFill>
+                            <a:srgbClr val="11181C"/>
+                          </a:solidFill>
+                          <a:latin typeface="Arial"/>
+                        </a:rPr>
+                        <a:t>Two clear promises</a:t>
+                      </a:r>
+                      <a:endParaRPr sz="1000"/>
                     </a:p>
                   </a:txBody>
                   <a:tcPr marL="50800" marR="50800" marT="25400" marB="25400" anchor="ctr">
@@ -5704,7 +4730,7 @@
                           </a:solidFill>
                           <a:latin typeface="Arial"/>
                         </a:rPr>
-                        <a:t>Opens and stows the crane automatically from the cab. Sany Palfinger has no equal.</a:t>
+                        <a:t>XCMG: same capacity, lower price (SQZ365.4 −9% vs SPK36080). Ferrari: European features, cheaper where it wins (−23% at 25 – 30 tm, −32% at 45 – 50 tm) and faster delivery from China stock (~14 weeks).</a:t>
                       </a:r>
                       <a:endParaRPr sz="950"/>
                     </a:p>
@@ -5734,14 +4760,28 @@
                   </a:tcPr>
                 </a:tc>
               </a:tr>
-              <a:tr h="323850">
-                <a:tc vMerge="1">
+              <a:tr h="423862">
+                <a:tc rowSpan="4">
                   <a:txBody>
-                    <a:bodyPr/>
+                    <a:bodyPr wrap="square"/>
                     <a:lstStyle/>
-                    <a:p/>
+                    <a:p>
+                      <a:pPr algn="ctr">
+                        <a:defRPr sz="1200"/>
+                      </a:pPr>
+                      <a:r>
+                        <a:rPr sz="1200" b="1">
+                          <a:solidFill>
+                            <a:srgbClr val="076932"/>
+                          </a:solidFill>
+                          <a:latin typeface="Arial"/>
+                        </a:rPr>
+                        <a:t>4P</a:t>
+                      </a:r>
+                      <a:endParaRPr sz="1200"/>
+                    </a:p>
                   </a:txBody>
-                  <a:tcPr>
+                  <a:tcPr marL="50800" marR="50800" marT="25400" marB="25400" anchor="ctr">
                     <a:lnL w="9525">
                       <a:solidFill>
                         <a:srgbClr val="E6E8EB"/>
@@ -5762,35 +4802,7 @@
                         <a:srgbClr val="E6E8EB"/>
                       </a:solidFill>
                     </a:lnB>
-                  </a:tcPr>
-                </a:tc>
-                <a:tc vMerge="1">
-                  <a:txBody>
-                    <a:bodyPr/>
-                    <a:lstStyle/>
-                    <a:p/>
-                  </a:txBody>
-                  <a:tcPr>
-                    <a:lnL w="9525">
-                      <a:solidFill>
-                        <a:srgbClr val="E6E8EB"/>
-                      </a:solidFill>
-                    </a:lnL>
-                    <a:lnR w="9525">
-                      <a:solidFill>
-                        <a:srgbClr val="E6E8EB"/>
-                      </a:solidFill>
-                    </a:lnR>
-                    <a:lnT w="9525">
-                      <a:solidFill>
-                        <a:srgbClr val="E6E8EB"/>
-                      </a:solidFill>
-                    </a:lnT>
-                    <a:lnB w="9525">
-                      <a:solidFill>
-                        <a:srgbClr val="E6E8EB"/>
-                      </a:solidFill>
-                    </a:lnB>
+                    <a:noFill/>
                   </a:tcPr>
                 </a:tc>
                 <a:tc>
@@ -5799,18 +4811,62 @@
                     <a:lstStyle/>
                     <a:p>
                       <a:pPr algn="l">
-                        <a:defRPr sz="950"/>
+                        <a:defRPr sz="1000"/>
                       </a:pPr>
                       <a:r>
-                        <a:rPr sz="950" b="1">
+                        <a:rPr sz="1000" b="1">
                           <a:solidFill>
                             <a:srgbClr val="11181C"/>
                           </a:solidFill>
                           <a:latin typeface="Arial"/>
                         </a:rPr>
-                        <a:t>PB (Power Boost)*</a:t>
+                        <a:t>Product</a:t>
                       </a:r>
-                      <a:endParaRPr sz="950"/>
+                      <a:endParaRPr sz="1000"/>
+                    </a:p>
+                  </a:txBody>
+                  <a:tcPr marL="50800" marR="50800" marT="25400" marB="25400" anchor="ctr">
+                    <a:lnL w="9525">
+                      <a:solidFill>
+                        <a:srgbClr val="E6E8EB"/>
+                      </a:solidFill>
+                    </a:lnL>
+                    <a:lnR w="9525">
+                      <a:solidFill>
+                        <a:srgbClr val="E6E8EB"/>
+                      </a:solidFill>
+                    </a:lnR>
+                    <a:lnT w="9525">
+                      <a:solidFill>
+                        <a:srgbClr val="E6E8EB"/>
+                      </a:solidFill>
+                    </a:lnT>
+                    <a:lnB w="9525">
+                      <a:solidFill>
+                        <a:srgbClr val="E6E8EB"/>
+                      </a:solidFill>
+                    </a:lnB>
+                    <a:noFill/>
+                  </a:tcPr>
+                </a:tc>
+                <a:tc>
+                  <a:txBody>
+                    <a:bodyPr wrap="square"/>
+                    <a:lstStyle/>
+                    <a:p>
+                      <a:pPr algn="l">
+                        <a:defRPr sz="1000"/>
+                      </a:pPr>
+                      <a:r>
+                        <a:rPr sz="1000" b="1">
+                          <a:solidFill>
+                            <a:srgbClr val="11181C"/>
+                          </a:solidFill>
+                          <a:latin typeface="Arial"/>
+                        </a:rPr>
+                        <a:t>Offer Ferrari models that beat the Top 1 on features</a:t>
+                      </a:r>
+                      <a:endParaRPr sz="1000"/>
                     </a:p>
                   </a:txBody>
                   <a:tcPr marL="50800" marR="50800" marT="25400" marB="25400" anchor="ctr">
@@ -5852,7 +4908,7 @@
                           </a:solidFill>
                           <a:latin typeface="Arial"/>
                         </a:rPr>
-                        <a:t>Extra lifting capacity on demand. Equal to Palfinger HPLS and Amco Veba AVPS.</a:t>
+                        <a:t>Red Power (more working range), SDV (less boom flex), Magic Touch (auto open/stow): Sany Palfinger has none. PB, RS, ECM: equal to Palfinger.</a:t>
                       </a:r>
                       <a:endParaRPr sz="950"/>
                     </a:p>
@@ -5882,36 +4938,7 @@
                   </a:tcPr>
                 </a:tc>
               </a:tr>
-              <a:tr h="323850">
-                <a:tc vMerge="1">
-                  <a:txBody>
-                    <a:bodyPr/>
-                    <a:lstStyle/>
-                    <a:p/>
-                  </a:txBody>
-                  <a:tcPr>
-                    <a:lnL w="9525">
-                      <a:solidFill>
-                        <a:srgbClr val="E6E8EB"/>
-                      </a:solidFill>
-                    </a:lnL>
-                    <a:lnR w="9525">
-                      <a:solidFill>
-                        <a:srgbClr val="E6E8EB"/>
-                      </a:solidFill>
-                    </a:lnR>
-                    <a:lnT w="9525">
-                      <a:solidFill>
-                        <a:srgbClr val="E6E8EB"/>
-                      </a:solidFill>
-                    </a:lnT>
-                    <a:lnB w="9525">
-                      <a:solidFill>
-                        <a:srgbClr val="E6E8EB"/>
-                      </a:solidFill>
-                    </a:lnB>
-                  </a:tcPr>
-                </a:tc>
+              <a:tr h="423862">
                 <a:tc vMerge="1">
                   <a:txBody>
                     <a:bodyPr/>
@@ -5947,18 +4974,62 @@
                     <a:lstStyle/>
                     <a:p>
                       <a:pPr algn="l">
-                        <a:defRPr sz="950"/>
+                        <a:defRPr sz="1000"/>
                       </a:pPr>
                       <a:r>
-                        <a:rPr sz="950" b="1">
+                        <a:rPr sz="1000" b="1">
                           <a:solidFill>
                             <a:srgbClr val="11181C"/>
                           </a:solidFill>
                           <a:latin typeface="Arial"/>
                         </a:rPr>
-                        <a:t>RS*</a:t>
+                        <a:t>Price</a:t>
                       </a:r>
-                      <a:endParaRPr sz="950"/>
+                      <a:endParaRPr sz="1000"/>
+                    </a:p>
+                  </a:txBody>
+                  <a:tcPr marL="50800" marR="50800" marT="25400" marB="25400" anchor="ctr">
+                    <a:lnL w="9525">
+                      <a:solidFill>
+                        <a:srgbClr val="E6E8EB"/>
+                      </a:solidFill>
+                    </a:lnL>
+                    <a:lnR w="9525">
+                      <a:solidFill>
+                        <a:srgbClr val="E6E8EB"/>
+                      </a:solidFill>
+                    </a:lnR>
+                    <a:lnT w="9525">
+                      <a:solidFill>
+                        <a:srgbClr val="E6E8EB"/>
+                      </a:solidFill>
+                    </a:lnT>
+                    <a:lnB w="9525">
+                      <a:solidFill>
+                        <a:srgbClr val="E6E8EB"/>
+                      </a:solidFill>
+                    </a:lnB>
+                    <a:noFill/>
+                  </a:tcPr>
+                </a:tc>
+                <a:tc>
+                  <a:txBody>
+                    <a:bodyPr wrap="square"/>
+                    <a:lstStyle/>
+                    <a:p>
+                      <a:pPr algn="l">
+                        <a:defRPr sz="1000"/>
+                      </a:pPr>
+                      <a:r>
+                        <a:rPr sz="1000" b="1">
+                          <a:solidFill>
+                            <a:srgbClr val="11181C"/>
+                          </a:solidFill>
+                          <a:latin typeface="Arial"/>
+                        </a:rPr>
+                        <a:t>Negotiate a better price with Ferrari and XCMG</a:t>
+                      </a:r>
+                      <a:endParaRPr sz="1000"/>
                     </a:p>
                   </a:txBody>
                   <a:tcPr marL="50800" marR="50800" marT="25400" marB="25400" anchor="ctr">
@@ -6000,7 +5071,7 @@
                           </a:solidFill>
                           <a:latin typeface="Arial"/>
                         </a:rPr>
-                        <a:t>Faster boom extension. Equal to Palfinger High Speed Extension; Amco Veba has none.</a:t>
+                        <a:t>Ferrari: lower price on 746 A4 (+48%), 9601CR A8 (+85%), 990R (+79%). XCMG: Triatra special price on SQZ325.4 and SQZ365.4.</a:t>
                       </a:r>
                       <a:endParaRPr sz="950"/>
                     </a:p>
@@ -6030,36 +5101,7 @@
                   </a:tcPr>
                 </a:tc>
               </a:tr>
-              <a:tr h="323850">
-                <a:tc vMerge="1">
-                  <a:txBody>
-                    <a:bodyPr/>
-                    <a:lstStyle/>
-                    <a:p/>
-                  </a:txBody>
-                  <a:tcPr>
-                    <a:lnL w="9525">
-                      <a:solidFill>
-                        <a:srgbClr val="E6E8EB"/>
-                      </a:solidFill>
-                    </a:lnL>
-                    <a:lnR w="9525">
-                      <a:solidFill>
-                        <a:srgbClr val="E6E8EB"/>
-                      </a:solidFill>
-                    </a:lnR>
-                    <a:lnT w="9525">
-                      <a:solidFill>
-                        <a:srgbClr val="E6E8EB"/>
-                      </a:solidFill>
-                    </a:lnT>
-                    <a:lnB w="9525">
-                      <a:solidFill>
-                        <a:srgbClr val="E6E8EB"/>
-                      </a:solidFill>
-                    </a:lnB>
-                  </a:tcPr>
-                </a:tc>
+              <a:tr h="423862">
                 <a:tc vMerge="1">
                   <a:txBody>
                     <a:bodyPr/>
@@ -6095,18 +5137,62 @@
                     <a:lstStyle/>
                     <a:p>
                       <a:pPr algn="l">
-                        <a:defRPr sz="950"/>
+                        <a:defRPr sz="1000"/>
                       </a:pPr>
                       <a:r>
-                        <a:rPr sz="950" b="1">
+                        <a:rPr sz="1000" b="1">
                           <a:solidFill>
                             <a:srgbClr val="11181C"/>
                           </a:solidFill>
                           <a:latin typeface="Arial"/>
                         </a:rPr>
-                        <a:t>ECM*</a:t>
+                        <a:t>Place</a:t>
                       </a:r>
-                      <a:endParaRPr sz="950"/>
+                      <a:endParaRPr sz="1000"/>
+                    </a:p>
+                  </a:txBody>
+                  <a:tcPr marL="50800" marR="50800" marT="25400" marB="25400" anchor="ctr">
+                    <a:lnL w="9525">
+                      <a:solidFill>
+                        <a:srgbClr val="E6E8EB"/>
+                      </a:solidFill>
+                    </a:lnL>
+                    <a:lnR w="9525">
+                      <a:solidFill>
+                        <a:srgbClr val="E6E8EB"/>
+                      </a:solidFill>
+                    </a:lnR>
+                    <a:lnT w="9525">
+                      <a:solidFill>
+                        <a:srgbClr val="E6E8EB"/>
+                      </a:solidFill>
+                    </a:lnT>
+                    <a:lnB w="9525">
+                      <a:solidFill>
+                        <a:srgbClr val="E6E8EB"/>
+                      </a:solidFill>
+                    </a:lnB>
+                    <a:noFill/>
+                  </a:tcPr>
+                </a:tc>
+                <a:tc>
+                  <a:txBody>
+                    <a:bodyPr wrap="square"/>
+                    <a:lstStyle/>
+                    <a:p>
+                      <a:pPr algn="l">
+                        <a:defRPr sz="1000"/>
+                      </a:pPr>
+                      <a:r>
+                        <a:rPr sz="1000" b="1">
+                          <a:solidFill>
+                            <a:srgbClr val="11181C"/>
+                          </a:solidFill>
+                          <a:latin typeface="Arial"/>
+                        </a:rPr>
+                        <a:t>Negotiate stock to cut lead time</a:t>
+                      </a:r>
+                      <a:endParaRPr sz="1000"/>
                     </a:p>
                   </a:txBody>
                   <a:tcPr marL="50800" marR="50800" marT="25400" marB="25400" anchor="ctr">
@@ -6148,7 +5234,7 @@
                           </a:solidFill>
                           <a:latin typeface="Arial"/>
                         </a:rPr>
-                        <a:t>Electronic control and overload protection. Equal to Palfinger PALTRONIC and Amco Veba EBB.</a:t>
+                        <a:t>Ferrari stocks 268 A4 and FBR450R A4 in China (14-week lead time) and main components in Malaysia. XCMG via GM Tractors.</a:t>
                       </a:r>
                       <a:endParaRPr sz="950"/>
                     </a:p>
@@ -6178,69 +5264,54 @@
                   </a:tcPr>
                 </a:tc>
               </a:tr>
-              <a:tr h="323850">
-                <a:tc rowSpan="2">
+              <a:tr h="423862">
+                <a:tc vMerge="1">
+                  <a:txBody>
+                    <a:bodyPr/>
+                    <a:lstStyle/>
+                    <a:p/>
+                  </a:txBody>
+                  <a:tcPr>
+                    <a:lnL w="9525">
+                      <a:solidFill>
+                        <a:srgbClr val="E6E8EB"/>
+                      </a:solidFill>
+                    </a:lnL>
+                    <a:lnR w="9525">
+                      <a:solidFill>
+                        <a:srgbClr val="E6E8EB"/>
+                      </a:solidFill>
+                    </a:lnR>
+                    <a:lnT w="9525">
+                      <a:solidFill>
+                        <a:srgbClr val="E6E8EB"/>
+                      </a:solidFill>
+                    </a:lnT>
+                    <a:lnB w="9525">
+                      <a:solidFill>
+                        <a:srgbClr val="E6E8EB"/>
+                      </a:solidFill>
+                    </a:lnB>
+                  </a:tcPr>
+                </a:tc>
+                <a:tc>
                   <a:txBody>
                     <a:bodyPr wrap="square"/>
                     <a:lstStyle/>
                     <a:p>
                       <a:pPr algn="l">
-                        <a:defRPr sz="1100"/>
+                        <a:defRPr sz="1000"/>
                       </a:pPr>
                       <a:r>
-                        <a:rPr sz="1100" b="1">
-                          <a:solidFill>
-                            <a:srgbClr val="076932"/>
-                          </a:solidFill>
-                          <a:latin typeface="Arial"/>
-                        </a:rPr>
-                        <a:t>Price</a:t>
-                      </a:r>
-                      <a:endParaRPr sz="1100"/>
-                    </a:p>
-                  </a:txBody>
-                  <a:tcPr marL="50800" marR="50800" marT="25400" marB="25400" anchor="ctr">
-                    <a:lnL w="9525">
-                      <a:solidFill>
-                        <a:srgbClr val="E6E8EB"/>
-                      </a:solidFill>
-                    </a:lnL>
-                    <a:lnR w="9525">
-                      <a:solidFill>
-                        <a:srgbClr val="E6E8EB"/>
-                      </a:solidFill>
-                    </a:lnR>
-                    <a:lnT w="9525">
-                      <a:solidFill>
-                        <a:srgbClr val="E6E8EB"/>
-                      </a:solidFill>
-                    </a:lnT>
-                    <a:lnB w="9525">
-                      <a:solidFill>
-                        <a:srgbClr val="E6E8EB"/>
-                      </a:solidFill>
-                    </a:lnB>
-                    <a:noFill/>
-                  </a:tcPr>
-                </a:tc>
-                <a:tc rowSpan="2">
-                  <a:txBody>
-                    <a:bodyPr wrap="square"/>
-                    <a:lstStyle/>
-                    <a:p>
-                      <a:pPr algn="l">
-                        <a:defRPr sz="1050"/>
-                      </a:pPr>
-                      <a:r>
-                        <a:rPr sz="1050" b="1">
+                        <a:rPr sz="1000" b="1">
                           <a:solidFill>
                             <a:srgbClr val="11181C"/>
                           </a:solidFill>
                           <a:latin typeface="Arial"/>
                         </a:rPr>
-                        <a:t>Negotiate a better price with F.lli Ferrari and XCMG</a:t>
+                        <a:t>Promotion</a:t>
                       </a:r>
-                      <a:endParaRPr sz="1050"/>
+                      <a:endParaRPr sz="1000"/>
                     </a:p>
                   </a:txBody>
                   <a:tcPr marL="50800" marR="50800" marT="25400" marB="25400" anchor="ctr">
@@ -6273,18 +5344,18 @@
                     <a:lstStyle/>
                     <a:p>
                       <a:pPr algn="l">
-                        <a:defRPr sz="950"/>
+                        <a:defRPr sz="1000"/>
                       </a:pPr>
                       <a:r>
-                        <a:rPr sz="950" b="1">
+                        <a:rPr sz="1000" b="1">
                           <a:solidFill>
                             <a:srgbClr val="11181C"/>
                           </a:solidFill>
                           <a:latin typeface="Arial"/>
                         </a:rPr>
-                        <a:t>Ferrari 746 A4 · 9601CR A8 · 990R</a:t>
+                        <a:t>Sell a ready-to-work package</a:t>
                       </a:r>
-                      <a:endParaRPr sz="950"/>
+                      <a:endParaRPr sz="1000"/>
                     </a:p>
                   </a:txBody>
                   <a:tcPr marL="50800" marR="50800" marT="25400" marB="25400" anchor="ctr">
@@ -6326,955 +5397,7 @@
                           </a:solidFill>
                           <a:latin typeface="Arial"/>
                         </a:rPr>
-                        <a:t>Ask for a lower price: 40–45 tm (+48%), 50–55 tm (+85%), 70–75 tm (+79%) vs the Top 1.</a:t>
-                      </a:r>
-                      <a:endParaRPr sz="950"/>
-                    </a:p>
-                  </a:txBody>
-                  <a:tcPr marL="50800" marR="50800" marT="25400" marB="25400" anchor="ctr">
-                    <a:lnL w="9525">
-                      <a:solidFill>
-                        <a:srgbClr val="E6E8EB"/>
-                      </a:solidFill>
-                    </a:lnL>
-                    <a:lnR w="9525">
-                      <a:solidFill>
-                        <a:srgbClr val="E6E8EB"/>
-                      </a:solidFill>
-                    </a:lnR>
-                    <a:lnT w="9525">
-                      <a:solidFill>
-                        <a:srgbClr val="E6E8EB"/>
-                      </a:solidFill>
-                    </a:lnT>
-                    <a:lnB w="9525">
-                      <a:solidFill>
-                        <a:srgbClr val="E6E8EB"/>
-                      </a:solidFill>
-                    </a:lnB>
-                    <a:noFill/>
-                  </a:tcPr>
-                </a:tc>
-              </a:tr>
-              <a:tr h="323850">
-                <a:tc vMerge="1">
-                  <a:txBody>
-                    <a:bodyPr/>
-                    <a:lstStyle/>
-                    <a:p/>
-                  </a:txBody>
-                  <a:tcPr>
-                    <a:lnL w="9525">
-                      <a:solidFill>
-                        <a:srgbClr val="E6E8EB"/>
-                      </a:solidFill>
-                    </a:lnL>
-                    <a:lnR w="9525">
-                      <a:solidFill>
-                        <a:srgbClr val="E6E8EB"/>
-                      </a:solidFill>
-                    </a:lnR>
-                    <a:lnT w="9525">
-                      <a:solidFill>
-                        <a:srgbClr val="E6E8EB"/>
-                      </a:solidFill>
-                    </a:lnT>
-                    <a:lnB w="9525">
-                      <a:solidFill>
-                        <a:srgbClr val="E6E8EB"/>
-                      </a:solidFill>
-                    </a:lnB>
-                  </a:tcPr>
-                </a:tc>
-                <a:tc vMerge="1">
-                  <a:txBody>
-                    <a:bodyPr/>
-                    <a:lstStyle/>
-                    <a:p/>
-                  </a:txBody>
-                  <a:tcPr>
-                    <a:lnL w="9525">
-                      <a:solidFill>
-                        <a:srgbClr val="E6E8EB"/>
-                      </a:solidFill>
-                    </a:lnL>
-                    <a:lnR w="9525">
-                      <a:solidFill>
-                        <a:srgbClr val="E6E8EB"/>
-                      </a:solidFill>
-                    </a:lnR>
-                    <a:lnT w="9525">
-                      <a:solidFill>
-                        <a:srgbClr val="E6E8EB"/>
-                      </a:solidFill>
-                    </a:lnT>
-                    <a:lnB w="9525">
-                      <a:solidFill>
-                        <a:srgbClr val="E6E8EB"/>
-                      </a:solidFill>
-                    </a:lnB>
-                  </a:tcPr>
-                </a:tc>
-                <a:tc>
-                  <a:txBody>
-                    <a:bodyPr wrap="square"/>
-                    <a:lstStyle/>
-                    <a:p>
-                      <a:pPr algn="l">
-                        <a:defRPr sz="950"/>
-                      </a:pPr>
-                      <a:r>
-                        <a:rPr sz="950" b="1">
-                          <a:solidFill>
-                            <a:srgbClr val="11181C"/>
-                          </a:solidFill>
-                          <a:latin typeface="Arial"/>
-                        </a:rPr>
-                        <a:t>XCMG SQZ325.4 · SQZ365.4</a:t>
-                      </a:r>
-                      <a:endParaRPr sz="950"/>
-                    </a:p>
-                  </a:txBody>
-                  <a:tcPr marL="50800" marR="50800" marT="25400" marB="25400" anchor="ctr">
-                    <a:lnL w="9525">
-                      <a:solidFill>
-                        <a:srgbClr val="E6E8EB"/>
-                      </a:solidFill>
-                    </a:lnL>
-                    <a:lnR w="9525">
-                      <a:solidFill>
-                        <a:srgbClr val="E6E8EB"/>
-                      </a:solidFill>
-                    </a:lnR>
-                    <a:lnT w="9525">
-                      <a:solidFill>
-                        <a:srgbClr val="E6E8EB"/>
-                      </a:solidFill>
-                    </a:lnT>
-                    <a:lnB w="9525">
-                      <a:solidFill>
-                        <a:srgbClr val="E6E8EB"/>
-                      </a:solidFill>
-                    </a:lnB>
-                    <a:noFill/>
-                  </a:tcPr>
-                </a:tc>
-                <a:tc>
-                  <a:txBody>
-                    <a:bodyPr wrap="square"/>
-                    <a:lstStyle/>
-                    <a:p>
-                      <a:pPr algn="l">
-                        <a:defRPr sz="950"/>
-                      </a:pPr>
-                      <a:r>
-                        <a:rPr sz="950" b="0">
-                          <a:solidFill>
-                            <a:srgbClr val="11181C"/>
-                          </a:solidFill>
-                          <a:latin typeface="Arial"/>
-                        </a:rPr>
-                        <a:t>Ask for a Triatra special price: 30–35 tm (+4%), 35–40 tm (−9%).</a:t>
-                      </a:r>
-                      <a:endParaRPr sz="950"/>
-                    </a:p>
-                  </a:txBody>
-                  <a:tcPr marL="50800" marR="50800" marT="25400" marB="25400" anchor="ctr">
-                    <a:lnL w="9525">
-                      <a:solidFill>
-                        <a:srgbClr val="E6E8EB"/>
-                      </a:solidFill>
-                    </a:lnL>
-                    <a:lnR w="9525">
-                      <a:solidFill>
-                        <a:srgbClr val="E6E8EB"/>
-                      </a:solidFill>
-                    </a:lnR>
-                    <a:lnT w="9525">
-                      <a:solidFill>
-                        <a:srgbClr val="E6E8EB"/>
-                      </a:solidFill>
-                    </a:lnT>
-                    <a:lnB w="9525">
-                      <a:solidFill>
-                        <a:srgbClr val="E6E8EB"/>
-                      </a:solidFill>
-                    </a:lnB>
-                    <a:noFill/>
-                  </a:tcPr>
-                </a:tc>
-              </a:tr>
-              <a:tr h="323850">
-                <a:tc rowSpan="3">
-                  <a:txBody>
-                    <a:bodyPr wrap="square"/>
-                    <a:lstStyle/>
-                    <a:p>
-                      <a:pPr algn="l">
-                        <a:defRPr sz="1100"/>
-                      </a:pPr>
-                      <a:r>
-                        <a:rPr sz="1100" b="1">
-                          <a:solidFill>
-                            <a:srgbClr val="076932"/>
-                          </a:solidFill>
-                          <a:latin typeface="Arial"/>
-                        </a:rPr>
-                        <a:t>Place</a:t>
-                      </a:r>
-                      <a:endParaRPr sz="1100"/>
-                    </a:p>
-                  </a:txBody>
-                  <a:tcPr marL="50800" marR="50800" marT="25400" marB="25400" anchor="ctr">
-                    <a:lnL w="9525">
-                      <a:solidFill>
-                        <a:srgbClr val="E6E8EB"/>
-                      </a:solidFill>
-                    </a:lnL>
-                    <a:lnR w="9525">
-                      <a:solidFill>
-                        <a:srgbClr val="E6E8EB"/>
-                      </a:solidFill>
-                    </a:lnR>
-                    <a:lnT w="9525">
-                      <a:solidFill>
-                        <a:srgbClr val="E6E8EB"/>
-                      </a:solidFill>
-                    </a:lnT>
-                    <a:lnB w="9525">
-                      <a:solidFill>
-                        <a:srgbClr val="E6E8EB"/>
-                      </a:solidFill>
-                    </a:lnB>
-                    <a:noFill/>
-                  </a:tcPr>
-                </a:tc>
-                <a:tc rowSpan="3">
-                  <a:txBody>
-                    <a:bodyPr wrap="square"/>
-                    <a:lstStyle/>
-                    <a:p>
-                      <a:pPr algn="l">
-                        <a:defRPr sz="1050"/>
-                      </a:pPr>
-                      <a:r>
-                        <a:rPr sz="1050" b="1">
-                          <a:solidFill>
-                            <a:srgbClr val="11181C"/>
-                          </a:solidFill>
-                          <a:latin typeface="Arial"/>
-                        </a:rPr>
-                        <a:t>Negotiate stock to cut lead time</a:t>
-                      </a:r>
-                      <a:endParaRPr sz="1050"/>
-                    </a:p>
-                  </a:txBody>
-                  <a:tcPr marL="50800" marR="50800" marT="25400" marB="25400" anchor="ctr">
-                    <a:lnL w="9525">
-                      <a:solidFill>
-                        <a:srgbClr val="E6E8EB"/>
-                      </a:solidFill>
-                    </a:lnL>
-                    <a:lnR w="9525">
-                      <a:solidFill>
-                        <a:srgbClr val="E6E8EB"/>
-                      </a:solidFill>
-                    </a:lnR>
-                    <a:lnT w="9525">
-                      <a:solidFill>
-                        <a:srgbClr val="E6E8EB"/>
-                      </a:solidFill>
-                    </a:lnT>
-                    <a:lnB w="9525">
-                      <a:solidFill>
-                        <a:srgbClr val="E6E8EB"/>
-                      </a:solidFill>
-                    </a:lnB>
-                    <a:noFill/>
-                  </a:tcPr>
-                </a:tc>
-                <a:tc>
-                  <a:txBody>
-                    <a:bodyPr wrap="square"/>
-                    <a:lstStyle/>
-                    <a:p>
-                      <a:pPr algn="l">
-                        <a:defRPr sz="950"/>
-                      </a:pPr>
-                      <a:r>
-                        <a:rPr sz="950" b="1">
-                          <a:solidFill>
-                            <a:srgbClr val="11181C"/>
-                          </a:solidFill>
-                          <a:latin typeface="Arial"/>
-                        </a:rPr>
-                        <a:t>Ferrari 268 A4 · FBR450R A4</a:t>
-                      </a:r>
-                      <a:endParaRPr sz="950"/>
-                    </a:p>
-                  </a:txBody>
-                  <a:tcPr marL="50800" marR="50800" marT="25400" marB="25400" anchor="ctr">
-                    <a:lnL w="9525">
-                      <a:solidFill>
-                        <a:srgbClr val="E6E8EB"/>
-                      </a:solidFill>
-                    </a:lnL>
-                    <a:lnR w="9525">
-                      <a:solidFill>
-                        <a:srgbClr val="E6E8EB"/>
-                      </a:solidFill>
-                    </a:lnR>
-                    <a:lnT w="9525">
-                      <a:solidFill>
-                        <a:srgbClr val="E6E8EB"/>
-                      </a:solidFill>
-                    </a:lnT>
-                    <a:lnB w="9525">
-                      <a:solidFill>
-                        <a:srgbClr val="E6E8EB"/>
-                      </a:solidFill>
-                    </a:lnB>
-                    <a:noFill/>
-                  </a:tcPr>
-                </a:tc>
-                <a:tc>
-                  <a:txBody>
-                    <a:bodyPr wrap="square"/>
-                    <a:lstStyle/>
-                    <a:p>
-                      <a:pPr algn="l">
-                        <a:defRPr sz="950"/>
-                      </a:pPr>
-                      <a:r>
-                        <a:rPr sz="950" b="0">
-                          <a:solidFill>
-                            <a:srgbClr val="11181C"/>
-                          </a:solidFill>
-                          <a:latin typeface="Arial"/>
-                        </a:rPr>
-                        <a:t>Stock at the Ferrari China factory for a 14-week lead time (25–30 tm −23%, 45–50 tm −32%).</a:t>
-                      </a:r>
-                      <a:endParaRPr sz="950"/>
-                    </a:p>
-                  </a:txBody>
-                  <a:tcPr marL="50800" marR="50800" marT="25400" marB="25400" anchor="ctr">
-                    <a:lnL w="9525">
-                      <a:solidFill>
-                        <a:srgbClr val="E6E8EB"/>
-                      </a:solidFill>
-                    </a:lnL>
-                    <a:lnR w="9525">
-                      <a:solidFill>
-                        <a:srgbClr val="E6E8EB"/>
-                      </a:solidFill>
-                    </a:lnR>
-                    <a:lnT w="9525">
-                      <a:solidFill>
-                        <a:srgbClr val="E6E8EB"/>
-                      </a:solidFill>
-                    </a:lnT>
-                    <a:lnB w="9525">
-                      <a:solidFill>
-                        <a:srgbClr val="E6E8EB"/>
-                      </a:solidFill>
-                    </a:lnB>
-                    <a:noFill/>
-                  </a:tcPr>
-                </a:tc>
-              </a:tr>
-              <a:tr h="323850">
-                <a:tc vMerge="1">
-                  <a:txBody>
-                    <a:bodyPr/>
-                    <a:lstStyle/>
-                    <a:p/>
-                  </a:txBody>
-                  <a:tcPr>
-                    <a:lnL w="9525">
-                      <a:solidFill>
-                        <a:srgbClr val="E6E8EB"/>
-                      </a:solidFill>
-                    </a:lnL>
-                    <a:lnR w="9525">
-                      <a:solidFill>
-                        <a:srgbClr val="E6E8EB"/>
-                      </a:solidFill>
-                    </a:lnR>
-                    <a:lnT w="9525">
-                      <a:solidFill>
-                        <a:srgbClr val="E6E8EB"/>
-                      </a:solidFill>
-                    </a:lnT>
-                    <a:lnB w="9525">
-                      <a:solidFill>
-                        <a:srgbClr val="E6E8EB"/>
-                      </a:solidFill>
-                    </a:lnB>
-                  </a:tcPr>
-                </a:tc>
-                <a:tc vMerge="1">
-                  <a:txBody>
-                    <a:bodyPr/>
-                    <a:lstStyle/>
-                    <a:p/>
-                  </a:txBody>
-                  <a:tcPr>
-                    <a:lnL w="9525">
-                      <a:solidFill>
-                        <a:srgbClr val="E6E8EB"/>
-                      </a:solidFill>
-                    </a:lnL>
-                    <a:lnR w="9525">
-                      <a:solidFill>
-                        <a:srgbClr val="E6E8EB"/>
-                      </a:solidFill>
-                    </a:lnR>
-                    <a:lnT w="9525">
-                      <a:solidFill>
-                        <a:srgbClr val="E6E8EB"/>
-                      </a:solidFill>
-                    </a:lnT>
-                    <a:lnB w="9525">
-                      <a:solidFill>
-                        <a:srgbClr val="E6E8EB"/>
-                      </a:solidFill>
-                    </a:lnB>
-                  </a:tcPr>
-                </a:tc>
-                <a:tc>
-                  <a:txBody>
-                    <a:bodyPr wrap="square"/>
-                    <a:lstStyle/>
-                    <a:p>
-                      <a:pPr algn="l">
-                        <a:defRPr sz="950"/>
-                      </a:pPr>
-                      <a:r>
-                        <a:rPr sz="950" b="1">
-                          <a:solidFill>
-                            <a:srgbClr val="11181C"/>
-                          </a:solidFill>
-                          <a:latin typeface="Arial"/>
-                        </a:rPr>
-                        <a:t>Ferrari main components</a:t>
-                      </a:r>
-                      <a:endParaRPr sz="950"/>
-                    </a:p>
-                  </a:txBody>
-                  <a:tcPr marL="50800" marR="50800" marT="25400" marB="25400" anchor="ctr">
-                    <a:lnL w="9525">
-                      <a:solidFill>
-                        <a:srgbClr val="E6E8EB"/>
-                      </a:solidFill>
-                    </a:lnL>
-                    <a:lnR w="9525">
-                      <a:solidFill>
-                        <a:srgbClr val="E6E8EB"/>
-                      </a:solidFill>
-                    </a:lnR>
-                    <a:lnT w="9525">
-                      <a:solidFill>
-                        <a:srgbClr val="E6E8EB"/>
-                      </a:solidFill>
-                    </a:lnT>
-                    <a:lnB w="9525">
-                      <a:solidFill>
-                        <a:srgbClr val="E6E8EB"/>
-                      </a:solidFill>
-                    </a:lnB>
-                    <a:noFill/>
-                  </a:tcPr>
-                </a:tc>
-                <a:tc>
-                  <a:txBody>
-                    <a:bodyPr wrap="square"/>
-                    <a:lstStyle/>
-                    <a:p>
-                      <a:pPr algn="l">
-                        <a:defRPr sz="950"/>
-                      </a:pPr>
-                      <a:r>
-                        <a:rPr sz="950" b="0">
-                          <a:solidFill>
-                            <a:srgbClr val="11181C"/>
-                          </a:solidFill>
-                          <a:latin typeface="Arial"/>
-                        </a:rPr>
-                        <a:t>Stock main components and spare parts in Malaysia.</a:t>
-                      </a:r>
-                      <a:endParaRPr sz="950"/>
-                    </a:p>
-                  </a:txBody>
-                  <a:tcPr marL="50800" marR="50800" marT="25400" marB="25400" anchor="ctr">
-                    <a:lnL w="9525">
-                      <a:solidFill>
-                        <a:srgbClr val="E6E8EB"/>
-                      </a:solidFill>
-                    </a:lnL>
-                    <a:lnR w="9525">
-                      <a:solidFill>
-                        <a:srgbClr val="E6E8EB"/>
-                      </a:solidFill>
-                    </a:lnR>
-                    <a:lnT w="9525">
-                      <a:solidFill>
-                        <a:srgbClr val="E6E8EB"/>
-                      </a:solidFill>
-                    </a:lnT>
-                    <a:lnB w="9525">
-                      <a:solidFill>
-                        <a:srgbClr val="E6E8EB"/>
-                      </a:solidFill>
-                    </a:lnB>
-                    <a:noFill/>
-                  </a:tcPr>
-                </a:tc>
-              </a:tr>
-              <a:tr h="323850">
-                <a:tc vMerge="1">
-                  <a:txBody>
-                    <a:bodyPr/>
-                    <a:lstStyle/>
-                    <a:p/>
-                  </a:txBody>
-                  <a:tcPr>
-                    <a:lnL w="9525">
-                      <a:solidFill>
-                        <a:srgbClr val="E6E8EB"/>
-                      </a:solidFill>
-                    </a:lnL>
-                    <a:lnR w="9525">
-                      <a:solidFill>
-                        <a:srgbClr val="E6E8EB"/>
-                      </a:solidFill>
-                    </a:lnR>
-                    <a:lnT w="9525">
-                      <a:solidFill>
-                        <a:srgbClr val="E6E8EB"/>
-                      </a:solidFill>
-                    </a:lnT>
-                    <a:lnB w="9525">
-                      <a:solidFill>
-                        <a:srgbClr val="E6E8EB"/>
-                      </a:solidFill>
-                    </a:lnB>
-                  </a:tcPr>
-                </a:tc>
-                <a:tc vMerge="1">
-                  <a:txBody>
-                    <a:bodyPr/>
-                    <a:lstStyle/>
-                    <a:p/>
-                  </a:txBody>
-                  <a:tcPr>
-                    <a:lnL w="9525">
-                      <a:solidFill>
-                        <a:srgbClr val="E6E8EB"/>
-                      </a:solidFill>
-                    </a:lnL>
-                    <a:lnR w="9525">
-                      <a:solidFill>
-                        <a:srgbClr val="E6E8EB"/>
-                      </a:solidFill>
-                    </a:lnR>
-                    <a:lnT w="9525">
-                      <a:solidFill>
-                        <a:srgbClr val="E6E8EB"/>
-                      </a:solidFill>
-                    </a:lnT>
-                    <a:lnB w="9525">
-                      <a:solidFill>
-                        <a:srgbClr val="E6E8EB"/>
-                      </a:solidFill>
-                    </a:lnB>
-                  </a:tcPr>
-                </a:tc>
-                <a:tc>
-                  <a:txBody>
-                    <a:bodyPr wrap="square"/>
-                    <a:lstStyle/>
-                    <a:p>
-                      <a:pPr algn="l">
-                        <a:defRPr sz="950"/>
-                      </a:pPr>
-                      <a:r>
-                        <a:rPr sz="950" b="1">
-                          <a:solidFill>
-                            <a:srgbClr val="11181C"/>
-                          </a:solidFill>
-                          <a:latin typeface="Arial"/>
-                        </a:rPr>
-                        <a:t>XCMG</a:t>
-                      </a:r>
-                      <a:endParaRPr sz="950"/>
-                    </a:p>
-                  </a:txBody>
-                  <a:tcPr marL="50800" marR="50800" marT="25400" marB="25400" anchor="ctr">
-                    <a:lnL w="9525">
-                      <a:solidFill>
-                        <a:srgbClr val="E6E8EB"/>
-                      </a:solidFill>
-                    </a:lnL>
-                    <a:lnR w="9525">
-                      <a:solidFill>
-                        <a:srgbClr val="E6E8EB"/>
-                      </a:solidFill>
-                    </a:lnR>
-                    <a:lnT w="9525">
-                      <a:solidFill>
-                        <a:srgbClr val="E6E8EB"/>
-                      </a:solidFill>
-                    </a:lnT>
-                    <a:lnB w="9525">
-                      <a:solidFill>
-                        <a:srgbClr val="E6E8EB"/>
-                      </a:solidFill>
-                    </a:lnB>
-                    <a:noFill/>
-                  </a:tcPr>
-                </a:tc>
-                <a:tc>
-                  <a:txBody>
-                    <a:bodyPr wrap="square"/>
-                    <a:lstStyle/>
-                    <a:p>
-                      <a:pPr algn="l">
-                        <a:defRPr sz="950"/>
-                      </a:pPr>
-                      <a:r>
-                        <a:rPr sz="950" b="0">
-                          <a:solidFill>
-                            <a:srgbClr val="11181C"/>
-                          </a:solidFill>
-                          <a:latin typeface="Arial"/>
-                        </a:rPr>
-                        <a:t>Agree supply terms with its official distributor, GM Tractors.</a:t>
-                      </a:r>
-                      <a:endParaRPr sz="950"/>
-                    </a:p>
-                  </a:txBody>
-                  <a:tcPr marL="50800" marR="50800" marT="25400" marB="25400" anchor="ctr">
-                    <a:lnL w="9525">
-                      <a:solidFill>
-                        <a:srgbClr val="E6E8EB"/>
-                      </a:solidFill>
-                    </a:lnL>
-                    <a:lnR w="9525">
-                      <a:solidFill>
-                        <a:srgbClr val="E6E8EB"/>
-                      </a:solidFill>
-                    </a:lnR>
-                    <a:lnT w="9525">
-                      <a:solidFill>
-                        <a:srgbClr val="E6E8EB"/>
-                      </a:solidFill>
-                    </a:lnT>
-                    <a:lnB w="9525">
-                      <a:solidFill>
-                        <a:srgbClr val="E6E8EB"/>
-                      </a:solidFill>
-                    </a:lnB>
-                    <a:noFill/>
-                  </a:tcPr>
-                </a:tc>
-              </a:tr>
-              <a:tr h="323850">
-                <a:tc rowSpan="2">
-                  <a:txBody>
-                    <a:bodyPr wrap="square"/>
-                    <a:lstStyle/>
-                    <a:p>
-                      <a:pPr algn="l">
-                        <a:defRPr sz="1100"/>
-                      </a:pPr>
-                      <a:r>
-                        <a:rPr sz="1100" b="1">
-                          <a:solidFill>
-                            <a:srgbClr val="076932"/>
-                          </a:solidFill>
-                          <a:latin typeface="Arial"/>
-                        </a:rPr>
-                        <a:t>Promotion</a:t>
-                      </a:r>
-                      <a:endParaRPr sz="1100"/>
-                    </a:p>
-                  </a:txBody>
-                  <a:tcPr marL="50800" marR="50800" marT="25400" marB="25400" anchor="ctr">
-                    <a:lnL w="9525">
-                      <a:solidFill>
-                        <a:srgbClr val="E6E8EB"/>
-                      </a:solidFill>
-                    </a:lnL>
-                    <a:lnR w="9525">
-                      <a:solidFill>
-                        <a:srgbClr val="E6E8EB"/>
-                      </a:solidFill>
-                    </a:lnR>
-                    <a:lnT w="9525">
-                      <a:solidFill>
-                        <a:srgbClr val="E6E8EB"/>
-                      </a:solidFill>
-                    </a:lnT>
-                    <a:lnB w="9525">
-                      <a:solidFill>
-                        <a:srgbClr val="E6E8EB"/>
-                      </a:solidFill>
-                    </a:lnB>
-                    <a:noFill/>
-                  </a:tcPr>
-                </a:tc>
-                <a:tc rowSpan="2">
-                  <a:txBody>
-                    <a:bodyPr wrap="square"/>
-                    <a:lstStyle/>
-                    <a:p>
-                      <a:pPr algn="l">
-                        <a:defRPr sz="1050"/>
-                      </a:pPr>
-                      <a:r>
-                        <a:rPr sz="1050" b="1">
-                          <a:solidFill>
-                            <a:srgbClr val="11181C"/>
-                          </a:solidFill>
-                          <a:latin typeface="Arial"/>
-                        </a:rPr>
-                        <a:t>Sell a ready-to-work package</a:t>
-                      </a:r>
-                      <a:endParaRPr sz="1050"/>
-                    </a:p>
-                  </a:txBody>
-                  <a:tcPr marL="50800" marR="50800" marT="25400" marB="25400" anchor="ctr">
-                    <a:lnL w="9525">
-                      <a:solidFill>
-                        <a:srgbClr val="E6E8EB"/>
-                      </a:solidFill>
-                    </a:lnL>
-                    <a:lnR w="9525">
-                      <a:solidFill>
-                        <a:srgbClr val="E6E8EB"/>
-                      </a:solidFill>
-                    </a:lnR>
-                    <a:lnT w="9525">
-                      <a:solidFill>
-                        <a:srgbClr val="E6E8EB"/>
-                      </a:solidFill>
-                    </a:lnT>
-                    <a:lnB w="9525">
-                      <a:solidFill>
-                        <a:srgbClr val="E6E8EB"/>
-                      </a:solidFill>
-                    </a:lnB>
-                    <a:noFill/>
-                  </a:tcPr>
-                </a:tc>
-                <a:tc>
-                  <a:txBody>
-                    <a:bodyPr wrap="square"/>
-                    <a:lstStyle/>
-                    <a:p>
-                      <a:pPr algn="l">
-                        <a:defRPr sz="950"/>
-                      </a:pPr>
-                      <a:r>
-                        <a:rPr sz="950" b="1">
-                          <a:solidFill>
-                            <a:srgbClr val="11181C"/>
-                          </a:solidFill>
-                          <a:latin typeface="Arial"/>
-                        </a:rPr>
-                        <a:t>Package</a:t>
-                      </a:r>
-                      <a:endParaRPr sz="950"/>
-                    </a:p>
-                  </a:txBody>
-                  <a:tcPr marL="50800" marR="50800" marT="25400" marB="25400" anchor="ctr">
-                    <a:lnL w="9525">
-                      <a:solidFill>
-                        <a:srgbClr val="E6E8EB"/>
-                      </a:solidFill>
-                    </a:lnL>
-                    <a:lnR w="9525">
-                      <a:solidFill>
-                        <a:srgbClr val="E6E8EB"/>
-                      </a:solidFill>
-                    </a:lnR>
-                    <a:lnT w="9525">
-                      <a:solidFill>
-                        <a:srgbClr val="E6E8EB"/>
-                      </a:solidFill>
-                    </a:lnT>
-                    <a:lnB w="9525">
-                      <a:solidFill>
-                        <a:srgbClr val="E6E8EB"/>
-                      </a:solidFill>
-                    </a:lnB>
-                    <a:noFill/>
-                  </a:tcPr>
-                </a:tc>
-                <a:tc>
-                  <a:txBody>
-                    <a:bodyPr wrap="square"/>
-                    <a:lstStyle/>
-                    <a:p>
-                      <a:pPr algn="l">
-                        <a:defRPr sz="950"/>
-                      </a:pPr>
-                      <a:r>
-                        <a:rPr sz="950" b="0">
-                          <a:solidFill>
-                            <a:srgbClr val="11181C"/>
-                          </a:solidFill>
-                          <a:latin typeface="Arial"/>
-                        </a:rPr>
-                        <a:t>Crane + flatdeck + installation as one offer; add a 2-year warranty on Ferrari.</a:t>
-                      </a:r>
-                      <a:endParaRPr sz="950"/>
-                    </a:p>
-                  </a:txBody>
-                  <a:tcPr marL="50800" marR="50800" marT="25400" marB="25400" anchor="ctr">
-                    <a:lnL w="9525">
-                      <a:solidFill>
-                        <a:srgbClr val="E6E8EB"/>
-                      </a:solidFill>
-                    </a:lnL>
-                    <a:lnR w="9525">
-                      <a:solidFill>
-                        <a:srgbClr val="E6E8EB"/>
-                      </a:solidFill>
-                    </a:lnR>
-                    <a:lnT w="9525">
-                      <a:solidFill>
-                        <a:srgbClr val="E6E8EB"/>
-                      </a:solidFill>
-                    </a:lnT>
-                    <a:lnB w="9525">
-                      <a:solidFill>
-                        <a:srgbClr val="E6E8EB"/>
-                      </a:solidFill>
-                    </a:lnB>
-                    <a:noFill/>
-                  </a:tcPr>
-                </a:tc>
-              </a:tr>
-              <a:tr h="323850">
-                <a:tc vMerge="1">
-                  <a:txBody>
-                    <a:bodyPr/>
-                    <a:lstStyle/>
-                    <a:p/>
-                  </a:txBody>
-                  <a:tcPr>
-                    <a:lnL w="9525">
-                      <a:solidFill>
-                        <a:srgbClr val="E6E8EB"/>
-                      </a:solidFill>
-                    </a:lnL>
-                    <a:lnR w="9525">
-                      <a:solidFill>
-                        <a:srgbClr val="E6E8EB"/>
-                      </a:solidFill>
-                    </a:lnR>
-                    <a:lnT w="9525">
-                      <a:solidFill>
-                        <a:srgbClr val="E6E8EB"/>
-                      </a:solidFill>
-                    </a:lnT>
-                    <a:lnB w="9525">
-                      <a:solidFill>
-                        <a:srgbClr val="E6E8EB"/>
-                      </a:solidFill>
-                    </a:lnB>
-                  </a:tcPr>
-                </a:tc>
-                <a:tc vMerge="1">
-                  <a:txBody>
-                    <a:bodyPr/>
-                    <a:lstStyle/>
-                    <a:p/>
-                  </a:txBody>
-                  <a:tcPr>
-                    <a:lnL w="9525">
-                      <a:solidFill>
-                        <a:srgbClr val="E6E8EB"/>
-                      </a:solidFill>
-                    </a:lnL>
-                    <a:lnR w="9525">
-                      <a:solidFill>
-                        <a:srgbClr val="E6E8EB"/>
-                      </a:solidFill>
-                    </a:lnR>
-                    <a:lnT w="9525">
-                      <a:solidFill>
-                        <a:srgbClr val="E6E8EB"/>
-                      </a:solidFill>
-                    </a:lnT>
-                    <a:lnB w="9525">
-                      <a:solidFill>
-                        <a:srgbClr val="E6E8EB"/>
-                      </a:solidFill>
-                    </a:lnB>
-                  </a:tcPr>
-                </a:tc>
-                <a:tc>
-                  <a:txBody>
-                    <a:bodyPr wrap="square"/>
-                    <a:lstStyle/>
-                    <a:p>
-                      <a:pPr algn="l">
-                        <a:defRPr sz="950"/>
-                      </a:pPr>
-                      <a:r>
-                        <a:rPr sz="950" b="1">
-                          <a:solidFill>
-                            <a:srgbClr val="11181C"/>
-                          </a:solidFill>
-                          <a:latin typeface="Arial"/>
-                        </a:rPr>
-                        <a:t>Exhibition and visits</a:t>
-                      </a:r>
-                      <a:endParaRPr sz="950"/>
-                    </a:p>
-                  </a:txBody>
-                  <a:tcPr marL="50800" marR="50800" marT="25400" marB="25400" anchor="ctr">
-                    <a:lnL w="9525">
-                      <a:solidFill>
-                        <a:srgbClr val="E6E8EB"/>
-                      </a:solidFill>
-                    </a:lnL>
-                    <a:lnR w="9525">
-                      <a:solidFill>
-                        <a:srgbClr val="E6E8EB"/>
-                      </a:solidFill>
-                    </a:lnR>
-                    <a:lnT w="9525">
-                      <a:solidFill>
-                        <a:srgbClr val="E6E8EB"/>
-                      </a:solidFill>
-                    </a:lnT>
-                    <a:lnB w="9525">
-                      <a:solidFill>
-                        <a:srgbClr val="E6E8EB"/>
-                      </a:solidFill>
-                    </a:lnB>
-                    <a:noFill/>
-                  </a:tcPr>
-                </a:tc>
-                <a:tc>
-                  <a:txBody>
-                    <a:bodyPr wrap="square"/>
-                    <a:lstStyle/>
-                    <a:p>
-                      <a:pPr algn="l">
-                        <a:defRPr sz="950"/>
-                      </a:pPr>
-                      <a:r>
-                        <a:rPr sz="950" b="0">
-                          <a:solidFill>
-                            <a:srgbClr val="11181C"/>
-                          </a:solidFill>
-                          <a:latin typeface="Arial"/>
-                        </a:rPr>
-                        <a:t>Show 268 A4 and FBR450R A4 at mining exhibitions and customer visits with a Marcom sales kit.</a:t>
+                        <a:t>Crane + flatdeck + installation (+2-year warranty on Ferrari). Exhibitions and customer visits with a Marcom sales kit.</a:t>
                       </a:r>
                       <a:endParaRPr sz="950"/>
                     </a:p>
@@ -7308,41 +5431,6 @@
           </a:graphicData>
         </a:graphic>
       </p:graphicFrame>
-      <p:sp>
-        <p:nvSpPr>
-          <p:cNvPr id="11" name="TextBox 10"/>
-          <p:cNvSpPr txBox="1"/>
-          <p:nvPr/>
-        </p:nvSpPr>
-        <p:spPr>
-          <a:xfrm>
-            <a:off x="533400" y="6305550"/>
-            <a:ext cx="11125200" cy="190500"/>
-          </a:xfrm>
-          <a:prstGeom prst="rect">
-            <a:avLst/>
-          </a:prstGeom>
-          <a:noFill/>
-        </p:spPr>
-        <p:txBody>
-          <a:bodyPr wrap="square" lIns="0" rIns="0" tIns="0" bIns="0" anchor="t">
-            <a:spAutoFit/>
-          </a:bodyPr>
-          <a:lstStyle/>
-          <a:p>
-            <a:pPr algn="l"/>
-            <a:r>
-              <a:rPr sz="850" b="0" i="0">
-                <a:solidFill>
-                  <a:srgbClr val="697177"/>
-                </a:solidFill>
-                <a:latin typeface="Arial"/>
-              </a:rPr>
-              <a:t>* Meaning of PB, RS and ECM to be confirmed with the F.lli Ferrari datasheet. Price gaps vs the Top 1 model in each tm tier (2023 – Aug 2026 import prices).</a:t>
-            </a:r>
-          </a:p>
-        </p:txBody>
-      </p:sp>
     </p:spTree>
   </p:cSld>
   <p:clrMapOvr>
